--- a/LDA_产业共建路演.pptx
+++ b/LDA_产业共建路演.pptx
@@ -20,9 +20,10 @@
     <p:sldId id="268" r:id="rId14"/>
     <p:sldId id="269" r:id="rId15"/>
     <p:sldId id="270" r:id="rId16"/>
+    <p:sldId id="271" r:id="rId17"/>
   </p:sldIdLst>
   <p:notesMasterIdLst>
-    <p:notesMasterId r:id="rId17"/>
+    <p:notesMasterId r:id="rId18"/>
   </p:notesMasterIdLst>
   <p:sldSz cx="12192000" cy="6858000"/>
   <p:notesSz cx="6858000" cy="12192000"/>
@@ -1068,6 +1069,94 @@
             <a:fld id="{F7021451-1387-4CA6-816F-3879F97B5CBC}" type="slidenum">
               <a:rPr lang="en-US"/>
               <a:t>15</a:t>
+            </a:fld>
+            <a:endParaRPr lang="en-US"/>
+          </a:p>
+        </p:txBody>
+      </p:sp>
+    </p:spTree>
+    <p:extLst>
+      <p:ext uri="{BB962C8B-B14F-4D97-AF65-F5344CB8AC3E}">
+        <p14:creationId xmlns:p14="http://schemas.microsoft.com/office/powerpoint/2010/main" val="1024086991"/>
+      </p:ext>
+    </p:extLst>
+  </p:cSld>
+  <p:clrMapOvr>
+    <a:masterClrMapping/>
+  </p:clrMapOvr>
+</p:notes>
+</file>
+
+<file path=ppt/notesSlides/notesSlide16.xml><?xml version="1.0" encoding="utf-8"?>
+<p:notes xmlns:a="http://schemas.openxmlformats.org/drawingml/2006/main" xmlns:r="http://schemas.openxmlformats.org/officeDocument/2006/relationships" xmlns:p="http://schemas.openxmlformats.org/presentationml/2006/main">
+  <p:cSld>
+    <p:spTree>
+      <p:nvGrpSpPr>
+        <p:cNvPr id="1" name=""/>
+        <p:cNvGrpSpPr/>
+        <p:nvPr/>
+      </p:nvGrpSpPr>
+      <p:grpSpPr>
+        <a:xfrm>
+          <a:off x="0" y="0"/>
+          <a:ext cx="0" cy="0"/>
+          <a:chOff x="0" y="0"/>
+          <a:chExt cx="0" cy="0"/>
+        </a:xfrm>
+      </p:grpSpPr>
+      <p:sp>
+        <p:nvSpPr>
+          <p:cNvPr id="2" name="Slide Image Placeholder 1"/>
+          <p:cNvSpPr>
+            <a:spLocks noGrp="1" noRot="1" noChangeAspect="1"/>
+          </p:cNvSpPr>
+          <p:nvPr>
+            <p:ph type="sldImg"/>
+          </p:nvPr>
+        </p:nvSpPr>
+        <p:spPr/>
+      </p:sp>
+      <p:sp>
+        <p:nvSpPr>
+          <p:cNvPr id="3" name="Notes Placeholder 2"/>
+          <p:cNvSpPr>
+            <a:spLocks noGrp="1"/>
+          </p:cNvSpPr>
+          <p:nvPr>
+            <p:ph type="body" idx="1"/>
+          </p:nvPr>
+        </p:nvSpPr>
+        <p:spPr/>
+        <p:txBody>
+          <a:bodyPr/>
+          <a:lstStyle/>
+          <a:p>
+            <a:r>
+              <a:rPr lang="en-US" dirty="0"/>
+              <a:t/>
+            </a:r>
+            <a:endParaRPr lang="en-US" dirty="0"/>
+          </a:p>
+        </p:txBody>
+      </p:sp>
+      <p:sp>
+        <p:nvSpPr>
+          <p:cNvPr id="4" name="Slide Number Placeholder 3"/>
+          <p:cNvSpPr>
+            <a:spLocks noGrp="1"/>
+          </p:cNvSpPr>
+          <p:nvPr>
+            <p:ph type="sldNum" sz="quarter" idx="10"/>
+          </p:nvPr>
+        </p:nvSpPr>
+        <p:spPr/>
+        <p:txBody>
+          <a:bodyPr/>
+          <a:lstStyle/>
+          <a:p>
+            <a:fld id="{F7021451-1387-4CA6-816F-3879F97B5CBC}" type="slidenum">
+              <a:rPr lang="en-US"/>
+              <a:t>16</a:t>
             </a:fld>
             <a:endParaRPr lang="en-US"/>
           </a:p>
@@ -2377,6 +2466,634 @@
     <p:bg>
       <p:bgPr>
         <a:solidFill>
+          <a:srgbClr val="13203A"/>
+        </a:solidFill>
+      </p:bgPr>
+    </p:bg>
+    <p:spTree>
+      <p:nvGrpSpPr>
+        <p:cNvPr id="1" name=""/>
+        <p:cNvGrpSpPr/>
+        <p:nvPr/>
+      </p:nvGrpSpPr>
+      <p:grpSpPr>
+        <a:xfrm>
+          <a:off x="0" y="0"/>
+          <a:ext cx="0" cy="0"/>
+          <a:chOff x="0" y="0"/>
+          <a:chExt cx="0" cy="0"/>
+        </a:xfrm>
+      </p:grpSpPr>
+      <p:sp>
+        <p:nvSpPr>
+          <p:cNvPr id="2" name="Shape 0"/>
+          <p:cNvSpPr/>
+          <p:nvPr/>
+        </p:nvSpPr>
+        <p:spPr>
+          <a:xfrm>
+            <a:off x="640080" y="566928"/>
+            <a:ext cx="164592" cy="384048"/>
+          </a:xfrm>
+          <a:prstGeom prst="rect">
+            <a:avLst/>
+          </a:prstGeom>
+          <a:solidFill>
+            <a:srgbClr val="2E75B6"/>
+          </a:solidFill>
+          <a:ln/>
+        </p:spPr>
+      </p:sp>
+      <p:sp>
+        <p:nvSpPr>
+          <p:cNvPr id="3" name="Text 1"/>
+          <p:cNvSpPr/>
+          <p:nvPr/>
+        </p:nvSpPr>
+        <p:spPr>
+          <a:xfrm>
+            <a:off x="896112" y="548640"/>
+            <a:ext cx="8229600" cy="420624"/>
+          </a:xfrm>
+          <a:prstGeom prst="rect">
+            <a:avLst/>
+          </a:prstGeom>
+          <a:noFill/>
+          <a:ln/>
+        </p:spPr>
+        <p:txBody>
+          <a:bodyPr wrap="square" lIns="0" tIns="0" rIns="0" bIns="0" rtlCol="0" anchor="ctr"/>
+          <a:lstStyle/>
+          <a:p>
+            <a:pPr algn="l" indent="0" marL="0">
+              <a:buNone/>
+            </a:pPr>
+            <a:r>
+              <a:rPr lang="en-US" sz="1400" b="1" spc="200" kern="0" dirty="0">
+                <a:solidFill>
+                  <a:srgbClr val="2E75B6"/>
+                </a:solidFill>
+                <a:latin typeface="Calibri" pitchFamily="34" charset="0"/>
+                <a:ea typeface="Calibri" pitchFamily="34" charset="-122"/>
+                <a:cs typeface="Calibri" pitchFamily="34" charset="-120"/>
+              </a:rPr>
+              <a:t>生态共建</a:t>
+            </a:r>
+            <a:endParaRPr lang="en-US" sz="1400" dirty="0"/>
+          </a:p>
+        </p:txBody>
+      </p:sp>
+      <p:sp>
+        <p:nvSpPr>
+          <p:cNvPr id="4" name="Text 2"/>
+          <p:cNvSpPr/>
+          <p:nvPr/>
+        </p:nvSpPr>
+        <p:spPr>
+          <a:xfrm>
+            <a:off x="640080" y="1143000"/>
+            <a:ext cx="10881360" cy="1005840"/>
+          </a:xfrm>
+          <a:prstGeom prst="rect">
+            <a:avLst/>
+          </a:prstGeom>
+          <a:noFill/>
+          <a:ln/>
+        </p:spPr>
+        <p:txBody>
+          <a:bodyPr wrap="square" lIns="0" tIns="0" rIns="0" bIns="0" rtlCol="0" anchor="t"/>
+          <a:lstStyle/>
+          <a:p>
+            <a:pPr algn="l" indent="0" marL="0">
+              <a:buNone/>
+            </a:pPr>
+            <a:r>
+              <a:rPr lang="en-US" sz="3400" b="1" dirty="0">
+                <a:solidFill>
+                  <a:srgbClr val="FFFFFF"/>
+                </a:solidFill>
+                <a:latin typeface="Georgia" pitchFamily="34" charset="0"/>
+                <a:ea typeface="Georgia" pitchFamily="34" charset="-122"/>
+                <a:cs typeface="Georgia" pitchFamily="34" charset="-120"/>
+              </a:rPr>
+              <a:t>双引擎：学生 + 退休专家 = 开源人力核心</a:t>
+            </a:r>
+            <a:endParaRPr lang="en-US" sz="3400" dirty="0"/>
+          </a:p>
+        </p:txBody>
+      </p:sp>
+      <p:sp>
+        <p:nvSpPr>
+          <p:cNvPr id="5" name="Shape 3"/>
+          <p:cNvSpPr/>
+          <p:nvPr/>
+        </p:nvSpPr>
+        <p:spPr>
+          <a:xfrm>
+            <a:off x="640080" y="2194560"/>
+            <a:ext cx="5349240" cy="3291840"/>
+          </a:xfrm>
+          <a:prstGeom prst="roundRect">
+            <a:avLst>
+              <a:gd name="adj" fmla="val 2222"/>
+            </a:avLst>
+          </a:prstGeom>
+          <a:solidFill>
+            <a:srgbClr val="1B2C4F"/>
+          </a:solidFill>
+          <a:ln/>
+          <a:effectLst>
+            <a:outerShdw sx="100000" sy="100000" kx="0" ky="0" algn="bl" rotWithShape="0" blurRad="101600" dist="38100" dir="8100000">
+              <a:srgbClr val="000000">
+                <a:alpha val="18000"/>
+              </a:srgbClr>
+            </a:outerShdw>
+          </a:effectLst>
+        </p:spPr>
+      </p:sp>
+      <p:sp>
+        <p:nvSpPr>
+          <p:cNvPr id="6" name="Shape 4"/>
+          <p:cNvSpPr/>
+          <p:nvPr/>
+        </p:nvSpPr>
+        <p:spPr>
+          <a:xfrm>
+            <a:off x="640080" y="2194560"/>
+            <a:ext cx="128016" cy="3291840"/>
+          </a:xfrm>
+          <a:prstGeom prst="rect">
+            <a:avLst/>
+          </a:prstGeom>
+          <a:solidFill>
+            <a:srgbClr val="22B8CF"/>
+          </a:solidFill>
+          <a:ln/>
+        </p:spPr>
+      </p:sp>
+      <p:sp>
+        <p:nvSpPr>
+          <p:cNvPr id="7" name="Shape 5"/>
+          <p:cNvSpPr/>
+          <p:nvPr/>
+        </p:nvSpPr>
+        <p:spPr>
+          <a:xfrm>
+            <a:off x="1005840" y="2560320"/>
+            <a:ext cx="914400" cy="914400"/>
+          </a:xfrm>
+          <a:prstGeom prst="ellipse">
+            <a:avLst/>
+          </a:prstGeom>
+          <a:solidFill>
+            <a:srgbClr val="2E75B6"/>
+          </a:solidFill>
+          <a:ln/>
+        </p:spPr>
+      </p:sp>
+      <p:pic>
+        <p:nvPicPr>
+          <p:cNvPr id="8" name="Image 0" descr="preencoded.png">    </p:cNvPr>
+          <p:cNvPicPr>
+            <a:picLocks noChangeAspect="1"/>
+          </p:cNvPicPr>
+          <p:nvPr/>
+        </p:nvPicPr>
+        <p:blipFill>
+          <a:blip r:embed="rId1"/>
+          <a:stretch>
+            <a:fillRect/>
+          </a:stretch>
+        </p:blipFill>
+        <p:spPr>
+          <a:xfrm>
+            <a:off x="1234440" y="2788920"/>
+            <a:ext cx="457200" cy="457200"/>
+          </a:xfrm>
+          <a:prstGeom prst="rect">
+            <a:avLst/>
+          </a:prstGeom>
+        </p:spPr>
+      </p:pic>
+      <p:sp>
+        <p:nvSpPr>
+          <p:cNvPr id="9" name="Text 6"/>
+          <p:cNvSpPr/>
+          <p:nvPr/>
+        </p:nvSpPr>
+        <p:spPr>
+          <a:xfrm>
+            <a:off x="2103120" y="2606040"/>
+            <a:ext cx="3703320" cy="457200"/>
+          </a:xfrm>
+          <a:prstGeom prst="rect">
+            <a:avLst/>
+          </a:prstGeom>
+          <a:noFill/>
+          <a:ln/>
+        </p:spPr>
+        <p:txBody>
+          <a:bodyPr wrap="square" lIns="0" tIns="0" rIns="0" bIns="0" rtlCol="0" anchor="ctr"/>
+          <a:lstStyle/>
+          <a:p>
+            <a:pPr algn="l" indent="0" marL="0">
+              <a:buNone/>
+            </a:pPr>
+            <a:r>
+              <a:rPr lang="en-US" sz="2200" b="1" dirty="0">
+                <a:solidFill>
+                  <a:srgbClr val="FFFFFF"/>
+                </a:solidFill>
+                <a:latin typeface="Georgia" pitchFamily="34" charset="0"/>
+                <a:ea typeface="Georgia" pitchFamily="34" charset="-122"/>
+                <a:cs typeface="Georgia" pitchFamily="34" charset="-120"/>
+              </a:rPr>
+              <a:t>学生引擎</a:t>
+            </a:r>
+            <a:endParaRPr lang="en-US" sz="2200" dirty="0"/>
+          </a:p>
+        </p:txBody>
+      </p:sp>
+      <p:sp>
+        <p:nvSpPr>
+          <p:cNvPr id="10" name="Text 7"/>
+          <p:cNvSpPr/>
+          <p:nvPr/>
+        </p:nvSpPr>
+        <p:spPr>
+          <a:xfrm>
+            <a:off x="2103120" y="3108960"/>
+            <a:ext cx="3703320" cy="365760"/>
+          </a:xfrm>
+          <a:prstGeom prst="rect">
+            <a:avLst/>
+          </a:prstGeom>
+          <a:noFill/>
+          <a:ln/>
+        </p:spPr>
+        <p:txBody>
+          <a:bodyPr wrap="square" lIns="0" tIns="0" rIns="0" bIns="0" rtlCol="0" anchor="ctr"/>
+          <a:lstStyle/>
+          <a:p>
+            <a:pPr algn="l" indent="0" marL="0">
+              <a:buNone/>
+            </a:pPr>
+            <a:r>
+              <a:rPr lang="en-US" sz="1400" i="1" dirty="0">
+                <a:solidFill>
+                  <a:srgbClr val="22B8CF"/>
+                </a:solidFill>
+                <a:latin typeface="Calibri" pitchFamily="34" charset="0"/>
+                <a:ea typeface="Calibri" pitchFamily="34" charset="-122"/>
+                <a:cs typeface="Calibri" pitchFamily="34" charset="-120"/>
+              </a:rPr>
+              <a:t>开源贡献生力军</a:t>
+            </a:r>
+            <a:endParaRPr lang="en-US" sz="1400" dirty="0"/>
+          </a:p>
+        </p:txBody>
+      </p:sp>
+      <p:sp>
+        <p:nvSpPr>
+          <p:cNvPr id="11" name="Text 8"/>
+          <p:cNvSpPr/>
+          <p:nvPr/>
+        </p:nvSpPr>
+        <p:spPr>
+          <a:xfrm>
+            <a:off x="1005840" y="3749040"/>
+            <a:ext cx="4617720" cy="1554480"/>
+          </a:xfrm>
+          <a:prstGeom prst="rect">
+            <a:avLst/>
+          </a:prstGeom>
+          <a:noFill/>
+          <a:ln/>
+        </p:spPr>
+        <p:txBody>
+          <a:bodyPr wrap="square" lIns="0" tIns="0" rIns="0" bIns="0" rtlCol="0" anchor="t"/>
+          <a:lstStyle/>
+          <a:p>
+            <a:pPr algn="l" indent="0" marL="0">
+              <a:buNone/>
+            </a:pPr>
+            <a:r>
+              <a:rPr lang="en-US" sz="1450" dirty="0">
+                <a:solidFill>
+                  <a:srgbClr val="CADCFC"/>
+                </a:solidFill>
+                <a:latin typeface="Calibri" pitchFamily="34" charset="0"/>
+                <a:ea typeface="Calibri" pitchFamily="34" charset="-122"/>
+                <a:cs typeface="Calibri" pitchFamily="34" charset="-120"/>
+              </a:rPr>
+              <a:t>光电 / 微电子 / 量子 / 计算方向硕博与本科生。把“自然语言 → GDSII”做成毕设 / 科研课题 / 竞赛题 —— 契合刚需。</a:t>
+            </a:r>
+            <a:endParaRPr lang="en-US" sz="1450" dirty="0"/>
+          </a:p>
+        </p:txBody>
+      </p:sp>
+      <p:sp>
+        <p:nvSpPr>
+          <p:cNvPr id="12" name="Shape 9"/>
+          <p:cNvSpPr/>
+          <p:nvPr/>
+        </p:nvSpPr>
+        <p:spPr>
+          <a:xfrm>
+            <a:off x="6355080" y="2194560"/>
+            <a:ext cx="5349240" cy="3291840"/>
+          </a:xfrm>
+          <a:prstGeom prst="roundRect">
+            <a:avLst>
+              <a:gd name="adj" fmla="val 2222"/>
+            </a:avLst>
+          </a:prstGeom>
+          <a:solidFill>
+            <a:srgbClr val="1B2C4F"/>
+          </a:solidFill>
+          <a:ln/>
+          <a:effectLst>
+            <a:outerShdw sx="100000" sy="100000" kx="0" ky="0" algn="bl" rotWithShape="0" blurRad="101600" dist="38100" dir="8100000">
+              <a:srgbClr val="000000">
+                <a:alpha val="18000"/>
+              </a:srgbClr>
+            </a:outerShdw>
+          </a:effectLst>
+        </p:spPr>
+      </p:sp>
+      <p:sp>
+        <p:nvSpPr>
+          <p:cNvPr id="13" name="Shape 10"/>
+          <p:cNvSpPr/>
+          <p:nvPr/>
+        </p:nvSpPr>
+        <p:spPr>
+          <a:xfrm>
+            <a:off x="6355080" y="2194560"/>
+            <a:ext cx="128016" cy="3291840"/>
+          </a:xfrm>
+          <a:prstGeom prst="rect">
+            <a:avLst/>
+          </a:prstGeom>
+          <a:solidFill>
+            <a:srgbClr val="22B8CF"/>
+          </a:solidFill>
+          <a:ln/>
+        </p:spPr>
+      </p:sp>
+      <p:sp>
+        <p:nvSpPr>
+          <p:cNvPr id="14" name="Shape 11"/>
+          <p:cNvSpPr/>
+          <p:nvPr/>
+        </p:nvSpPr>
+        <p:spPr>
+          <a:xfrm>
+            <a:off x="6720840" y="2560320"/>
+            <a:ext cx="914400" cy="914400"/>
+          </a:xfrm>
+          <a:prstGeom prst="ellipse">
+            <a:avLst/>
+          </a:prstGeom>
+          <a:solidFill>
+            <a:srgbClr val="2E75B6"/>
+          </a:solidFill>
+          <a:ln/>
+        </p:spPr>
+      </p:sp>
+      <p:pic>
+        <p:nvPicPr>
+          <p:cNvPr id="15" name="Image 1" descr="preencoded.png">    </p:cNvPr>
+          <p:cNvPicPr>
+            <a:picLocks noChangeAspect="1"/>
+          </p:cNvPicPr>
+          <p:nvPr/>
+        </p:nvPicPr>
+        <p:blipFill>
+          <a:blip r:embed="rId2"/>
+          <a:stretch>
+            <a:fillRect/>
+          </a:stretch>
+        </p:blipFill>
+        <p:spPr>
+          <a:xfrm>
+            <a:off x="6949440" y="2788920"/>
+            <a:ext cx="457200" cy="457200"/>
+          </a:xfrm>
+          <a:prstGeom prst="rect">
+            <a:avLst/>
+          </a:prstGeom>
+        </p:spPr>
+      </p:pic>
+      <p:sp>
+        <p:nvSpPr>
+          <p:cNvPr id="16" name="Text 12"/>
+          <p:cNvSpPr/>
+          <p:nvPr/>
+        </p:nvSpPr>
+        <p:spPr>
+          <a:xfrm>
+            <a:off x="7818120" y="2606040"/>
+            <a:ext cx="3703320" cy="457200"/>
+          </a:xfrm>
+          <a:prstGeom prst="rect">
+            <a:avLst/>
+          </a:prstGeom>
+          <a:noFill/>
+          <a:ln/>
+        </p:spPr>
+        <p:txBody>
+          <a:bodyPr wrap="square" lIns="0" tIns="0" rIns="0" bIns="0" rtlCol="0" anchor="ctr"/>
+          <a:lstStyle/>
+          <a:p>
+            <a:pPr algn="l" indent="0" marL="0">
+              <a:buNone/>
+            </a:pPr>
+            <a:r>
+              <a:rPr lang="en-US" sz="2200" b="1" dirty="0">
+                <a:solidFill>
+                  <a:srgbClr val="FFFFFF"/>
+                </a:solidFill>
+                <a:latin typeface="Georgia" pitchFamily="34" charset="0"/>
+                <a:ea typeface="Georgia" pitchFamily="34" charset="-122"/>
+                <a:cs typeface="Georgia" pitchFamily="34" charset="-120"/>
+              </a:rPr>
+              <a:t>退休专家引擎</a:t>
+            </a:r>
+            <a:endParaRPr lang="en-US" sz="2200" dirty="0"/>
+          </a:p>
+        </p:txBody>
+      </p:sp>
+      <p:sp>
+        <p:nvSpPr>
+          <p:cNvPr id="17" name="Text 13"/>
+          <p:cNvSpPr/>
+          <p:nvPr/>
+        </p:nvSpPr>
+        <p:spPr>
+          <a:xfrm>
+            <a:off x="7818120" y="3108960"/>
+            <a:ext cx="3703320" cy="365760"/>
+          </a:xfrm>
+          <a:prstGeom prst="rect">
+            <a:avLst/>
+          </a:prstGeom>
+          <a:noFill/>
+          <a:ln/>
+        </p:spPr>
+        <p:txBody>
+          <a:bodyPr wrap="square" lIns="0" tIns="0" rIns="0" bIns="0" rtlCol="0" anchor="ctr"/>
+          <a:lstStyle/>
+          <a:p>
+            <a:pPr algn="l" indent="0" marL="0">
+              <a:buNone/>
+            </a:pPr>
+            <a:r>
+              <a:rPr lang="en-US" sz="1400" i="1" dirty="0">
+                <a:solidFill>
+                  <a:srgbClr val="22B8CF"/>
+                </a:solidFill>
+                <a:latin typeface="Calibri" pitchFamily="34" charset="0"/>
+                <a:ea typeface="Calibri" pitchFamily="34" charset="-122"/>
+                <a:cs typeface="Calibri" pitchFamily="34" charset="-120"/>
+              </a:rPr>
+              <a:t>顾问 / 导师 / 质量背书</a:t>
+            </a:r>
+            <a:endParaRPr lang="en-US" sz="1400" dirty="0"/>
+          </a:p>
+        </p:txBody>
+      </p:sp>
+      <p:sp>
+        <p:nvSpPr>
+          <p:cNvPr id="18" name="Text 14"/>
+          <p:cNvSpPr/>
+          <p:nvPr/>
+        </p:nvSpPr>
+        <p:spPr>
+          <a:xfrm>
+            <a:off x="6720840" y="3749040"/>
+            <a:ext cx="4617720" cy="1554480"/>
+          </a:xfrm>
+          <a:prstGeom prst="rect">
+            <a:avLst/>
+          </a:prstGeom>
+          <a:noFill/>
+          <a:ln/>
+        </p:spPr>
+        <p:txBody>
+          <a:bodyPr wrap="square" lIns="0" tIns="0" rIns="0" bIns="0" rtlCol="0" anchor="t"/>
+          <a:lstStyle/>
+          <a:p>
+            <a:pPr algn="l" indent="0" marL="0">
+              <a:buNone/>
+            </a:pPr>
+            <a:r>
+              <a:rPr lang="en-US" sz="1450" dirty="0">
+                <a:solidFill>
+                  <a:srgbClr val="CADCFC"/>
+                </a:solidFill>
+                <a:latin typeface="Calibri" pitchFamily="34" charset="0"/>
+                <a:ea typeface="Calibri" pitchFamily="34" charset="-122"/>
+                <a:cs typeface="Calibri" pitchFamily="34" charset="-120"/>
+              </a:rPr>
+              <a:t>EDA 老炮、光电半导体退休研究员、高校退休博导。有资源、有情怀、有时间，退休再发挥余热，把关基准、为内核背书。</a:t>
+            </a:r>
+            <a:endParaRPr lang="en-US" sz="1450" dirty="0"/>
+          </a:p>
+        </p:txBody>
+      </p:sp>
+      <p:sp>
+        <p:nvSpPr>
+          <p:cNvPr id="19" name="Text 15"/>
+          <p:cNvSpPr/>
+          <p:nvPr/>
+        </p:nvSpPr>
+        <p:spPr>
+          <a:xfrm>
+            <a:off x="640080" y="6400800"/>
+            <a:ext cx="8229600" cy="274320"/>
+          </a:xfrm>
+          <a:prstGeom prst="rect">
+            <a:avLst/>
+          </a:prstGeom>
+          <a:noFill/>
+          <a:ln/>
+        </p:spPr>
+        <p:txBody>
+          <a:bodyPr wrap="square" lIns="0" tIns="0" rIns="0" bIns="0" rtlCol="0" anchor="ctr"/>
+          <a:lstStyle/>
+          <a:p>
+            <a:pPr algn="l" indent="0" marL="0">
+              <a:buNone/>
+            </a:pPr>
+            <a:r>
+              <a:rPr lang="en-US" sz="1000" dirty="0">
+                <a:solidFill>
+                  <a:srgbClr val="9FB0C9"/>
+                </a:solidFill>
+                <a:latin typeface="Calibri" pitchFamily="34" charset="0"/>
+                <a:ea typeface="Calibri" pitchFamily="34" charset="-122"/>
+                <a:cs typeface="Calibri" pitchFamily="34" charset="-120"/>
+              </a:rPr>
+              <a:t>LDA · 开源 / 自主可控 / Agent 原生 光·量子芯片设计底座</a:t>
+            </a:r>
+            <a:endParaRPr lang="en-US" sz="1000" dirty="0"/>
+          </a:p>
+        </p:txBody>
+      </p:sp>
+      <p:sp>
+        <p:nvSpPr>
+          <p:cNvPr id="20" name="Text 16"/>
+          <p:cNvSpPr/>
+          <p:nvPr/>
+        </p:nvSpPr>
+        <p:spPr>
+          <a:xfrm>
+            <a:off x="11155680" y="6400800"/>
+            <a:ext cx="548640" cy="274320"/>
+          </a:xfrm>
+          <a:prstGeom prst="rect">
+            <a:avLst/>
+          </a:prstGeom>
+          <a:noFill/>
+          <a:ln/>
+        </p:spPr>
+        <p:txBody>
+          <a:bodyPr wrap="square" lIns="0" tIns="0" rIns="0" bIns="0" rtlCol="0" anchor="ctr"/>
+          <a:lstStyle/>
+          <a:p>
+            <a:pPr algn="r" indent="0" marL="0">
+              <a:buNone/>
+            </a:pPr>
+            <a:r>
+              <a:rPr lang="en-US" sz="1000" dirty="0">
+                <a:solidFill>
+                  <a:srgbClr val="9FB0C9"/>
+                </a:solidFill>
+                <a:latin typeface="Calibri" pitchFamily="34" charset="0"/>
+                <a:ea typeface="Calibri" pitchFamily="34" charset="-122"/>
+                <a:cs typeface="Calibri" pitchFamily="34" charset="-120"/>
+              </a:rPr>
+              <a:t>9</a:t>
+            </a:r>
+            <a:endParaRPr lang="en-US" sz="1000" dirty="0"/>
+          </a:p>
+        </p:txBody>
+      </p:sp>
+    </p:spTree>
+  </p:cSld>
+  <p:clrMapOvr>
+    <a:masterClrMapping/>
+  </p:clrMapOvr>
+</p:sld>
+</file>
+
+<file path=ppt/slides/slide11.xml><?xml version="1.0" encoding="utf-8"?>
+<p:sld xmlns:a="http://schemas.openxmlformats.org/drawingml/2006/main" xmlns:r="http://schemas.openxmlformats.org/officeDocument/2006/relationships" xmlns:p="http://schemas.openxmlformats.org/presentationml/2006/main">
+  <p:cSld name="Slide 11">
+    <p:bg>
+      <p:bgPr>
+        <a:solidFill>
           <a:srgbClr val="F4F7FB"/>
         </a:solidFill>
       </p:bgPr>
@@ -3263,9 +3980,9 @@
 </p:sld>
 </file>
 
-<file path=ppt/slides/slide11.xml><?xml version="1.0" encoding="utf-8"?>
+<file path=ppt/slides/slide12.xml><?xml version="1.0" encoding="utf-8"?>
 <p:sld xmlns:a="http://schemas.openxmlformats.org/drawingml/2006/main" xmlns:r="http://schemas.openxmlformats.org/officeDocument/2006/relationships" xmlns:p="http://schemas.openxmlformats.org/presentationml/2006/main">
-  <p:cSld name="Slide 11">
+  <p:cSld name="Slide 12">
     <p:bg>
       <p:bgPr>
         <a:solidFill>
@@ -4377,9 +5094,9 @@
 </p:sld>
 </file>
 
-<file path=ppt/slides/slide12.xml><?xml version="1.0" encoding="utf-8"?>
+<file path=ppt/slides/slide13.xml><?xml version="1.0" encoding="utf-8"?>
 <p:sld xmlns:a="http://schemas.openxmlformats.org/drawingml/2006/main" xmlns:r="http://schemas.openxmlformats.org/officeDocument/2006/relationships" xmlns:p="http://schemas.openxmlformats.org/presentationml/2006/main">
-  <p:cSld name="Slide 12">
+  <p:cSld name="Slide 13">
     <p:bg>
       <p:bgPr>
         <a:solidFill>
@@ -5209,9 +5926,9 @@
 </p:sld>
 </file>
 
-<file path=ppt/slides/slide13.xml><?xml version="1.0" encoding="utf-8"?>
+<file path=ppt/slides/slide14.xml><?xml version="1.0" encoding="utf-8"?>
 <p:sld xmlns:a="http://schemas.openxmlformats.org/drawingml/2006/main" xmlns:r="http://schemas.openxmlformats.org/officeDocument/2006/relationships" xmlns:p="http://schemas.openxmlformats.org/presentationml/2006/main">
-  <p:cSld name="Slide 13">
+  <p:cSld name="Slide 14">
     <p:bg>
       <p:bgPr>
         <a:solidFill>
@@ -6282,9 +6999,9 @@
 </p:sld>
 </file>
 
-<file path=ppt/slides/slide14.xml><?xml version="1.0" encoding="utf-8"?>
+<file path=ppt/slides/slide15.xml><?xml version="1.0" encoding="utf-8"?>
 <p:sld xmlns:a="http://schemas.openxmlformats.org/drawingml/2006/main" xmlns:r="http://schemas.openxmlformats.org/officeDocument/2006/relationships" xmlns:p="http://schemas.openxmlformats.org/presentationml/2006/main">
-  <p:cSld name="Slide 14">
+  <p:cSld name="Slide 15">
     <p:bg>
       <p:bgPr>
         <a:solidFill>
@@ -7100,7 +7817,7 @@
                 <a:ea typeface="Calibri" pitchFamily="34" charset="-122"/>
                 <a:cs typeface="Calibri" pitchFamily="34" charset="-120"/>
               </a:rPr>
-              <a:t>14</a:t>
+              <a:t>15</a:t>
             </a:r>
             <a:endParaRPr lang="en-US" sz="1000" dirty="0"/>
           </a:p>
@@ -7114,9 +7831,9 @@
 </p:sld>
 </file>
 
-<file path=ppt/slides/slide15.xml><?xml version="1.0" encoding="utf-8"?>
+<file path=ppt/slides/slide16.xml><?xml version="1.0" encoding="utf-8"?>
 <p:sld xmlns:a="http://schemas.openxmlformats.org/drawingml/2006/main" xmlns:r="http://schemas.openxmlformats.org/officeDocument/2006/relationships" xmlns:p="http://schemas.openxmlformats.org/presentationml/2006/main">
-  <p:cSld name="Slide 15">
+  <p:cSld name="Slide 16">
     <p:bg>
       <p:bgPr>
         <a:solidFill>
@@ -12505,7 +13222,7 @@
                 <a:ea typeface="Calibri" pitchFamily="34" charset="-122"/>
                 <a:cs typeface="Calibri" pitchFamily="34" charset="-120"/>
               </a:rPr>
-              <a:t>护城河</a:t>
+              <a:t>已出片版图实证</a:t>
             </a:r>
             <a:endParaRPr lang="en-US" sz="1400" dirty="0"/>
           </a:p>
@@ -12544,7 +13261,7 @@
                 <a:ea typeface="Georgia" pitchFamily="34" charset="-122"/>
                 <a:cs typeface="Georgia" pitchFamily="34" charset="-120"/>
               </a:rPr>
-              <a:t>护城河 = 标准 + 生态 + PDK，而非某段代码</a:t>
+              <a:t>主权全链路 GDSII：7 例全部 DRC PASS + LVS ACCEPT（2026-09-21 增补）</a:t>
             </a:r>
             <a:endParaRPr lang="en-US" sz="3400" dirty="0"/>
           </a:p>
@@ -12558,53 +13275,37 @@
         </p:nvSpPr>
         <p:spPr>
           <a:xfrm>
-            <a:off x="640080" y="1874520"/>
-            <a:ext cx="10881360" cy="749808"/>
-          </a:xfrm>
-          <a:prstGeom prst="rect">
-            <a:avLst/>
+            <a:off x="640080" y="2148840"/>
+            <a:ext cx="2670048" cy="1188720"/>
+          </a:xfrm>
+          <a:prstGeom prst="roundRect">
+            <a:avLst>
+              <a:gd name="adj" fmla="val 6154"/>
+            </a:avLst>
           </a:prstGeom>
           <a:solidFill>
             <a:srgbClr val="1B2C4F"/>
           </a:solidFill>
-          <a:ln w="12700">
-            <a:solidFill>
-              <a:srgbClr val="1B2C4F"/>
-            </a:solidFill>
-            <a:prstDash val="solid"/>
-          </a:ln>
-        </p:spPr>
-      </p:sp>
-      <p:sp>
-        <p:nvSpPr>
-          <p:cNvPr id="6" name="Shape 4"/>
-          <p:cNvSpPr/>
-          <p:nvPr/>
-        </p:nvSpPr>
-        <p:spPr>
-          <a:xfrm>
-            <a:off x="640080" y="1874520"/>
-            <a:ext cx="128016" cy="749808"/>
-          </a:xfrm>
-          <a:prstGeom prst="rect">
-            <a:avLst/>
-          </a:prstGeom>
-          <a:solidFill>
-            <a:srgbClr val="2E75B6"/>
-          </a:solidFill>
-          <a:ln/>
-        </p:spPr>
-      </p:sp>
-      <p:sp>
-        <p:nvSpPr>
-          <p:cNvPr id="7" name="Text 5"/>
-          <p:cNvSpPr/>
-          <p:nvPr/>
-        </p:nvSpPr>
-        <p:spPr>
-          <a:xfrm>
-            <a:off x="960120" y="1874520"/>
-            <a:ext cx="4572000" cy="749808"/>
+          <a:ln/>
+          <a:effectLst>
+            <a:outerShdw sx="100000" sy="100000" kx="0" ky="0" algn="bl" rotWithShape="0" blurRad="101600" dist="38100" dir="8100000">
+              <a:srgbClr val="000000">
+                <a:alpha val="18000"/>
+              </a:srgbClr>
+            </a:outerShdw>
+          </a:effectLst>
+        </p:spPr>
+      </p:sp>
+      <p:sp>
+        <p:nvSpPr>
+          <p:cNvPr id="6" name="Text 4"/>
+          <p:cNvSpPr/>
+          <p:nvPr/>
+        </p:nvSpPr>
+        <p:spPr>
+          <a:xfrm>
+            <a:off x="640080" y="2240280"/>
+            <a:ext cx="2670048" cy="594360"/>
           </a:xfrm>
           <a:prstGeom prst="rect">
             <a:avLst/>
@@ -12616,50 +13317,50 @@
           <a:bodyPr wrap="square" lIns="0" tIns="0" rIns="0" bIns="0" rtlCol="0" anchor="ctr"/>
           <a:lstStyle/>
           <a:p>
-            <a:pPr algn="l" indent="0" marL="0">
-              <a:buNone/>
-            </a:pPr>
-            <a:r>
-              <a:rPr lang="en-US" sz="1700" b="1" dirty="0">
-                <a:solidFill>
-                  <a:srgbClr val="FFFFFF"/>
+            <a:pPr algn="ctr" indent="0" marL="0">
+              <a:buNone/>
+            </a:pPr>
+            <a:r>
+              <a:rPr lang="en-US" sz="3000" b="1" dirty="0">
+                <a:solidFill>
+                  <a:srgbClr val="22B8CF"/>
                 </a:solidFill>
                 <a:latin typeface="Georgia" pitchFamily="34" charset="0"/>
                 <a:ea typeface="Georgia" pitchFamily="34" charset="-122"/>
                 <a:cs typeface="Georgia" pitchFamily="34" charset="-120"/>
               </a:rPr>
-              <a:t>L4 应用与生态</a:t>
-            </a:r>
-            <a:endParaRPr lang="en-US" sz="1700" dirty="0"/>
-          </a:p>
-        </p:txBody>
-      </p:sp>
-      <p:sp>
-        <p:nvSpPr>
-          <p:cNvPr id="8" name="Text 6"/>
-          <p:cNvSpPr/>
-          <p:nvPr/>
-        </p:nvSpPr>
-        <p:spPr>
-          <a:xfrm>
-            <a:off x="5577840" y="1874520"/>
-            <a:ext cx="5760720" cy="749808"/>
-          </a:xfrm>
-          <a:prstGeom prst="rect">
-            <a:avLst/>
-          </a:prstGeom>
-          <a:noFill/>
-          <a:ln/>
-        </p:spPr>
-        <p:txBody>
-          <a:bodyPr wrap="square" lIns="0" tIns="0" rIns="0" bIns="0" rtlCol="0" anchor="ctr"/>
-          <a:lstStyle/>
-          <a:p>
-            <a:pPr algn="l" indent="0" marL="0">
-              <a:buNone/>
-            </a:pPr>
-            <a:r>
-              <a:rPr lang="en-US" sz="1350" dirty="0">
+              <a:t>7</a:t>
+            </a:r>
+            <a:endParaRPr lang="en-US" sz="3000" dirty="0"/>
+          </a:p>
+        </p:txBody>
+      </p:sp>
+      <p:sp>
+        <p:nvSpPr>
+          <p:cNvPr id="7" name="Text 5"/>
+          <p:cNvSpPr/>
+          <p:nvPr/>
+        </p:nvSpPr>
+        <p:spPr>
+          <a:xfrm>
+            <a:off x="749808" y="2852928"/>
+            <a:ext cx="2450592" cy="411480"/>
+          </a:xfrm>
+          <a:prstGeom prst="rect">
+            <a:avLst/>
+          </a:prstGeom>
+          <a:noFill/>
+          <a:ln/>
+        </p:spPr>
+        <p:txBody>
+          <a:bodyPr wrap="square" lIns="0" tIns="0" rIns="0" bIns="0" rtlCol="0" anchor="t"/>
+          <a:lstStyle/>
+          <a:p>
+            <a:pPr algn="ctr" indent="0" marL="0">
+              <a:buNone/>
+            </a:pPr>
+            <a:r>
+              <a:rPr lang="en-US" sz="1150" dirty="0">
                 <a:solidFill>
                   <a:srgbClr val="CADCFC"/>
                 </a:solidFill>
@@ -12667,67 +13368,51 @@
                 <a:ea typeface="Calibri" pitchFamily="34" charset="-122"/>
                 <a:cs typeface="Calibri" pitchFamily="34" charset="-120"/>
               </a:rPr>
-              <a:t>用户层 / 开源社区 / 认证商业版</a:t>
-            </a:r>
-            <a:endParaRPr lang="en-US" sz="1350" dirty="0"/>
-          </a:p>
-        </p:txBody>
-      </p:sp>
-      <p:sp>
-        <p:nvSpPr>
-          <p:cNvPr id="9" name="Shape 7"/>
-          <p:cNvSpPr/>
-          <p:nvPr/>
-        </p:nvSpPr>
-        <p:spPr>
-          <a:xfrm>
-            <a:off x="640080" y="2734056"/>
-            <a:ext cx="10881360" cy="749808"/>
-          </a:xfrm>
-          <a:prstGeom prst="rect">
-            <a:avLst/>
+              <a:t>跨 4 类拓扑的已出片版图</a:t>
+            </a:r>
+            <a:endParaRPr lang="en-US" sz="1150" dirty="0"/>
+          </a:p>
+        </p:txBody>
+      </p:sp>
+      <p:sp>
+        <p:nvSpPr>
+          <p:cNvPr id="8" name="Shape 6"/>
+          <p:cNvSpPr/>
+          <p:nvPr/>
+        </p:nvSpPr>
+        <p:spPr>
+          <a:xfrm>
+            <a:off x="3474720" y="2148840"/>
+            <a:ext cx="2670048" cy="1188720"/>
+          </a:xfrm>
+          <a:prstGeom prst="roundRect">
+            <a:avLst>
+              <a:gd name="adj" fmla="val 6154"/>
+            </a:avLst>
           </a:prstGeom>
           <a:solidFill>
             <a:srgbClr val="1B2C4F"/>
           </a:solidFill>
-          <a:ln w="12700">
-            <a:solidFill>
-              <a:srgbClr val="1B2C4F"/>
-            </a:solidFill>
-            <a:prstDash val="solid"/>
-          </a:ln>
-        </p:spPr>
-      </p:sp>
-      <p:sp>
-        <p:nvSpPr>
-          <p:cNvPr id="10" name="Shape 8"/>
-          <p:cNvSpPr/>
-          <p:nvPr/>
-        </p:nvSpPr>
-        <p:spPr>
-          <a:xfrm>
-            <a:off x="640080" y="2734056"/>
-            <a:ext cx="128016" cy="749808"/>
-          </a:xfrm>
-          <a:prstGeom prst="rect">
-            <a:avLst/>
-          </a:prstGeom>
-          <a:solidFill>
-            <a:srgbClr val="2E75B6"/>
-          </a:solidFill>
-          <a:ln/>
-        </p:spPr>
-      </p:sp>
-      <p:sp>
-        <p:nvSpPr>
-          <p:cNvPr id="11" name="Text 9"/>
-          <p:cNvSpPr/>
-          <p:nvPr/>
-        </p:nvSpPr>
-        <p:spPr>
-          <a:xfrm>
-            <a:off x="960120" y="2734056"/>
-            <a:ext cx="4572000" cy="749808"/>
+          <a:ln/>
+          <a:effectLst>
+            <a:outerShdw sx="100000" sy="100000" kx="0" ky="0" algn="bl" rotWithShape="0" blurRad="101600" dist="38100" dir="8100000">
+              <a:srgbClr val="000000">
+                <a:alpha val="18000"/>
+              </a:srgbClr>
+            </a:outerShdw>
+          </a:effectLst>
+        </p:spPr>
+      </p:sp>
+      <p:sp>
+        <p:nvSpPr>
+          <p:cNvPr id="9" name="Text 7"/>
+          <p:cNvSpPr/>
+          <p:nvPr/>
+        </p:nvSpPr>
+        <p:spPr>
+          <a:xfrm>
+            <a:off x="3474720" y="2240280"/>
+            <a:ext cx="2670048" cy="594360"/>
           </a:xfrm>
           <a:prstGeom prst="rect">
             <a:avLst/>
@@ -12739,50 +13424,50 @@
           <a:bodyPr wrap="square" lIns="0" tIns="0" rIns="0" bIns="0" rtlCol="0" anchor="ctr"/>
           <a:lstStyle/>
           <a:p>
-            <a:pPr algn="l" indent="0" marL="0">
-              <a:buNone/>
-            </a:pPr>
-            <a:r>
-              <a:rPr lang="en-US" sz="1700" b="1" dirty="0">
-                <a:solidFill>
-                  <a:srgbClr val="FFFFFF"/>
+            <a:pPr algn="ctr" indent="0" marL="0">
+              <a:buNone/>
+            </a:pPr>
+            <a:r>
+              <a:rPr lang="en-US" sz="3000" b="1" dirty="0">
+                <a:solidFill>
+                  <a:srgbClr val="22B8CF"/>
                 </a:solidFill>
                 <a:latin typeface="Georgia" pitchFamily="34" charset="0"/>
                 <a:ea typeface="Georgia" pitchFamily="34" charset="-122"/>
                 <a:cs typeface="Georgia" pitchFamily="34" charset="-120"/>
               </a:rPr>
-              <a:t>L3 求解器后端</a:t>
-            </a:r>
-            <a:endParaRPr lang="en-US" sz="1700" dirty="0"/>
-          </a:p>
-        </p:txBody>
-      </p:sp>
-      <p:sp>
-        <p:nvSpPr>
-          <p:cNvPr id="12" name="Text 10"/>
-          <p:cNvSpPr/>
-          <p:nvPr/>
-        </p:nvSpPr>
-        <p:spPr>
-          <a:xfrm>
-            <a:off x="5577840" y="2734056"/>
-            <a:ext cx="5760720" cy="749808"/>
-          </a:xfrm>
-          <a:prstGeom prst="rect">
-            <a:avLst/>
-          </a:prstGeom>
-          <a:noFill/>
-          <a:ln/>
-        </p:spPr>
-        <p:txBody>
-          <a:bodyPr wrap="square" lIns="0" tIns="0" rIns="0" bIns="0" rtlCol="0" anchor="ctr"/>
-          <a:lstStyle/>
-          <a:p>
-            <a:pPr algn="l" indent="0" marL="0">
-              <a:buNone/>
-            </a:pPr>
-            <a:r>
-              <a:rPr lang="en-US" sz="1350" dirty="0">
+              <a:t>0</a:t>
+            </a:r>
+            <a:endParaRPr lang="en-US" sz="3000" dirty="0"/>
+          </a:p>
+        </p:txBody>
+      </p:sp>
+      <p:sp>
+        <p:nvSpPr>
+          <p:cNvPr id="10" name="Text 8"/>
+          <p:cNvSpPr/>
+          <p:nvPr/>
+        </p:nvSpPr>
+        <p:spPr>
+          <a:xfrm>
+            <a:off x="3584448" y="2852928"/>
+            <a:ext cx="2450592" cy="411480"/>
+          </a:xfrm>
+          <a:prstGeom prst="rect">
+            <a:avLst/>
+          </a:prstGeom>
+          <a:noFill/>
+          <a:ln/>
+        </p:spPr>
+        <p:txBody>
+          <a:bodyPr wrap="square" lIns="0" tIns="0" rIns="0" bIns="0" rtlCol="0" anchor="t"/>
+          <a:lstStyle/>
+          <a:p>
+            <a:pPr algn="ctr" indent="0" marL="0">
+              <a:buNone/>
+            </a:pPr>
+            <a:r>
+              <a:rPr lang="en-US" sz="1150" dirty="0">
                 <a:solidFill>
                   <a:srgbClr val="CADCFC"/>
                 </a:solidFill>
@@ -12790,67 +13475,51 @@
                 <a:ea typeface="Calibri" pitchFamily="34" charset="-122"/>
                 <a:cs typeface="Calibri" pitchFamily="34" charset="-120"/>
               </a:rPr>
-              <a:t>FDTD / FEM / EME / 量子哈密顿 ← AI 自举生成 / 插件调度</a:t>
-            </a:r>
-            <a:endParaRPr lang="en-US" sz="1350" dirty="0"/>
-          </a:p>
-        </p:txBody>
-      </p:sp>
-      <p:sp>
-        <p:nvSpPr>
-          <p:cNvPr id="13" name="Shape 11"/>
-          <p:cNvSpPr/>
-          <p:nvPr/>
-        </p:nvSpPr>
-        <p:spPr>
-          <a:xfrm>
-            <a:off x="640080" y="3593592"/>
-            <a:ext cx="10881360" cy="749808"/>
-          </a:xfrm>
-          <a:prstGeom prst="rect">
-            <a:avLst/>
+              <a:t>gdsfactory 依赖（走法一主权链）</a:t>
+            </a:r>
+            <a:endParaRPr lang="en-US" sz="1150" dirty="0"/>
+          </a:p>
+        </p:txBody>
+      </p:sp>
+      <p:sp>
+        <p:nvSpPr>
+          <p:cNvPr id="11" name="Shape 9"/>
+          <p:cNvSpPr/>
+          <p:nvPr/>
+        </p:nvSpPr>
+        <p:spPr>
+          <a:xfrm>
+            <a:off x="6309360" y="2148840"/>
+            <a:ext cx="2670048" cy="1188720"/>
+          </a:xfrm>
+          <a:prstGeom prst="roundRect">
+            <a:avLst>
+              <a:gd name="adj" fmla="val 6154"/>
+            </a:avLst>
           </a:prstGeom>
           <a:solidFill>
             <a:srgbClr val="1B2C4F"/>
           </a:solidFill>
-          <a:ln w="12700">
-            <a:solidFill>
-              <a:srgbClr val="1B2C4F"/>
-            </a:solidFill>
-            <a:prstDash val="solid"/>
-          </a:ln>
-        </p:spPr>
-      </p:sp>
-      <p:sp>
-        <p:nvSpPr>
-          <p:cNvPr id="14" name="Shape 12"/>
-          <p:cNvSpPr/>
-          <p:nvPr/>
-        </p:nvSpPr>
-        <p:spPr>
-          <a:xfrm>
-            <a:off x="640080" y="3593592"/>
-            <a:ext cx="128016" cy="749808"/>
-          </a:xfrm>
-          <a:prstGeom prst="rect">
-            <a:avLst/>
-          </a:prstGeom>
-          <a:solidFill>
-            <a:srgbClr val="2E75B6"/>
-          </a:solidFill>
-          <a:ln/>
-        </p:spPr>
-      </p:sp>
-      <p:sp>
-        <p:nvSpPr>
-          <p:cNvPr id="15" name="Text 13"/>
-          <p:cNvSpPr/>
-          <p:nvPr/>
-        </p:nvSpPr>
-        <p:spPr>
-          <a:xfrm>
-            <a:off x="960120" y="3593592"/>
-            <a:ext cx="4572000" cy="749808"/>
+          <a:ln/>
+          <a:effectLst>
+            <a:outerShdw sx="100000" sy="100000" kx="0" ky="0" algn="bl" rotWithShape="0" blurRad="101600" dist="38100" dir="8100000">
+              <a:srgbClr val="000000">
+                <a:alpha val="18000"/>
+              </a:srgbClr>
+            </a:outerShdw>
+          </a:effectLst>
+        </p:spPr>
+      </p:sp>
+      <p:sp>
+        <p:nvSpPr>
+          <p:cNvPr id="12" name="Text 10"/>
+          <p:cNvSpPr/>
+          <p:nvPr/>
+        </p:nvSpPr>
+        <p:spPr>
+          <a:xfrm>
+            <a:off x="6309360" y="2240280"/>
+            <a:ext cx="2670048" cy="594360"/>
           </a:xfrm>
           <a:prstGeom prst="rect">
             <a:avLst/>
@@ -12862,50 +13531,50 @@
           <a:bodyPr wrap="square" lIns="0" tIns="0" rIns="0" bIns="0" rtlCol="0" anchor="ctr"/>
           <a:lstStyle/>
           <a:p>
-            <a:pPr algn="l" indent="0" marL="0">
-              <a:buNone/>
-            </a:pPr>
-            <a:r>
-              <a:rPr lang="en-US" sz="1700" b="1" dirty="0">
-                <a:solidFill>
-                  <a:srgbClr val="FFFFFF"/>
+            <a:pPr algn="ctr" indent="0" marL="0">
+              <a:buNone/>
+            </a:pPr>
+            <a:r>
+              <a:rPr lang="en-US" sz="3000" b="1" dirty="0">
+                <a:solidFill>
+                  <a:srgbClr val="22B8CF"/>
                 </a:solidFill>
                 <a:latin typeface="Georgia" pitchFamily="34" charset="0"/>
                 <a:ea typeface="Georgia" pitchFamily="34" charset="-122"/>
                 <a:cs typeface="Georgia" pitchFamily="34" charset="-120"/>
               </a:rPr>
-              <a:t>L2 开放 PDK / 器件本体 Registry</a:t>
-            </a:r>
-            <a:endParaRPr lang="en-US" sz="1700" dirty="0"/>
-          </a:p>
-        </p:txBody>
-      </p:sp>
-      <p:sp>
-        <p:nvSpPr>
-          <p:cNvPr id="16" name="Text 14"/>
-          <p:cNvSpPr/>
-          <p:nvPr/>
-        </p:nvSpPr>
-        <p:spPr>
-          <a:xfrm>
-            <a:off x="5577840" y="3593592"/>
-            <a:ext cx="5760720" cy="749808"/>
-          </a:xfrm>
-          <a:prstGeom prst="rect">
-            <a:avLst/>
-          </a:prstGeom>
-          <a:noFill/>
-          <a:ln/>
-        </p:spPr>
-        <p:txBody>
-          <a:bodyPr wrap="square" lIns="0" tIns="0" rIns="0" bIns="0" rtlCol="0" anchor="ctr"/>
-          <a:lstStyle/>
-          <a:p>
-            <a:pPr algn="l" indent="0" marL="0">
-              <a:buNone/>
-            </a:pPr>
-            <a:r>
-              <a:rPr lang="en-US" sz="1350" dirty="0">
+              <a:t>PASS</a:t>
+            </a:r>
+            <a:endParaRPr lang="en-US" sz="3000" dirty="0"/>
+          </a:p>
+        </p:txBody>
+      </p:sp>
+      <p:sp>
+        <p:nvSpPr>
+          <p:cNvPr id="13" name="Text 11"/>
+          <p:cNvSpPr/>
+          <p:nvPr/>
+        </p:nvSpPr>
+        <p:spPr>
+          <a:xfrm>
+            <a:off x="6419088" y="2852928"/>
+            <a:ext cx="2450592" cy="411480"/>
+          </a:xfrm>
+          <a:prstGeom prst="rect">
+            <a:avLst/>
+          </a:prstGeom>
+          <a:noFill/>
+          <a:ln/>
+        </p:spPr>
+        <p:txBody>
+          <a:bodyPr wrap="square" lIns="0" tIns="0" rIns="0" bIns="0" rtlCol="0" anchor="t"/>
+          <a:lstStyle/>
+          <a:p>
+            <a:pPr algn="ctr" indent="0" marL="0">
+              <a:buNone/>
+            </a:pPr>
+            <a:r>
+              <a:rPr lang="en-US" sz="1150" dirty="0">
                 <a:solidFill>
                   <a:srgbClr val="CADCFC"/>
                 </a:solidFill>
@@ -12913,67 +13582,51 @@
                 <a:ea typeface="Calibri" pitchFamily="34" charset="-122"/>
                 <a:cs typeface="Calibri" pitchFamily="34" charset="-120"/>
               </a:rPr>
-              <a:t>社区 + 晶圆厂共建</a:t>
-            </a:r>
-            <a:endParaRPr lang="en-US" sz="1350" dirty="0"/>
-          </a:p>
-        </p:txBody>
-      </p:sp>
-      <p:sp>
-        <p:nvSpPr>
-          <p:cNvPr id="17" name="Shape 15"/>
-          <p:cNvSpPr/>
-          <p:nvPr/>
-        </p:nvSpPr>
-        <p:spPr>
-          <a:xfrm>
-            <a:off x="640080" y="4453128"/>
-            <a:ext cx="10881360" cy="749808"/>
-          </a:xfrm>
-          <a:prstGeom prst="rect">
-            <a:avLst/>
+              <a:t>主权子集 DRC 全绿</a:t>
+            </a:r>
+            <a:endParaRPr lang="en-US" sz="1150" dirty="0"/>
+          </a:p>
+        </p:txBody>
+      </p:sp>
+      <p:sp>
+        <p:nvSpPr>
+          <p:cNvPr id="14" name="Shape 12"/>
+          <p:cNvSpPr/>
+          <p:nvPr/>
+        </p:nvSpPr>
+        <p:spPr>
+          <a:xfrm>
+            <a:off x="9144000" y="2148840"/>
+            <a:ext cx="2670048" cy="1188720"/>
+          </a:xfrm>
+          <a:prstGeom prst="roundRect">
+            <a:avLst>
+              <a:gd name="adj" fmla="val 6154"/>
+            </a:avLst>
           </a:prstGeom>
           <a:solidFill>
             <a:srgbClr val="1B2C4F"/>
           </a:solidFill>
-          <a:ln w="12700">
-            <a:solidFill>
-              <a:srgbClr val="1B2C4F"/>
-            </a:solidFill>
-            <a:prstDash val="solid"/>
-          </a:ln>
-        </p:spPr>
-      </p:sp>
-      <p:sp>
-        <p:nvSpPr>
-          <p:cNvPr id="18" name="Shape 16"/>
-          <p:cNvSpPr/>
-          <p:nvPr/>
-        </p:nvSpPr>
-        <p:spPr>
-          <a:xfrm>
-            <a:off x="640080" y="4453128"/>
-            <a:ext cx="128016" cy="749808"/>
-          </a:xfrm>
-          <a:prstGeom prst="rect">
-            <a:avLst/>
-          </a:prstGeom>
-          <a:solidFill>
-            <a:srgbClr val="2E75B6"/>
-          </a:solidFill>
-          <a:ln/>
-        </p:spPr>
-      </p:sp>
-      <p:sp>
-        <p:nvSpPr>
-          <p:cNvPr id="19" name="Text 17"/>
-          <p:cNvSpPr/>
-          <p:nvPr/>
-        </p:nvSpPr>
-        <p:spPr>
-          <a:xfrm>
-            <a:off x="960120" y="4453128"/>
-            <a:ext cx="4572000" cy="749808"/>
+          <a:ln/>
+          <a:effectLst>
+            <a:outerShdw sx="100000" sy="100000" kx="0" ky="0" algn="bl" rotWithShape="0" blurRad="101600" dist="38100" dir="8100000">
+              <a:srgbClr val="000000">
+                <a:alpha val="18000"/>
+              </a:srgbClr>
+            </a:outerShdw>
+          </a:effectLst>
+        </p:spPr>
+      </p:sp>
+      <p:sp>
+        <p:nvSpPr>
+          <p:cNvPr id="15" name="Text 13"/>
+          <p:cNvSpPr/>
+          <p:nvPr/>
+        </p:nvSpPr>
+        <p:spPr>
+          <a:xfrm>
+            <a:off x="9144000" y="2240280"/>
+            <a:ext cx="2670048" cy="594360"/>
           </a:xfrm>
           <a:prstGeom prst="rect">
             <a:avLst/>
@@ -12985,50 +13638,50 @@
           <a:bodyPr wrap="square" lIns="0" tIns="0" rIns="0" bIns="0" rtlCol="0" anchor="ctr"/>
           <a:lstStyle/>
           <a:p>
-            <a:pPr algn="l" indent="0" marL="0">
-              <a:buNone/>
-            </a:pPr>
-            <a:r>
-              <a:rPr lang="en-US" sz="1700" b="1" dirty="0">
-                <a:solidFill>
-                  <a:srgbClr val="FFFFFF"/>
+            <a:pPr algn="ctr" indent="0" marL="0">
+              <a:buNone/>
+            </a:pPr>
+            <a:r>
+              <a:rPr lang="en-US" sz="3000" b="1" dirty="0">
+                <a:solidFill>
+                  <a:srgbClr val="22B8CF"/>
                 </a:solidFill>
                 <a:latin typeface="Georgia" pitchFamily="34" charset="0"/>
                 <a:ea typeface="Georgia" pitchFamily="34" charset="-122"/>
                 <a:cs typeface="Georgia" pitchFamily="34" charset="-120"/>
               </a:rPr>
-              <a:t>L1 智能体协议层</a:t>
-            </a:r>
-            <a:endParaRPr lang="en-US" sz="1700" dirty="0"/>
-          </a:p>
-        </p:txBody>
-      </p:sp>
-      <p:sp>
-        <p:nvSpPr>
-          <p:cNvPr id="20" name="Text 18"/>
-          <p:cNvSpPr/>
-          <p:nvPr/>
-        </p:nvSpPr>
-        <p:spPr>
-          <a:xfrm>
-            <a:off x="5577840" y="4453128"/>
-            <a:ext cx="5760720" cy="749808"/>
-          </a:xfrm>
-          <a:prstGeom prst="rect">
-            <a:avLst/>
-          </a:prstGeom>
-          <a:noFill/>
-          <a:ln/>
-        </p:spPr>
-        <p:txBody>
-          <a:bodyPr wrap="square" lIns="0" tIns="0" rIns="0" bIns="0" rtlCol="0" anchor="ctr"/>
-          <a:lstStyle/>
-          <a:p>
-            <a:pPr algn="l" indent="0" marL="0">
-              <a:buNone/>
-            </a:pPr>
-            <a:r>
-              <a:rPr lang="en-US" sz="1350" dirty="0">
+              <a:t>ACCEPT</a:t>
+            </a:r>
+            <a:endParaRPr lang="en-US" sz="3000" dirty="0"/>
+          </a:p>
+        </p:txBody>
+      </p:sp>
+      <p:sp>
+        <p:nvSpPr>
+          <p:cNvPr id="16" name="Text 14"/>
+          <p:cNvSpPr/>
+          <p:nvPr/>
+        </p:nvSpPr>
+        <p:spPr>
+          <a:xfrm>
+            <a:off x="9253728" y="2852928"/>
+            <a:ext cx="2450592" cy="411480"/>
+          </a:xfrm>
+          <a:prstGeom prst="rect">
+            <a:avLst/>
+          </a:prstGeom>
+          <a:noFill/>
+          <a:ln/>
+        </p:spPr>
+        <p:txBody>
+          <a:bodyPr wrap="square" lIns="0" tIns="0" rIns="0" bIns="0" rtlCol="0" anchor="t"/>
+          <a:lstStyle/>
+          <a:p>
+            <a:pPr algn="ctr" indent="0" marL="0">
+              <a:buNone/>
+            </a:pPr>
+            <a:r>
+              <a:rPr lang="en-US" sz="1150" dirty="0">
                 <a:solidFill>
                   <a:srgbClr val="CADCFC"/>
                 </a:solidFill>
@@ -13036,67 +13689,2791 @@
                 <a:ea typeface="Calibri" pitchFamily="34" charset="-122"/>
                 <a:cs typeface="Calibri" pitchFamily="34" charset="-120"/>
               </a:rPr>
-              <a:t>Interpreter / Designer / Layout / Solver / Verifier 开放接口</a:t>
-            </a:r>
-            <a:endParaRPr lang="en-US" sz="1350" dirty="0"/>
-          </a:p>
-        </p:txBody>
-      </p:sp>
-      <p:sp>
-        <p:nvSpPr>
-          <p:cNvPr id="21" name="Shape 19"/>
-          <p:cNvSpPr/>
-          <p:nvPr/>
-        </p:nvSpPr>
-        <p:spPr>
-          <a:xfrm>
-            <a:off x="640080" y="5312664"/>
-            <a:ext cx="10881360" cy="749808"/>
-          </a:xfrm>
-          <a:prstGeom prst="rect">
-            <a:avLst/>
-          </a:prstGeom>
-          <a:solidFill>
-            <a:srgbClr val="2E75B6"/>
-          </a:solidFill>
-          <a:ln w="19050">
-            <a:solidFill>
-              <a:srgbClr val="22B8CF"/>
-            </a:solidFill>
-            <a:prstDash val="solid"/>
-          </a:ln>
-        </p:spPr>
-      </p:sp>
-      <p:sp>
-        <p:nvSpPr>
-          <p:cNvPr id="22" name="Shape 20"/>
-          <p:cNvSpPr/>
-          <p:nvPr/>
-        </p:nvSpPr>
-        <p:spPr>
-          <a:xfrm>
-            <a:off x="640080" y="5312664"/>
-            <a:ext cx="128016" cy="749808"/>
-          </a:xfrm>
-          <a:prstGeom prst="rect">
-            <a:avLst/>
-          </a:prstGeom>
-          <a:solidFill>
-            <a:srgbClr val="22B8CF"/>
-          </a:solidFill>
-          <a:ln/>
-        </p:spPr>
-      </p:sp>
-      <p:sp>
-        <p:nvSpPr>
-          <p:cNvPr id="23" name="Text 21"/>
-          <p:cNvSpPr/>
-          <p:nvPr/>
-        </p:nvSpPr>
-        <p:spPr>
-          <a:xfrm>
-            <a:off x="960120" y="5312664"/>
-            <a:ext cx="4572000" cy="749808"/>
+              <a:t>LVS 拓扑一致全绿</a:t>
+            </a:r>
+            <a:endParaRPr lang="en-US" sz="1150" dirty="0"/>
+          </a:p>
+        </p:txBody>
+      </p:sp>
+      <p:graphicFrame>
+        <p:nvGraphicFramePr>
+          <p:cNvPr id="8" name="Table 0"/>
+          <p:cNvGraphicFramePr>
+            <a:graphicFrameLocks noGrp="1"/>
+          </p:cNvGraphicFramePr>
+          <p:nvPr>
+            <p:extLst>
+              <p:ext uri="{D42A27DB-BD31-4B8C-83A1-F6EECF244321}">
+                <p14:modId xmlns:p14="http://schemas.microsoft.com/office/powerpoint/2010/main" val="1579011935"/>
+              </p:ext>
+            </p:extLst>
+          </p:nvPr>
+        </p:nvGraphicFramePr>
+        <p:xfrm>
+          <a:off x="640080" y="3520440"/>
+          <a:ext cx="10881360" cy="914400"/>
+        </p:xfrm>
+        <a:graphic>
+          <a:graphicData uri="http://schemas.openxmlformats.org/drawingml/2006/table">
+            <a:tbl>
+              <a:tblPr/>
+              <a:tblGrid>
+                <a:gridCol w="1005840"/>
+                <a:gridCol w="4297680"/>
+                <a:gridCol w="1097280"/>
+                <a:gridCol w="1463040"/>
+                <a:gridCol w="3017520"/>
+              </a:tblGrid>
+              <a:tr h="310896">
+                <a:tc>
+                  <a:txBody>
+                    <a:bodyPr/>
+                    <a:lstStyle/>
+                    <a:p>
+                      <a:pPr algn="l" indent="0" marL="0">
+                        <a:buNone/>
+                      </a:pPr>
+                      <a:r>
+                        <a:rPr lang="en-US" sz="1300" b="1" dirty="0">
+                          <a:solidFill>
+                            <a:srgbClr val="FFFFFF"/>
+                          </a:solidFill>
+                          <a:latin typeface="Calibri" pitchFamily="34" charset="0"/>
+                          <a:ea typeface="Calibri" pitchFamily="34" charset="-122"/>
+                          <a:cs typeface="Calibri" pitchFamily="34" charset="-120"/>
+                        </a:rPr>
+                        <a:t>电路</a:t>
+                      </a:r>
+                      <a:endParaRPr lang="en-US" sz="1300" dirty="0">
+                        <a:latin typeface="Calibri" charset="0"/>
+                        <a:ea typeface="Calibri" charset="0"/>
+                        <a:cs typeface="Calibri" charset="0"/>
+                      </a:endParaRPr>
+                    </a:p>
+                  </a:txBody>
+                  <a:tcPr marL="91440" marR="91440" marT="45720" marB="45720" anchor="ctr">
+                    <a:lnL w="12700" cap="flat" cmpd="sng" algn="ctr">
+                      <a:solidFill>
+                        <a:srgbClr val="2A3A5C"/>
+                      </a:solidFill>
+                      <a:prstDash val="solid"/>
+                      <a:round/>
+                      <a:headEnd type="none" w="med" len="med"/>
+                      <a:tailEnd type="none" w="med" len="med"/>
+                    </a:lnL>
+                    <a:lnR w="12700" cap="flat" cmpd="sng" algn="ctr">
+                      <a:solidFill>
+                        <a:srgbClr val="2A3A5C"/>
+                      </a:solidFill>
+                      <a:prstDash val="solid"/>
+                      <a:round/>
+                      <a:headEnd type="none" w="med" len="med"/>
+                      <a:tailEnd type="none" w="med" len="med"/>
+                    </a:lnR>
+                    <a:lnT w="12700" cap="flat" cmpd="sng" algn="ctr">
+                      <a:solidFill>
+                        <a:srgbClr val="2A3A5C"/>
+                      </a:solidFill>
+                      <a:prstDash val="solid"/>
+                      <a:round/>
+                      <a:headEnd type="none" w="med" len="med"/>
+                      <a:tailEnd type="none" w="med" len="med"/>
+                    </a:lnT>
+                    <a:lnB w="12700" cap="flat" cmpd="sng" algn="ctr">
+                      <a:solidFill>
+                        <a:srgbClr val="2A3A5C"/>
+                      </a:solidFill>
+                      <a:prstDash val="solid"/>
+                      <a:round/>
+                      <a:headEnd type="none" w="med" len="med"/>
+                      <a:tailEnd type="none" w="med" len="med"/>
+                    </a:lnB>
+                    <a:solidFill>
+                      <a:srgbClr val="2E75B6"/>
+                    </a:solidFill>
+                  </a:tcPr>
+                </a:tc>
+                <a:tc>
+                  <a:txBody>
+                    <a:bodyPr/>
+                    <a:lstStyle/>
+                    <a:p>
+                      <a:pPr algn="l" indent="0" marL="0">
+                        <a:buNone/>
+                      </a:pPr>
+                      <a:r>
+                        <a:rPr lang="en-US" sz="1300" b="1" dirty="0">
+                          <a:solidFill>
+                            <a:srgbClr val="FFFFFF"/>
+                          </a:solidFill>
+                          <a:latin typeface="Calibri" pitchFamily="34" charset="0"/>
+                          <a:ea typeface="Calibri" pitchFamily="34" charset="-122"/>
+                          <a:cs typeface="Calibri" pitchFamily="34" charset="-120"/>
+                        </a:rPr>
+                        <a:t>拓扑</a:t>
+                      </a:r>
+                      <a:endParaRPr lang="en-US" sz="1300" dirty="0">
+                        <a:latin typeface="Calibri" charset="0"/>
+                        <a:ea typeface="Calibri" charset="0"/>
+                        <a:cs typeface="Calibri" charset="0"/>
+                      </a:endParaRPr>
+                    </a:p>
+                  </a:txBody>
+                  <a:tcPr marL="91440" marR="91440" marT="45720" marB="45720" anchor="ctr">
+                    <a:lnL w="12700" cap="flat" cmpd="sng" algn="ctr">
+                      <a:solidFill>
+                        <a:srgbClr val="2A3A5C"/>
+                      </a:solidFill>
+                      <a:prstDash val="solid"/>
+                      <a:round/>
+                      <a:headEnd type="none" w="med" len="med"/>
+                      <a:tailEnd type="none" w="med" len="med"/>
+                    </a:lnL>
+                    <a:lnR w="12700" cap="flat" cmpd="sng" algn="ctr">
+                      <a:solidFill>
+                        <a:srgbClr val="2A3A5C"/>
+                      </a:solidFill>
+                      <a:prstDash val="solid"/>
+                      <a:round/>
+                      <a:headEnd type="none" w="med" len="med"/>
+                      <a:tailEnd type="none" w="med" len="med"/>
+                    </a:lnR>
+                    <a:lnT w="12700" cap="flat" cmpd="sng" algn="ctr">
+                      <a:solidFill>
+                        <a:srgbClr val="2A3A5C"/>
+                      </a:solidFill>
+                      <a:prstDash val="solid"/>
+                      <a:round/>
+                      <a:headEnd type="none" w="med" len="med"/>
+                      <a:tailEnd type="none" w="med" len="med"/>
+                    </a:lnT>
+                    <a:lnB w="12700" cap="flat" cmpd="sng" algn="ctr">
+                      <a:solidFill>
+                        <a:srgbClr val="2A3A5C"/>
+                      </a:solidFill>
+                      <a:prstDash val="solid"/>
+                      <a:round/>
+                      <a:headEnd type="none" w="med" len="med"/>
+                      <a:tailEnd type="none" w="med" len="med"/>
+                    </a:lnB>
+                    <a:solidFill>
+                      <a:srgbClr val="2E75B6"/>
+                    </a:solidFill>
+                  </a:tcPr>
+                </a:tc>
+                <a:tc>
+                  <a:txBody>
+                    <a:bodyPr/>
+                    <a:lstStyle/>
+                    <a:p>
+                      <a:pPr algn="ctr" indent="0" marL="0">
+                        <a:buNone/>
+                      </a:pPr>
+                      <a:r>
+                        <a:rPr lang="en-US" sz="1300" b="1" dirty="0">
+                          <a:solidFill>
+                            <a:srgbClr val="FFFFFF"/>
+                          </a:solidFill>
+                          <a:latin typeface="Calibri" pitchFamily="34" charset="0"/>
+                          <a:ea typeface="Calibri" pitchFamily="34" charset="-122"/>
+                          <a:cs typeface="Calibri" pitchFamily="34" charset="-120"/>
+                        </a:rPr>
+                        <a:t>组件</a:t>
+                      </a:r>
+                      <a:endParaRPr lang="en-US" sz="1300" dirty="0">
+                        <a:latin typeface="Calibri" charset="0"/>
+                        <a:ea typeface="Calibri" charset="0"/>
+                        <a:cs typeface="Calibri" charset="0"/>
+                      </a:endParaRPr>
+                    </a:p>
+                  </a:txBody>
+                  <a:tcPr marL="91440" marR="91440" marT="45720" marB="45720" anchor="ctr">
+                    <a:lnL w="12700" cap="flat" cmpd="sng" algn="ctr">
+                      <a:solidFill>
+                        <a:srgbClr val="2A3A5C"/>
+                      </a:solidFill>
+                      <a:prstDash val="solid"/>
+                      <a:round/>
+                      <a:headEnd type="none" w="med" len="med"/>
+                      <a:tailEnd type="none" w="med" len="med"/>
+                    </a:lnL>
+                    <a:lnR w="12700" cap="flat" cmpd="sng" algn="ctr">
+                      <a:solidFill>
+                        <a:srgbClr val="2A3A5C"/>
+                      </a:solidFill>
+                      <a:prstDash val="solid"/>
+                      <a:round/>
+                      <a:headEnd type="none" w="med" len="med"/>
+                      <a:tailEnd type="none" w="med" len="med"/>
+                    </a:lnR>
+                    <a:lnT w="12700" cap="flat" cmpd="sng" algn="ctr">
+                      <a:solidFill>
+                        <a:srgbClr val="2A3A5C"/>
+                      </a:solidFill>
+                      <a:prstDash val="solid"/>
+                      <a:round/>
+                      <a:headEnd type="none" w="med" len="med"/>
+                      <a:tailEnd type="none" w="med" len="med"/>
+                    </a:lnT>
+                    <a:lnB w="12700" cap="flat" cmpd="sng" algn="ctr">
+                      <a:solidFill>
+                        <a:srgbClr val="2A3A5C"/>
+                      </a:solidFill>
+                      <a:prstDash val="solid"/>
+                      <a:round/>
+                      <a:headEnd type="none" w="med" len="med"/>
+                      <a:tailEnd type="none" w="med" len="med"/>
+                    </a:lnB>
+                    <a:solidFill>
+                      <a:srgbClr val="2E75B6"/>
+                    </a:solidFill>
+                  </a:tcPr>
+                </a:tc>
+                <a:tc>
+                  <a:txBody>
+                    <a:bodyPr/>
+                    <a:lstStyle/>
+                    <a:p>
+                      <a:pPr algn="ctr" indent="0" marL="0">
+                        <a:buNone/>
+                      </a:pPr>
+                      <a:r>
+                        <a:rPr lang="en-US" sz="1300" b="1" dirty="0">
+                          <a:solidFill>
+                            <a:srgbClr val="FFFFFF"/>
+                          </a:solidFill>
+                          <a:latin typeface="Calibri" pitchFamily="34" charset="0"/>
+                          <a:ea typeface="Calibri" pitchFamily="34" charset="-122"/>
+                          <a:cs typeface="Calibri" pitchFamily="34" charset="-120"/>
+                        </a:rPr>
+                        <a:t>GDS</a:t>
+                      </a:r>
+                      <a:endParaRPr lang="en-US" sz="1300" dirty="0">
+                        <a:latin typeface="Calibri" charset="0"/>
+                        <a:ea typeface="Calibri" charset="0"/>
+                        <a:cs typeface="Calibri" charset="0"/>
+                      </a:endParaRPr>
+                    </a:p>
+                  </a:txBody>
+                  <a:tcPr marL="91440" marR="91440" marT="45720" marB="45720" anchor="ctr">
+                    <a:lnL w="12700" cap="flat" cmpd="sng" algn="ctr">
+                      <a:solidFill>
+                        <a:srgbClr val="2A3A5C"/>
+                      </a:solidFill>
+                      <a:prstDash val="solid"/>
+                      <a:round/>
+                      <a:headEnd type="none" w="med" len="med"/>
+                      <a:tailEnd type="none" w="med" len="med"/>
+                    </a:lnL>
+                    <a:lnR w="12700" cap="flat" cmpd="sng" algn="ctr">
+                      <a:solidFill>
+                        <a:srgbClr val="2A3A5C"/>
+                      </a:solidFill>
+                      <a:prstDash val="solid"/>
+                      <a:round/>
+                      <a:headEnd type="none" w="med" len="med"/>
+                      <a:tailEnd type="none" w="med" len="med"/>
+                    </a:lnR>
+                    <a:lnT w="12700" cap="flat" cmpd="sng" algn="ctr">
+                      <a:solidFill>
+                        <a:srgbClr val="2A3A5C"/>
+                      </a:solidFill>
+                      <a:prstDash val="solid"/>
+                      <a:round/>
+                      <a:headEnd type="none" w="med" len="med"/>
+                      <a:tailEnd type="none" w="med" len="med"/>
+                    </a:lnT>
+                    <a:lnB w="12700" cap="flat" cmpd="sng" algn="ctr">
+                      <a:solidFill>
+                        <a:srgbClr val="2A3A5C"/>
+                      </a:solidFill>
+                      <a:prstDash val="solid"/>
+                      <a:round/>
+                      <a:headEnd type="none" w="med" len="med"/>
+                      <a:tailEnd type="none" w="med" len="med"/>
+                    </a:lnB>
+                    <a:solidFill>
+                      <a:srgbClr val="2E75B6"/>
+                    </a:solidFill>
+                  </a:tcPr>
+                </a:tc>
+                <a:tc>
+                  <a:txBody>
+                    <a:bodyPr/>
+                    <a:lstStyle/>
+                    <a:p>
+                      <a:pPr algn="ctr" indent="0" marL="0">
+                        <a:buNone/>
+                      </a:pPr>
+                      <a:r>
+                        <a:rPr lang="en-US" sz="1300" b="1" dirty="0">
+                          <a:solidFill>
+                            <a:srgbClr val="FFFFFF"/>
+                          </a:solidFill>
+                          <a:latin typeface="Calibri" pitchFamily="34" charset="0"/>
+                          <a:ea typeface="Calibri" pitchFamily="34" charset="-122"/>
+                          <a:cs typeface="Calibri" pitchFamily="34" charset="-120"/>
+                        </a:rPr>
+                        <a:t>双闸签核</a:t>
+                      </a:r>
+                      <a:endParaRPr lang="en-US" sz="1300" dirty="0">
+                        <a:latin typeface="Calibri" charset="0"/>
+                        <a:ea typeface="Calibri" charset="0"/>
+                        <a:cs typeface="Calibri" charset="0"/>
+                      </a:endParaRPr>
+                    </a:p>
+                  </a:txBody>
+                  <a:tcPr marL="91440" marR="91440" marT="45720" marB="45720" anchor="ctr">
+                    <a:lnL w="12700" cap="flat" cmpd="sng" algn="ctr">
+                      <a:solidFill>
+                        <a:srgbClr val="2A3A5C"/>
+                      </a:solidFill>
+                      <a:prstDash val="solid"/>
+                      <a:round/>
+                      <a:headEnd type="none" w="med" len="med"/>
+                      <a:tailEnd type="none" w="med" len="med"/>
+                    </a:lnL>
+                    <a:lnR w="12700" cap="flat" cmpd="sng" algn="ctr">
+                      <a:solidFill>
+                        <a:srgbClr val="2A3A5C"/>
+                      </a:solidFill>
+                      <a:prstDash val="solid"/>
+                      <a:round/>
+                      <a:headEnd type="none" w="med" len="med"/>
+                      <a:tailEnd type="none" w="med" len="med"/>
+                    </a:lnR>
+                    <a:lnT w="12700" cap="flat" cmpd="sng" algn="ctr">
+                      <a:solidFill>
+                        <a:srgbClr val="2A3A5C"/>
+                      </a:solidFill>
+                      <a:prstDash val="solid"/>
+                      <a:round/>
+                      <a:headEnd type="none" w="med" len="med"/>
+                      <a:tailEnd type="none" w="med" len="med"/>
+                    </a:lnT>
+                    <a:lnB w="12700" cap="flat" cmpd="sng" algn="ctr">
+                      <a:solidFill>
+                        <a:srgbClr val="2A3A5C"/>
+                      </a:solidFill>
+                      <a:prstDash val="solid"/>
+                      <a:round/>
+                      <a:headEnd type="none" w="med" len="med"/>
+                      <a:tailEnd type="none" w="med" len="med"/>
+                    </a:lnB>
+                    <a:solidFill>
+                      <a:srgbClr val="2E75B6"/>
+                    </a:solidFill>
+                  </a:tcPr>
+                </a:tc>
+              </a:tr>
+              <a:tr h="365760">
+                <a:tc>
+                  <a:txBody>
+                    <a:bodyPr/>
+                    <a:lstStyle/>
+                    <a:p>
+                      <a:pPr algn="l" indent="0" marL="0">
+                        <a:buNone/>
+                      </a:pPr>
+                      <a:r>
+                        <a:rPr lang="en-US" sz="1300" dirty="0">
+                          <a:solidFill>
+                            <a:srgbClr val="FFFFFF"/>
+                          </a:solidFill>
+                          <a:latin typeface="Calibri" pitchFamily="34" charset="0"/>
+                          <a:ea typeface="Calibri" pitchFamily="34" charset="-122"/>
+                          <a:cs typeface="Calibri" pitchFamily="34" charset="-120"/>
+                        </a:rPr>
+                        <a:t>C1</a:t>
+                      </a:r>
+                      <a:endParaRPr lang="en-US" sz="1300" dirty="0">
+                        <a:latin typeface="Calibri" charset="0"/>
+                        <a:ea typeface="Calibri" charset="0"/>
+                        <a:cs typeface="Calibri" charset="0"/>
+                      </a:endParaRPr>
+                    </a:p>
+                  </a:txBody>
+                  <a:tcPr marL="91440" marR="91440" marT="45720" marB="45720" anchor="ctr">
+                    <a:lnL w="12700" cap="flat" cmpd="sng" algn="ctr">
+                      <a:solidFill>
+                        <a:srgbClr val="2A3A5C"/>
+                      </a:solidFill>
+                      <a:prstDash val="solid"/>
+                      <a:round/>
+                      <a:headEnd type="none" w="med" len="med"/>
+                      <a:tailEnd type="none" w="med" len="med"/>
+                    </a:lnL>
+                    <a:lnR w="12700" cap="flat" cmpd="sng" algn="ctr">
+                      <a:solidFill>
+                        <a:srgbClr val="2A3A5C"/>
+                      </a:solidFill>
+                      <a:prstDash val="solid"/>
+                      <a:round/>
+                      <a:headEnd type="none" w="med" len="med"/>
+                      <a:tailEnd type="none" w="med" len="med"/>
+                    </a:lnR>
+                    <a:lnT w="12700" cap="flat" cmpd="sng" algn="ctr">
+                      <a:solidFill>
+                        <a:srgbClr val="2A3A5C"/>
+                      </a:solidFill>
+                      <a:prstDash val="solid"/>
+                      <a:round/>
+                      <a:headEnd type="none" w="med" len="med"/>
+                      <a:tailEnd type="none" w="med" len="med"/>
+                    </a:lnT>
+                    <a:lnB w="12700" cap="flat" cmpd="sng" algn="ctr">
+                      <a:solidFill>
+                        <a:srgbClr val="2A3A5C"/>
+                      </a:solidFill>
+                      <a:prstDash val="solid"/>
+                      <a:round/>
+                      <a:headEnd type="none" w="med" len="med"/>
+                      <a:tailEnd type="none" w="med" len="med"/>
+                    </a:lnB>
+                    <a:solidFill>
+                      <a:srgbClr val="1B2C4F"/>
+                    </a:solidFill>
+                  </a:tcPr>
+                </a:tc>
+                <a:tc>
+                  <a:txBody>
+                    <a:bodyPr/>
+                    <a:lstStyle/>
+                    <a:p>
+                      <a:pPr algn="l" indent="0" marL="0">
+                        <a:buNone/>
+                      </a:pPr>
+                      <a:r>
+                        <a:rPr lang="en-US" sz="1300" dirty="0">
+                          <a:solidFill>
+                            <a:srgbClr val="FFFFFF"/>
+                          </a:solidFill>
+                          <a:latin typeface="Calibri" pitchFamily="34" charset="0"/>
+                          <a:ea typeface="Calibri" pitchFamily="34" charset="-122"/>
+                          <a:cs typeface="Calibri" pitchFamily="34" charset="-120"/>
+                        </a:rPr>
+                        <a:t>2×2 方向耦合器分束器</a:t>
+                      </a:r>
+                      <a:endParaRPr lang="en-US" sz="1300" dirty="0">
+                        <a:latin typeface="Calibri" charset="0"/>
+                        <a:ea typeface="Calibri" charset="0"/>
+                        <a:cs typeface="Calibri" charset="0"/>
+                      </a:endParaRPr>
+                    </a:p>
+                  </a:txBody>
+                  <a:tcPr marL="91440" marR="91440" marT="45720" marB="45720" anchor="ctr">
+                    <a:lnL w="12700" cap="flat" cmpd="sng" algn="ctr">
+                      <a:solidFill>
+                        <a:srgbClr val="2A3A5C"/>
+                      </a:solidFill>
+                      <a:prstDash val="solid"/>
+                      <a:round/>
+                      <a:headEnd type="none" w="med" len="med"/>
+                      <a:tailEnd type="none" w="med" len="med"/>
+                    </a:lnL>
+                    <a:lnR w="12700" cap="flat" cmpd="sng" algn="ctr">
+                      <a:solidFill>
+                        <a:srgbClr val="2A3A5C"/>
+                      </a:solidFill>
+                      <a:prstDash val="solid"/>
+                      <a:round/>
+                      <a:headEnd type="none" w="med" len="med"/>
+                      <a:tailEnd type="none" w="med" len="med"/>
+                    </a:lnR>
+                    <a:lnT w="12700" cap="flat" cmpd="sng" algn="ctr">
+                      <a:solidFill>
+                        <a:srgbClr val="2A3A5C"/>
+                      </a:solidFill>
+                      <a:prstDash val="solid"/>
+                      <a:round/>
+                      <a:headEnd type="none" w="med" len="med"/>
+                      <a:tailEnd type="none" w="med" len="med"/>
+                    </a:lnT>
+                    <a:lnB w="12700" cap="flat" cmpd="sng" algn="ctr">
+                      <a:solidFill>
+                        <a:srgbClr val="2A3A5C"/>
+                      </a:solidFill>
+                      <a:prstDash val="solid"/>
+                      <a:round/>
+                      <a:headEnd type="none" w="med" len="med"/>
+                      <a:tailEnd type="none" w="med" len="med"/>
+                    </a:lnB>
+                    <a:solidFill>
+                      <a:srgbClr val="1B2C4F"/>
+                    </a:solidFill>
+                  </a:tcPr>
+                </a:tc>
+                <a:tc>
+                  <a:txBody>
+                    <a:bodyPr/>
+                    <a:lstStyle/>
+                    <a:p>
+                      <a:pPr algn="l" indent="0" marL="0">
+                        <a:buNone/>
+                      </a:pPr>
+                      <a:r>
+                        <a:rPr lang="en-US" sz="1300" dirty="0">
+                          <a:solidFill>
+                            <a:srgbClr val="FFFFFF"/>
+                          </a:solidFill>
+                          <a:latin typeface="Calibri" pitchFamily="34" charset="0"/>
+                          <a:ea typeface="Calibri" pitchFamily="34" charset="-122"/>
+                          <a:cs typeface="Calibri" pitchFamily="34" charset="-120"/>
+                        </a:rPr>
+                        <a:t>4</a:t>
+                      </a:r>
+                      <a:endParaRPr lang="en-US" sz="1300" dirty="0">
+                        <a:latin typeface="Calibri" charset="0"/>
+                        <a:ea typeface="Calibri" charset="0"/>
+                        <a:cs typeface="Calibri" charset="0"/>
+                      </a:endParaRPr>
+                    </a:p>
+                  </a:txBody>
+                  <a:tcPr marL="91440" marR="91440" marT="45720" marB="45720" anchor="ctr">
+                    <a:lnL w="12700" cap="flat" cmpd="sng" algn="ctr">
+                      <a:solidFill>
+                        <a:srgbClr val="2A3A5C"/>
+                      </a:solidFill>
+                      <a:prstDash val="solid"/>
+                      <a:round/>
+                      <a:headEnd type="none" w="med" len="med"/>
+                      <a:tailEnd type="none" w="med" len="med"/>
+                    </a:lnL>
+                    <a:lnR w="12700" cap="flat" cmpd="sng" algn="ctr">
+                      <a:solidFill>
+                        <a:srgbClr val="2A3A5C"/>
+                      </a:solidFill>
+                      <a:prstDash val="solid"/>
+                      <a:round/>
+                      <a:headEnd type="none" w="med" len="med"/>
+                      <a:tailEnd type="none" w="med" len="med"/>
+                    </a:lnR>
+                    <a:lnT w="12700" cap="flat" cmpd="sng" algn="ctr">
+                      <a:solidFill>
+                        <a:srgbClr val="2A3A5C"/>
+                      </a:solidFill>
+                      <a:prstDash val="solid"/>
+                      <a:round/>
+                      <a:headEnd type="none" w="med" len="med"/>
+                      <a:tailEnd type="none" w="med" len="med"/>
+                    </a:lnT>
+                    <a:lnB w="12700" cap="flat" cmpd="sng" algn="ctr">
+                      <a:solidFill>
+                        <a:srgbClr val="2A3A5C"/>
+                      </a:solidFill>
+                      <a:prstDash val="solid"/>
+                      <a:round/>
+                      <a:headEnd type="none" w="med" len="med"/>
+                      <a:tailEnd type="none" w="med" len="med"/>
+                    </a:lnB>
+                    <a:solidFill>
+                      <a:srgbClr val="1B2C4F"/>
+                    </a:solidFill>
+                  </a:tcPr>
+                </a:tc>
+                <a:tc>
+                  <a:txBody>
+                    <a:bodyPr/>
+                    <a:lstStyle/>
+                    <a:p>
+                      <a:pPr algn="l" indent="0" marL="0">
+                        <a:buNone/>
+                      </a:pPr>
+                      <a:r>
+                        <a:rPr lang="en-US" sz="1300" dirty="0">
+                          <a:solidFill>
+                            <a:srgbClr val="FFFFFF"/>
+                          </a:solidFill>
+                          <a:latin typeface="Calibri" pitchFamily="34" charset="0"/>
+                          <a:ea typeface="Calibri" pitchFamily="34" charset="-122"/>
+                          <a:cs typeface="Calibri" pitchFamily="34" charset="-120"/>
+                        </a:rPr>
+                        <a:t>3.6 KB</a:t>
+                      </a:r>
+                      <a:endParaRPr lang="en-US" sz="1300" dirty="0">
+                        <a:latin typeface="Calibri" charset="0"/>
+                        <a:ea typeface="Calibri" charset="0"/>
+                        <a:cs typeface="Calibri" charset="0"/>
+                      </a:endParaRPr>
+                    </a:p>
+                  </a:txBody>
+                  <a:tcPr marL="91440" marR="91440" marT="45720" marB="45720" anchor="ctr">
+                    <a:lnL w="12700" cap="flat" cmpd="sng" algn="ctr">
+                      <a:solidFill>
+                        <a:srgbClr val="2A3A5C"/>
+                      </a:solidFill>
+                      <a:prstDash val="solid"/>
+                      <a:round/>
+                      <a:headEnd type="none" w="med" len="med"/>
+                      <a:tailEnd type="none" w="med" len="med"/>
+                    </a:lnL>
+                    <a:lnR w="12700" cap="flat" cmpd="sng" algn="ctr">
+                      <a:solidFill>
+                        <a:srgbClr val="2A3A5C"/>
+                      </a:solidFill>
+                      <a:prstDash val="solid"/>
+                      <a:round/>
+                      <a:headEnd type="none" w="med" len="med"/>
+                      <a:tailEnd type="none" w="med" len="med"/>
+                    </a:lnR>
+                    <a:lnT w="12700" cap="flat" cmpd="sng" algn="ctr">
+                      <a:solidFill>
+                        <a:srgbClr val="2A3A5C"/>
+                      </a:solidFill>
+                      <a:prstDash val="solid"/>
+                      <a:round/>
+                      <a:headEnd type="none" w="med" len="med"/>
+                      <a:tailEnd type="none" w="med" len="med"/>
+                    </a:lnT>
+                    <a:lnB w="12700" cap="flat" cmpd="sng" algn="ctr">
+                      <a:solidFill>
+                        <a:srgbClr val="2A3A5C"/>
+                      </a:solidFill>
+                      <a:prstDash val="solid"/>
+                      <a:round/>
+                      <a:headEnd type="none" w="med" len="med"/>
+                      <a:tailEnd type="none" w="med" len="med"/>
+                    </a:lnB>
+                    <a:solidFill>
+                      <a:srgbClr val="1B2C4F"/>
+                    </a:solidFill>
+                  </a:tcPr>
+                </a:tc>
+                <a:tc>
+                  <a:txBody>
+                    <a:bodyPr/>
+                    <a:lstStyle/>
+                    <a:p>
+                      <a:pPr algn="l" indent="0" marL="0">
+                        <a:buNone/>
+                      </a:pPr>
+                      <a:r>
+                        <a:rPr lang="en-US" sz="1300" dirty="0">
+                          <a:solidFill>
+                            <a:srgbClr val="FFFFFF"/>
+                          </a:solidFill>
+                          <a:latin typeface="Calibri" pitchFamily="34" charset="0"/>
+                          <a:ea typeface="Calibri" pitchFamily="34" charset="-122"/>
+                          <a:cs typeface="Calibri" pitchFamily="34" charset="-120"/>
+                        </a:rPr>
+                        <a:t>DRC·LVS 全绿</a:t>
+                      </a:r>
+                      <a:endParaRPr lang="en-US" sz="1300" dirty="0">
+                        <a:latin typeface="Calibri" charset="0"/>
+                        <a:ea typeface="Calibri" charset="0"/>
+                        <a:cs typeface="Calibri" charset="0"/>
+                      </a:endParaRPr>
+                    </a:p>
+                  </a:txBody>
+                  <a:tcPr marL="91440" marR="91440" marT="45720" marB="45720" anchor="ctr">
+                    <a:lnL w="12700" cap="flat" cmpd="sng" algn="ctr">
+                      <a:solidFill>
+                        <a:srgbClr val="2A3A5C"/>
+                      </a:solidFill>
+                      <a:prstDash val="solid"/>
+                      <a:round/>
+                      <a:headEnd type="none" w="med" len="med"/>
+                      <a:tailEnd type="none" w="med" len="med"/>
+                    </a:lnL>
+                    <a:lnR w="12700" cap="flat" cmpd="sng" algn="ctr">
+                      <a:solidFill>
+                        <a:srgbClr val="2A3A5C"/>
+                      </a:solidFill>
+                      <a:prstDash val="solid"/>
+                      <a:round/>
+                      <a:headEnd type="none" w="med" len="med"/>
+                      <a:tailEnd type="none" w="med" len="med"/>
+                    </a:lnR>
+                    <a:lnT w="12700" cap="flat" cmpd="sng" algn="ctr">
+                      <a:solidFill>
+                        <a:srgbClr val="2A3A5C"/>
+                      </a:solidFill>
+                      <a:prstDash val="solid"/>
+                      <a:round/>
+                      <a:headEnd type="none" w="med" len="med"/>
+                      <a:tailEnd type="none" w="med" len="med"/>
+                    </a:lnT>
+                    <a:lnB w="12700" cap="flat" cmpd="sng" algn="ctr">
+                      <a:solidFill>
+                        <a:srgbClr val="2A3A5C"/>
+                      </a:solidFill>
+                      <a:prstDash val="solid"/>
+                      <a:round/>
+                      <a:headEnd type="none" w="med" len="med"/>
+                      <a:tailEnd type="none" w="med" len="med"/>
+                    </a:lnB>
+                    <a:solidFill>
+                      <a:srgbClr val="1B2C4F"/>
+                    </a:solidFill>
+                  </a:tcPr>
+                </a:tc>
+              </a:tr>
+              <a:tr h="365760">
+                <a:tc>
+                  <a:txBody>
+                    <a:bodyPr/>
+                    <a:lstStyle/>
+                    <a:p>
+                      <a:pPr algn="l" indent="0" marL="0">
+                        <a:buNone/>
+                      </a:pPr>
+                      <a:r>
+                        <a:rPr lang="en-US" sz="1300" dirty="0">
+                          <a:solidFill>
+                            <a:srgbClr val="FFFFFF"/>
+                          </a:solidFill>
+                          <a:latin typeface="Calibri" pitchFamily="34" charset="0"/>
+                          <a:ea typeface="Calibri" pitchFamily="34" charset="-122"/>
+                          <a:cs typeface="Calibri" pitchFamily="34" charset="-120"/>
+                        </a:rPr>
+                        <a:t>C2</a:t>
+                      </a:r>
+                      <a:endParaRPr lang="en-US" sz="1300" dirty="0">
+                        <a:latin typeface="Calibri" charset="0"/>
+                        <a:ea typeface="Calibri" charset="0"/>
+                        <a:cs typeface="Calibri" charset="0"/>
+                      </a:endParaRPr>
+                    </a:p>
+                  </a:txBody>
+                  <a:tcPr marL="91440" marR="91440" marT="45720" marB="45720" anchor="ctr">
+                    <a:lnL w="12700" cap="flat" cmpd="sng" algn="ctr">
+                      <a:solidFill>
+                        <a:srgbClr val="2A3A5C"/>
+                      </a:solidFill>
+                      <a:prstDash val="solid"/>
+                      <a:round/>
+                      <a:headEnd type="none" w="med" len="med"/>
+                      <a:tailEnd type="none" w="med" len="med"/>
+                    </a:lnL>
+                    <a:lnR w="12700" cap="flat" cmpd="sng" algn="ctr">
+                      <a:solidFill>
+                        <a:srgbClr val="2A3A5C"/>
+                      </a:solidFill>
+                      <a:prstDash val="solid"/>
+                      <a:round/>
+                      <a:headEnd type="none" w="med" len="med"/>
+                      <a:tailEnd type="none" w="med" len="med"/>
+                    </a:lnR>
+                    <a:lnT w="12700" cap="flat" cmpd="sng" algn="ctr">
+                      <a:solidFill>
+                        <a:srgbClr val="2A3A5C"/>
+                      </a:solidFill>
+                      <a:prstDash val="solid"/>
+                      <a:round/>
+                      <a:headEnd type="none" w="med" len="med"/>
+                      <a:tailEnd type="none" w="med" len="med"/>
+                    </a:lnT>
+                    <a:lnB w="12700" cap="flat" cmpd="sng" algn="ctr">
+                      <a:solidFill>
+                        <a:srgbClr val="2A3A5C"/>
+                      </a:solidFill>
+                      <a:prstDash val="solid"/>
+                      <a:round/>
+                      <a:headEnd type="none" w="med" len="med"/>
+                      <a:tailEnd type="none" w="med" len="med"/>
+                    </a:lnB>
+                    <a:solidFill>
+                      <a:srgbClr val="1B2C4F"/>
+                    </a:solidFill>
+                  </a:tcPr>
+                </a:tc>
+                <a:tc>
+                  <a:txBody>
+                    <a:bodyPr/>
+                    <a:lstStyle/>
+                    <a:p>
+                      <a:pPr algn="l" indent="0" marL="0">
+                        <a:buNone/>
+                      </a:pPr>
+                      <a:r>
+                        <a:rPr lang="en-US" sz="1300" dirty="0">
+                          <a:solidFill>
+                            <a:srgbClr val="FFFFFF"/>
+                          </a:solidFill>
+                          <a:latin typeface="Calibri" pitchFamily="34" charset="0"/>
+                          <a:ea typeface="Calibri" pitchFamily="34" charset="-122"/>
+                          <a:cs typeface="Calibri" pitchFamily="34" charset="-120"/>
+                        </a:rPr>
+                        <a:t>环形 add-drop</a:t>
+                      </a:r>
+                      <a:endParaRPr lang="en-US" sz="1300" dirty="0">
+                        <a:latin typeface="Calibri" charset="0"/>
+                        <a:ea typeface="Calibri" charset="0"/>
+                        <a:cs typeface="Calibri" charset="0"/>
+                      </a:endParaRPr>
+                    </a:p>
+                  </a:txBody>
+                  <a:tcPr marL="91440" marR="91440" marT="45720" marB="45720" anchor="ctr">
+                    <a:lnL w="12700" cap="flat" cmpd="sng" algn="ctr">
+                      <a:solidFill>
+                        <a:srgbClr val="2A3A5C"/>
+                      </a:solidFill>
+                      <a:prstDash val="solid"/>
+                      <a:round/>
+                      <a:headEnd type="none" w="med" len="med"/>
+                      <a:tailEnd type="none" w="med" len="med"/>
+                    </a:lnL>
+                    <a:lnR w="12700" cap="flat" cmpd="sng" algn="ctr">
+                      <a:solidFill>
+                        <a:srgbClr val="2A3A5C"/>
+                      </a:solidFill>
+                      <a:prstDash val="solid"/>
+                      <a:round/>
+                      <a:headEnd type="none" w="med" len="med"/>
+                      <a:tailEnd type="none" w="med" len="med"/>
+                    </a:lnR>
+                    <a:lnT w="12700" cap="flat" cmpd="sng" algn="ctr">
+                      <a:solidFill>
+                        <a:srgbClr val="2A3A5C"/>
+                      </a:solidFill>
+                      <a:prstDash val="solid"/>
+                      <a:round/>
+                      <a:headEnd type="none" w="med" len="med"/>
+                      <a:tailEnd type="none" w="med" len="med"/>
+                    </a:lnT>
+                    <a:lnB w="12700" cap="flat" cmpd="sng" algn="ctr">
+                      <a:solidFill>
+                        <a:srgbClr val="2A3A5C"/>
+                      </a:solidFill>
+                      <a:prstDash val="solid"/>
+                      <a:round/>
+                      <a:headEnd type="none" w="med" len="med"/>
+                      <a:tailEnd type="none" w="med" len="med"/>
+                    </a:lnB>
+                    <a:solidFill>
+                      <a:srgbClr val="1B2C4F"/>
+                    </a:solidFill>
+                  </a:tcPr>
+                </a:tc>
+                <a:tc>
+                  <a:txBody>
+                    <a:bodyPr/>
+                    <a:lstStyle/>
+                    <a:p>
+                      <a:pPr algn="l" indent="0" marL="0">
+                        <a:buNone/>
+                      </a:pPr>
+                      <a:r>
+                        <a:rPr lang="en-US" sz="1300" dirty="0">
+                          <a:solidFill>
+                            <a:srgbClr val="FFFFFF"/>
+                          </a:solidFill>
+                          <a:latin typeface="Calibri" pitchFamily="34" charset="0"/>
+                          <a:ea typeface="Calibri" pitchFamily="34" charset="-122"/>
+                          <a:cs typeface="Calibri" pitchFamily="34" charset="-120"/>
+                        </a:rPr>
+                        <a:t>4</a:t>
+                      </a:r>
+                      <a:endParaRPr lang="en-US" sz="1300" dirty="0">
+                        <a:latin typeface="Calibri" charset="0"/>
+                        <a:ea typeface="Calibri" charset="0"/>
+                        <a:cs typeface="Calibri" charset="0"/>
+                      </a:endParaRPr>
+                    </a:p>
+                  </a:txBody>
+                  <a:tcPr marL="91440" marR="91440" marT="45720" marB="45720" anchor="ctr">
+                    <a:lnL w="12700" cap="flat" cmpd="sng" algn="ctr">
+                      <a:solidFill>
+                        <a:srgbClr val="2A3A5C"/>
+                      </a:solidFill>
+                      <a:prstDash val="solid"/>
+                      <a:round/>
+                      <a:headEnd type="none" w="med" len="med"/>
+                      <a:tailEnd type="none" w="med" len="med"/>
+                    </a:lnL>
+                    <a:lnR w="12700" cap="flat" cmpd="sng" algn="ctr">
+                      <a:solidFill>
+                        <a:srgbClr val="2A3A5C"/>
+                      </a:solidFill>
+                      <a:prstDash val="solid"/>
+                      <a:round/>
+                      <a:headEnd type="none" w="med" len="med"/>
+                      <a:tailEnd type="none" w="med" len="med"/>
+                    </a:lnR>
+                    <a:lnT w="12700" cap="flat" cmpd="sng" algn="ctr">
+                      <a:solidFill>
+                        <a:srgbClr val="2A3A5C"/>
+                      </a:solidFill>
+                      <a:prstDash val="solid"/>
+                      <a:round/>
+                      <a:headEnd type="none" w="med" len="med"/>
+                      <a:tailEnd type="none" w="med" len="med"/>
+                    </a:lnT>
+                    <a:lnB w="12700" cap="flat" cmpd="sng" algn="ctr">
+                      <a:solidFill>
+                        <a:srgbClr val="2A3A5C"/>
+                      </a:solidFill>
+                      <a:prstDash val="solid"/>
+                      <a:round/>
+                      <a:headEnd type="none" w="med" len="med"/>
+                      <a:tailEnd type="none" w="med" len="med"/>
+                    </a:lnB>
+                    <a:solidFill>
+                      <a:srgbClr val="1B2C4F"/>
+                    </a:solidFill>
+                  </a:tcPr>
+                </a:tc>
+                <a:tc>
+                  <a:txBody>
+                    <a:bodyPr/>
+                    <a:lstStyle/>
+                    <a:p>
+                      <a:pPr algn="l" indent="0" marL="0">
+                        <a:buNone/>
+                      </a:pPr>
+                      <a:r>
+                        <a:rPr lang="en-US" sz="1300" dirty="0">
+                          <a:solidFill>
+                            <a:srgbClr val="FFFFFF"/>
+                          </a:solidFill>
+                          <a:latin typeface="Calibri" pitchFamily="34" charset="0"/>
+                          <a:ea typeface="Calibri" pitchFamily="34" charset="-122"/>
+                          <a:cs typeface="Calibri" pitchFamily="34" charset="-120"/>
+                        </a:rPr>
+                        <a:t>4.2 KB</a:t>
+                      </a:r>
+                      <a:endParaRPr lang="en-US" sz="1300" dirty="0">
+                        <a:latin typeface="Calibri" charset="0"/>
+                        <a:ea typeface="Calibri" charset="0"/>
+                        <a:cs typeface="Calibri" charset="0"/>
+                      </a:endParaRPr>
+                    </a:p>
+                  </a:txBody>
+                  <a:tcPr marL="91440" marR="91440" marT="45720" marB="45720" anchor="ctr">
+                    <a:lnL w="12700" cap="flat" cmpd="sng" algn="ctr">
+                      <a:solidFill>
+                        <a:srgbClr val="2A3A5C"/>
+                      </a:solidFill>
+                      <a:prstDash val="solid"/>
+                      <a:round/>
+                      <a:headEnd type="none" w="med" len="med"/>
+                      <a:tailEnd type="none" w="med" len="med"/>
+                    </a:lnL>
+                    <a:lnR w="12700" cap="flat" cmpd="sng" algn="ctr">
+                      <a:solidFill>
+                        <a:srgbClr val="2A3A5C"/>
+                      </a:solidFill>
+                      <a:prstDash val="solid"/>
+                      <a:round/>
+                      <a:headEnd type="none" w="med" len="med"/>
+                      <a:tailEnd type="none" w="med" len="med"/>
+                    </a:lnR>
+                    <a:lnT w="12700" cap="flat" cmpd="sng" algn="ctr">
+                      <a:solidFill>
+                        <a:srgbClr val="2A3A5C"/>
+                      </a:solidFill>
+                      <a:prstDash val="solid"/>
+                      <a:round/>
+                      <a:headEnd type="none" w="med" len="med"/>
+                      <a:tailEnd type="none" w="med" len="med"/>
+                    </a:lnT>
+                    <a:lnB w="12700" cap="flat" cmpd="sng" algn="ctr">
+                      <a:solidFill>
+                        <a:srgbClr val="2A3A5C"/>
+                      </a:solidFill>
+                      <a:prstDash val="solid"/>
+                      <a:round/>
+                      <a:headEnd type="none" w="med" len="med"/>
+                      <a:tailEnd type="none" w="med" len="med"/>
+                    </a:lnB>
+                    <a:solidFill>
+                      <a:srgbClr val="1B2C4F"/>
+                    </a:solidFill>
+                  </a:tcPr>
+                </a:tc>
+                <a:tc>
+                  <a:txBody>
+                    <a:bodyPr/>
+                    <a:lstStyle/>
+                    <a:p>
+                      <a:pPr algn="l" indent="0" marL="0">
+                        <a:buNone/>
+                      </a:pPr>
+                      <a:r>
+                        <a:rPr lang="en-US" sz="1300" dirty="0">
+                          <a:solidFill>
+                            <a:srgbClr val="FFFFFF"/>
+                          </a:solidFill>
+                          <a:latin typeface="Calibri" pitchFamily="34" charset="0"/>
+                          <a:ea typeface="Calibri" pitchFamily="34" charset="-122"/>
+                          <a:cs typeface="Calibri" pitchFamily="34" charset="-120"/>
+                        </a:rPr>
+                        <a:t>DRC·LVS 全绿</a:t>
+                      </a:r>
+                      <a:endParaRPr lang="en-US" sz="1300" dirty="0">
+                        <a:latin typeface="Calibri" charset="0"/>
+                        <a:ea typeface="Calibri" charset="0"/>
+                        <a:cs typeface="Calibri" charset="0"/>
+                      </a:endParaRPr>
+                    </a:p>
+                  </a:txBody>
+                  <a:tcPr marL="91440" marR="91440" marT="45720" marB="45720" anchor="ctr">
+                    <a:lnL w="12700" cap="flat" cmpd="sng" algn="ctr">
+                      <a:solidFill>
+                        <a:srgbClr val="2A3A5C"/>
+                      </a:solidFill>
+                      <a:prstDash val="solid"/>
+                      <a:round/>
+                      <a:headEnd type="none" w="med" len="med"/>
+                      <a:tailEnd type="none" w="med" len="med"/>
+                    </a:lnL>
+                    <a:lnR w="12700" cap="flat" cmpd="sng" algn="ctr">
+                      <a:solidFill>
+                        <a:srgbClr val="2A3A5C"/>
+                      </a:solidFill>
+                      <a:prstDash val="solid"/>
+                      <a:round/>
+                      <a:headEnd type="none" w="med" len="med"/>
+                      <a:tailEnd type="none" w="med" len="med"/>
+                    </a:lnR>
+                    <a:lnT w="12700" cap="flat" cmpd="sng" algn="ctr">
+                      <a:solidFill>
+                        <a:srgbClr val="2A3A5C"/>
+                      </a:solidFill>
+                      <a:prstDash val="solid"/>
+                      <a:round/>
+                      <a:headEnd type="none" w="med" len="med"/>
+                      <a:tailEnd type="none" w="med" len="med"/>
+                    </a:lnT>
+                    <a:lnB w="12700" cap="flat" cmpd="sng" algn="ctr">
+                      <a:solidFill>
+                        <a:srgbClr val="2A3A5C"/>
+                      </a:solidFill>
+                      <a:prstDash val="solid"/>
+                      <a:round/>
+                      <a:headEnd type="none" w="med" len="med"/>
+                      <a:tailEnd type="none" w="med" len="med"/>
+                    </a:lnB>
+                    <a:solidFill>
+                      <a:srgbClr val="1B2C4F"/>
+                    </a:solidFill>
+                  </a:tcPr>
+                </a:tc>
+              </a:tr>
+              <a:tr h="365760">
+                <a:tc>
+                  <a:txBody>
+                    <a:bodyPr/>
+                    <a:lstStyle/>
+                    <a:p>
+                      <a:pPr algn="l" indent="0" marL="0">
+                        <a:buNone/>
+                      </a:pPr>
+                      <a:r>
+                        <a:rPr lang="en-US" sz="1300" dirty="0">
+                          <a:solidFill>
+                            <a:srgbClr val="FFFFFF"/>
+                          </a:solidFill>
+                          <a:latin typeface="Calibri" pitchFamily="34" charset="0"/>
+                          <a:ea typeface="Calibri" pitchFamily="34" charset="-122"/>
+                          <a:cs typeface="Calibri" pitchFamily="34" charset="-120"/>
+                        </a:rPr>
+                        <a:t>C3</a:t>
+                      </a:r>
+                      <a:endParaRPr lang="en-US" sz="1300" dirty="0">
+                        <a:latin typeface="Calibri" charset="0"/>
+                        <a:ea typeface="Calibri" charset="0"/>
+                        <a:cs typeface="Calibri" charset="0"/>
+                      </a:endParaRPr>
+                    </a:p>
+                  </a:txBody>
+                  <a:tcPr marL="91440" marR="91440" marT="45720" marB="45720" anchor="ctr">
+                    <a:lnL w="12700" cap="flat" cmpd="sng" algn="ctr">
+                      <a:solidFill>
+                        <a:srgbClr val="2A3A5C"/>
+                      </a:solidFill>
+                      <a:prstDash val="solid"/>
+                      <a:round/>
+                      <a:headEnd type="none" w="med" len="med"/>
+                      <a:tailEnd type="none" w="med" len="med"/>
+                    </a:lnL>
+                    <a:lnR w="12700" cap="flat" cmpd="sng" algn="ctr">
+                      <a:solidFill>
+                        <a:srgbClr val="2A3A5C"/>
+                      </a:solidFill>
+                      <a:prstDash val="solid"/>
+                      <a:round/>
+                      <a:headEnd type="none" w="med" len="med"/>
+                      <a:tailEnd type="none" w="med" len="med"/>
+                    </a:lnR>
+                    <a:lnT w="12700" cap="flat" cmpd="sng" algn="ctr">
+                      <a:solidFill>
+                        <a:srgbClr val="2A3A5C"/>
+                      </a:solidFill>
+                      <a:prstDash val="solid"/>
+                      <a:round/>
+                      <a:headEnd type="none" w="med" len="med"/>
+                      <a:tailEnd type="none" w="med" len="med"/>
+                    </a:lnT>
+                    <a:lnB w="12700" cap="flat" cmpd="sng" algn="ctr">
+                      <a:solidFill>
+                        <a:srgbClr val="2A3A5C"/>
+                      </a:solidFill>
+                      <a:prstDash val="solid"/>
+                      <a:round/>
+                      <a:headEnd type="none" w="med" len="med"/>
+                      <a:tailEnd type="none" w="med" len="med"/>
+                    </a:lnB>
+                    <a:solidFill>
+                      <a:srgbClr val="1B2C4F"/>
+                    </a:solidFill>
+                  </a:tcPr>
+                </a:tc>
+                <a:tc>
+                  <a:txBody>
+                    <a:bodyPr/>
+                    <a:lstStyle/>
+                    <a:p>
+                      <a:pPr algn="l" indent="0" marL="0">
+                        <a:buNone/>
+                      </a:pPr>
+                      <a:r>
+                        <a:rPr lang="en-US" sz="1300" dirty="0">
+                          <a:solidFill>
+                            <a:srgbClr val="FFFFFF"/>
+                          </a:solidFill>
+                          <a:latin typeface="Calibri" pitchFamily="34" charset="0"/>
+                          <a:ea typeface="Calibri" pitchFamily="34" charset="-122"/>
+                          <a:cs typeface="Calibri" pitchFamily="34" charset="-120"/>
+                        </a:rPr>
+                        <a:t>方向耦合器 + 环形谐振器</a:t>
+                      </a:r>
+                      <a:endParaRPr lang="en-US" sz="1300" dirty="0">
+                        <a:latin typeface="Calibri" charset="0"/>
+                        <a:ea typeface="Calibri" charset="0"/>
+                        <a:cs typeface="Calibri" charset="0"/>
+                      </a:endParaRPr>
+                    </a:p>
+                  </a:txBody>
+                  <a:tcPr marL="91440" marR="91440" marT="45720" marB="45720" anchor="ctr">
+                    <a:lnL w="12700" cap="flat" cmpd="sng" algn="ctr">
+                      <a:solidFill>
+                        <a:srgbClr val="2A3A5C"/>
+                      </a:solidFill>
+                      <a:prstDash val="solid"/>
+                      <a:round/>
+                      <a:headEnd type="none" w="med" len="med"/>
+                      <a:tailEnd type="none" w="med" len="med"/>
+                    </a:lnL>
+                    <a:lnR w="12700" cap="flat" cmpd="sng" algn="ctr">
+                      <a:solidFill>
+                        <a:srgbClr val="2A3A5C"/>
+                      </a:solidFill>
+                      <a:prstDash val="solid"/>
+                      <a:round/>
+                      <a:headEnd type="none" w="med" len="med"/>
+                      <a:tailEnd type="none" w="med" len="med"/>
+                    </a:lnR>
+                    <a:lnT w="12700" cap="flat" cmpd="sng" algn="ctr">
+                      <a:solidFill>
+                        <a:srgbClr val="2A3A5C"/>
+                      </a:solidFill>
+                      <a:prstDash val="solid"/>
+                      <a:round/>
+                      <a:headEnd type="none" w="med" len="med"/>
+                      <a:tailEnd type="none" w="med" len="med"/>
+                    </a:lnT>
+                    <a:lnB w="12700" cap="flat" cmpd="sng" algn="ctr">
+                      <a:solidFill>
+                        <a:srgbClr val="2A3A5C"/>
+                      </a:solidFill>
+                      <a:prstDash val="solid"/>
+                      <a:round/>
+                      <a:headEnd type="none" w="med" len="med"/>
+                      <a:tailEnd type="none" w="med" len="med"/>
+                    </a:lnB>
+                    <a:solidFill>
+                      <a:srgbClr val="1B2C4F"/>
+                    </a:solidFill>
+                  </a:tcPr>
+                </a:tc>
+                <a:tc>
+                  <a:txBody>
+                    <a:bodyPr/>
+                    <a:lstStyle/>
+                    <a:p>
+                      <a:pPr algn="l" indent="0" marL="0">
+                        <a:buNone/>
+                      </a:pPr>
+                      <a:r>
+                        <a:rPr lang="en-US" sz="1300" dirty="0">
+                          <a:solidFill>
+                            <a:srgbClr val="FFFFFF"/>
+                          </a:solidFill>
+                          <a:latin typeface="Calibri" pitchFamily="34" charset="0"/>
+                          <a:ea typeface="Calibri" pitchFamily="34" charset="-122"/>
+                          <a:cs typeface="Calibri" pitchFamily="34" charset="-120"/>
+                        </a:rPr>
+                        <a:t>6</a:t>
+                      </a:r>
+                      <a:endParaRPr lang="en-US" sz="1300" dirty="0">
+                        <a:latin typeface="Calibri" charset="0"/>
+                        <a:ea typeface="Calibri" charset="0"/>
+                        <a:cs typeface="Calibri" charset="0"/>
+                      </a:endParaRPr>
+                    </a:p>
+                  </a:txBody>
+                  <a:tcPr marL="91440" marR="91440" marT="45720" marB="45720" anchor="ctr">
+                    <a:lnL w="12700" cap="flat" cmpd="sng" algn="ctr">
+                      <a:solidFill>
+                        <a:srgbClr val="2A3A5C"/>
+                      </a:solidFill>
+                      <a:prstDash val="solid"/>
+                      <a:round/>
+                      <a:headEnd type="none" w="med" len="med"/>
+                      <a:tailEnd type="none" w="med" len="med"/>
+                    </a:lnL>
+                    <a:lnR w="12700" cap="flat" cmpd="sng" algn="ctr">
+                      <a:solidFill>
+                        <a:srgbClr val="2A3A5C"/>
+                      </a:solidFill>
+                      <a:prstDash val="solid"/>
+                      <a:round/>
+                      <a:headEnd type="none" w="med" len="med"/>
+                      <a:tailEnd type="none" w="med" len="med"/>
+                    </a:lnR>
+                    <a:lnT w="12700" cap="flat" cmpd="sng" algn="ctr">
+                      <a:solidFill>
+                        <a:srgbClr val="2A3A5C"/>
+                      </a:solidFill>
+                      <a:prstDash val="solid"/>
+                      <a:round/>
+                      <a:headEnd type="none" w="med" len="med"/>
+                      <a:tailEnd type="none" w="med" len="med"/>
+                    </a:lnT>
+                    <a:lnB w="12700" cap="flat" cmpd="sng" algn="ctr">
+                      <a:solidFill>
+                        <a:srgbClr val="2A3A5C"/>
+                      </a:solidFill>
+                      <a:prstDash val="solid"/>
+                      <a:round/>
+                      <a:headEnd type="none" w="med" len="med"/>
+                      <a:tailEnd type="none" w="med" len="med"/>
+                    </a:lnB>
+                    <a:solidFill>
+                      <a:srgbClr val="1B2C4F"/>
+                    </a:solidFill>
+                  </a:tcPr>
+                </a:tc>
+                <a:tc>
+                  <a:txBody>
+                    <a:bodyPr/>
+                    <a:lstStyle/>
+                    <a:p>
+                      <a:pPr algn="l" indent="0" marL="0">
+                        <a:buNone/>
+                      </a:pPr>
+                      <a:r>
+                        <a:rPr lang="en-US" sz="1300" dirty="0">
+                          <a:solidFill>
+                            <a:srgbClr val="FFFFFF"/>
+                          </a:solidFill>
+                          <a:latin typeface="Calibri" pitchFamily="34" charset="0"/>
+                          <a:ea typeface="Calibri" pitchFamily="34" charset="-122"/>
+                          <a:cs typeface="Calibri" pitchFamily="34" charset="-120"/>
+                        </a:rPr>
+                        <a:t>5.5 KB</a:t>
+                      </a:r>
+                      <a:endParaRPr lang="en-US" sz="1300" dirty="0">
+                        <a:latin typeface="Calibri" charset="0"/>
+                        <a:ea typeface="Calibri" charset="0"/>
+                        <a:cs typeface="Calibri" charset="0"/>
+                      </a:endParaRPr>
+                    </a:p>
+                  </a:txBody>
+                  <a:tcPr marL="91440" marR="91440" marT="45720" marB="45720" anchor="ctr">
+                    <a:lnL w="12700" cap="flat" cmpd="sng" algn="ctr">
+                      <a:solidFill>
+                        <a:srgbClr val="2A3A5C"/>
+                      </a:solidFill>
+                      <a:prstDash val="solid"/>
+                      <a:round/>
+                      <a:headEnd type="none" w="med" len="med"/>
+                      <a:tailEnd type="none" w="med" len="med"/>
+                    </a:lnL>
+                    <a:lnR w="12700" cap="flat" cmpd="sng" algn="ctr">
+                      <a:solidFill>
+                        <a:srgbClr val="2A3A5C"/>
+                      </a:solidFill>
+                      <a:prstDash val="solid"/>
+                      <a:round/>
+                      <a:headEnd type="none" w="med" len="med"/>
+                      <a:tailEnd type="none" w="med" len="med"/>
+                    </a:lnR>
+                    <a:lnT w="12700" cap="flat" cmpd="sng" algn="ctr">
+                      <a:solidFill>
+                        <a:srgbClr val="2A3A5C"/>
+                      </a:solidFill>
+                      <a:prstDash val="solid"/>
+                      <a:round/>
+                      <a:headEnd type="none" w="med" len="med"/>
+                      <a:tailEnd type="none" w="med" len="med"/>
+                    </a:lnT>
+                    <a:lnB w="12700" cap="flat" cmpd="sng" algn="ctr">
+                      <a:solidFill>
+                        <a:srgbClr val="2A3A5C"/>
+                      </a:solidFill>
+                      <a:prstDash val="solid"/>
+                      <a:round/>
+                      <a:headEnd type="none" w="med" len="med"/>
+                      <a:tailEnd type="none" w="med" len="med"/>
+                    </a:lnB>
+                    <a:solidFill>
+                      <a:srgbClr val="1B2C4F"/>
+                    </a:solidFill>
+                  </a:tcPr>
+                </a:tc>
+                <a:tc>
+                  <a:txBody>
+                    <a:bodyPr/>
+                    <a:lstStyle/>
+                    <a:p>
+                      <a:pPr algn="l" indent="0" marL="0">
+                        <a:buNone/>
+                      </a:pPr>
+                      <a:r>
+                        <a:rPr lang="en-US" sz="1300" dirty="0">
+                          <a:solidFill>
+                            <a:srgbClr val="FFFFFF"/>
+                          </a:solidFill>
+                          <a:latin typeface="Calibri" pitchFamily="34" charset="0"/>
+                          <a:ea typeface="Calibri" pitchFamily="34" charset="-122"/>
+                          <a:cs typeface="Calibri" pitchFamily="34" charset="-120"/>
+                        </a:rPr>
+                        <a:t>DRC·LVS 全绿</a:t>
+                      </a:r>
+                      <a:endParaRPr lang="en-US" sz="1300" dirty="0">
+                        <a:latin typeface="Calibri" charset="0"/>
+                        <a:ea typeface="Calibri" charset="0"/>
+                        <a:cs typeface="Calibri" charset="0"/>
+                      </a:endParaRPr>
+                    </a:p>
+                  </a:txBody>
+                  <a:tcPr marL="91440" marR="91440" marT="45720" marB="45720" anchor="ctr">
+                    <a:lnL w="12700" cap="flat" cmpd="sng" algn="ctr">
+                      <a:solidFill>
+                        <a:srgbClr val="2A3A5C"/>
+                      </a:solidFill>
+                      <a:prstDash val="solid"/>
+                      <a:round/>
+                      <a:headEnd type="none" w="med" len="med"/>
+                      <a:tailEnd type="none" w="med" len="med"/>
+                    </a:lnL>
+                    <a:lnR w="12700" cap="flat" cmpd="sng" algn="ctr">
+                      <a:solidFill>
+                        <a:srgbClr val="2A3A5C"/>
+                      </a:solidFill>
+                      <a:prstDash val="solid"/>
+                      <a:round/>
+                      <a:headEnd type="none" w="med" len="med"/>
+                      <a:tailEnd type="none" w="med" len="med"/>
+                    </a:lnR>
+                    <a:lnT w="12700" cap="flat" cmpd="sng" algn="ctr">
+                      <a:solidFill>
+                        <a:srgbClr val="2A3A5C"/>
+                      </a:solidFill>
+                      <a:prstDash val="solid"/>
+                      <a:round/>
+                      <a:headEnd type="none" w="med" len="med"/>
+                      <a:tailEnd type="none" w="med" len="med"/>
+                    </a:lnT>
+                    <a:lnB w="12700" cap="flat" cmpd="sng" algn="ctr">
+                      <a:solidFill>
+                        <a:srgbClr val="2A3A5C"/>
+                      </a:solidFill>
+                      <a:prstDash val="solid"/>
+                      <a:round/>
+                      <a:headEnd type="none" w="med" len="med"/>
+                      <a:tailEnd type="none" w="med" len="med"/>
+                    </a:lnB>
+                    <a:solidFill>
+                      <a:srgbClr val="1B2C4F"/>
+                    </a:solidFill>
+                  </a:tcPr>
+                </a:tc>
+              </a:tr>
+              <a:tr h="365760">
+                <a:tc>
+                  <a:txBody>
+                    <a:bodyPr/>
+                    <a:lstStyle/>
+                    <a:p>
+                      <a:pPr algn="l" indent="0" marL="0">
+                        <a:buNone/>
+                      </a:pPr>
+                      <a:r>
+                        <a:rPr lang="en-US" sz="1300" dirty="0">
+                          <a:solidFill>
+                            <a:srgbClr val="FFFFFF"/>
+                          </a:solidFill>
+                          <a:latin typeface="Calibri" pitchFamily="34" charset="0"/>
+                          <a:ea typeface="Calibri" pitchFamily="34" charset="-122"/>
+                          <a:cs typeface="Calibri" pitchFamily="34" charset="-120"/>
+                        </a:rPr>
+                        <a:t>C4</a:t>
+                      </a:r>
+                      <a:endParaRPr lang="en-US" sz="1300" dirty="0">
+                        <a:latin typeface="Calibri" charset="0"/>
+                        <a:ea typeface="Calibri" charset="0"/>
+                        <a:cs typeface="Calibri" charset="0"/>
+                      </a:endParaRPr>
+                    </a:p>
+                  </a:txBody>
+                  <a:tcPr marL="91440" marR="91440" marT="45720" marB="45720" anchor="ctr">
+                    <a:lnL w="12700" cap="flat" cmpd="sng" algn="ctr">
+                      <a:solidFill>
+                        <a:srgbClr val="2A3A5C"/>
+                      </a:solidFill>
+                      <a:prstDash val="solid"/>
+                      <a:round/>
+                      <a:headEnd type="none" w="med" len="med"/>
+                      <a:tailEnd type="none" w="med" len="med"/>
+                    </a:lnL>
+                    <a:lnR w="12700" cap="flat" cmpd="sng" algn="ctr">
+                      <a:solidFill>
+                        <a:srgbClr val="2A3A5C"/>
+                      </a:solidFill>
+                      <a:prstDash val="solid"/>
+                      <a:round/>
+                      <a:headEnd type="none" w="med" len="med"/>
+                      <a:tailEnd type="none" w="med" len="med"/>
+                    </a:lnR>
+                    <a:lnT w="12700" cap="flat" cmpd="sng" algn="ctr">
+                      <a:solidFill>
+                        <a:srgbClr val="2A3A5C"/>
+                      </a:solidFill>
+                      <a:prstDash val="solid"/>
+                      <a:round/>
+                      <a:headEnd type="none" w="med" len="med"/>
+                      <a:tailEnd type="none" w="med" len="med"/>
+                    </a:lnT>
+                    <a:lnB w="12700" cap="flat" cmpd="sng" algn="ctr">
+                      <a:solidFill>
+                        <a:srgbClr val="2A3A5C"/>
+                      </a:solidFill>
+                      <a:prstDash val="solid"/>
+                      <a:round/>
+                      <a:headEnd type="none" w="med" len="med"/>
+                      <a:tailEnd type="none" w="med" len="med"/>
+                    </a:lnB>
+                    <a:solidFill>
+                      <a:srgbClr val="1B2C4F"/>
+                    </a:solidFill>
+                  </a:tcPr>
+                </a:tc>
+                <a:tc>
+                  <a:txBody>
+                    <a:bodyPr/>
+                    <a:lstStyle/>
+                    <a:p>
+                      <a:pPr algn="l" indent="0" marL="0">
+                        <a:buNone/>
+                      </a:pPr>
+                      <a:r>
+                        <a:rPr lang="en-US" sz="1300" dirty="0">
+                          <a:solidFill>
+                            <a:srgbClr val="FFFFFF"/>
+                          </a:solidFill>
+                          <a:latin typeface="Calibri" pitchFamily="34" charset="0"/>
+                          <a:ea typeface="Calibri" pitchFamily="34" charset="-122"/>
+                          <a:cs typeface="Calibri" pitchFamily="34" charset="-120"/>
+                        </a:rPr>
+                        <a:t>MMI 1×2 多模干涉</a:t>
+                      </a:r>
+                      <a:endParaRPr lang="en-US" sz="1300" dirty="0">
+                        <a:latin typeface="Calibri" charset="0"/>
+                        <a:ea typeface="Calibri" charset="0"/>
+                        <a:cs typeface="Calibri" charset="0"/>
+                      </a:endParaRPr>
+                    </a:p>
+                  </a:txBody>
+                  <a:tcPr marL="91440" marR="91440" marT="45720" marB="45720" anchor="ctr">
+                    <a:lnL w="12700" cap="flat" cmpd="sng" algn="ctr">
+                      <a:solidFill>
+                        <a:srgbClr val="2A3A5C"/>
+                      </a:solidFill>
+                      <a:prstDash val="solid"/>
+                      <a:round/>
+                      <a:headEnd type="none" w="med" len="med"/>
+                      <a:tailEnd type="none" w="med" len="med"/>
+                    </a:lnL>
+                    <a:lnR w="12700" cap="flat" cmpd="sng" algn="ctr">
+                      <a:solidFill>
+                        <a:srgbClr val="2A3A5C"/>
+                      </a:solidFill>
+                      <a:prstDash val="solid"/>
+                      <a:round/>
+                      <a:headEnd type="none" w="med" len="med"/>
+                      <a:tailEnd type="none" w="med" len="med"/>
+                    </a:lnR>
+                    <a:lnT w="12700" cap="flat" cmpd="sng" algn="ctr">
+                      <a:solidFill>
+                        <a:srgbClr val="2A3A5C"/>
+                      </a:solidFill>
+                      <a:prstDash val="solid"/>
+                      <a:round/>
+                      <a:headEnd type="none" w="med" len="med"/>
+                      <a:tailEnd type="none" w="med" len="med"/>
+                    </a:lnT>
+                    <a:lnB w="12700" cap="flat" cmpd="sng" algn="ctr">
+                      <a:solidFill>
+                        <a:srgbClr val="2A3A5C"/>
+                      </a:solidFill>
+                      <a:prstDash val="solid"/>
+                      <a:round/>
+                      <a:headEnd type="none" w="med" len="med"/>
+                      <a:tailEnd type="none" w="med" len="med"/>
+                    </a:lnB>
+                    <a:solidFill>
+                      <a:srgbClr val="1B2C4F"/>
+                    </a:solidFill>
+                  </a:tcPr>
+                </a:tc>
+                <a:tc>
+                  <a:txBody>
+                    <a:bodyPr/>
+                    <a:lstStyle/>
+                    <a:p>
+                      <a:pPr algn="l" indent="0" marL="0">
+                        <a:buNone/>
+                      </a:pPr>
+                      <a:r>
+                        <a:rPr lang="en-US" sz="1300" dirty="0">
+                          <a:solidFill>
+                            <a:srgbClr val="FFFFFF"/>
+                          </a:solidFill>
+                          <a:latin typeface="Calibri" pitchFamily="34" charset="0"/>
+                          <a:ea typeface="Calibri" pitchFamily="34" charset="-122"/>
+                          <a:cs typeface="Calibri" pitchFamily="34" charset="-120"/>
+                        </a:rPr>
+                        <a:t>4</a:t>
+                      </a:r>
+                      <a:endParaRPr lang="en-US" sz="1300" dirty="0">
+                        <a:latin typeface="Calibri" charset="0"/>
+                        <a:ea typeface="Calibri" charset="0"/>
+                        <a:cs typeface="Calibri" charset="0"/>
+                      </a:endParaRPr>
+                    </a:p>
+                  </a:txBody>
+                  <a:tcPr marL="91440" marR="91440" marT="45720" marB="45720" anchor="ctr">
+                    <a:lnL w="12700" cap="flat" cmpd="sng" algn="ctr">
+                      <a:solidFill>
+                        <a:srgbClr val="2A3A5C"/>
+                      </a:solidFill>
+                      <a:prstDash val="solid"/>
+                      <a:round/>
+                      <a:headEnd type="none" w="med" len="med"/>
+                      <a:tailEnd type="none" w="med" len="med"/>
+                    </a:lnL>
+                    <a:lnR w="12700" cap="flat" cmpd="sng" algn="ctr">
+                      <a:solidFill>
+                        <a:srgbClr val="2A3A5C"/>
+                      </a:solidFill>
+                      <a:prstDash val="solid"/>
+                      <a:round/>
+                      <a:headEnd type="none" w="med" len="med"/>
+                      <a:tailEnd type="none" w="med" len="med"/>
+                    </a:lnR>
+                    <a:lnT w="12700" cap="flat" cmpd="sng" algn="ctr">
+                      <a:solidFill>
+                        <a:srgbClr val="2A3A5C"/>
+                      </a:solidFill>
+                      <a:prstDash val="solid"/>
+                      <a:round/>
+                      <a:headEnd type="none" w="med" len="med"/>
+                      <a:tailEnd type="none" w="med" len="med"/>
+                    </a:lnT>
+                    <a:lnB w="12700" cap="flat" cmpd="sng" algn="ctr">
+                      <a:solidFill>
+                        <a:srgbClr val="2A3A5C"/>
+                      </a:solidFill>
+                      <a:prstDash val="solid"/>
+                      <a:round/>
+                      <a:headEnd type="none" w="med" len="med"/>
+                      <a:tailEnd type="none" w="med" len="med"/>
+                    </a:lnB>
+                    <a:solidFill>
+                      <a:srgbClr val="1B2C4F"/>
+                    </a:solidFill>
+                  </a:tcPr>
+                </a:tc>
+                <a:tc>
+                  <a:txBody>
+                    <a:bodyPr/>
+                    <a:lstStyle/>
+                    <a:p>
+                      <a:pPr algn="l" indent="0" marL="0">
+                        <a:buNone/>
+                      </a:pPr>
+                      <a:r>
+                        <a:rPr lang="en-US" sz="1300" dirty="0">
+                          <a:solidFill>
+                            <a:srgbClr val="FFFFFF"/>
+                          </a:solidFill>
+                          <a:latin typeface="Calibri" pitchFamily="34" charset="0"/>
+                          <a:ea typeface="Calibri" pitchFamily="34" charset="-122"/>
+                          <a:cs typeface="Calibri" pitchFamily="34" charset="-120"/>
+                        </a:rPr>
+                        <a:t>5.4 KB</a:t>
+                      </a:r>
+                      <a:endParaRPr lang="en-US" sz="1300" dirty="0">
+                        <a:latin typeface="Calibri" charset="0"/>
+                        <a:ea typeface="Calibri" charset="0"/>
+                        <a:cs typeface="Calibri" charset="0"/>
+                      </a:endParaRPr>
+                    </a:p>
+                  </a:txBody>
+                  <a:tcPr marL="91440" marR="91440" marT="45720" marB="45720" anchor="ctr">
+                    <a:lnL w="12700" cap="flat" cmpd="sng" algn="ctr">
+                      <a:solidFill>
+                        <a:srgbClr val="2A3A5C"/>
+                      </a:solidFill>
+                      <a:prstDash val="solid"/>
+                      <a:round/>
+                      <a:headEnd type="none" w="med" len="med"/>
+                      <a:tailEnd type="none" w="med" len="med"/>
+                    </a:lnL>
+                    <a:lnR w="12700" cap="flat" cmpd="sng" algn="ctr">
+                      <a:solidFill>
+                        <a:srgbClr val="2A3A5C"/>
+                      </a:solidFill>
+                      <a:prstDash val="solid"/>
+                      <a:round/>
+                      <a:headEnd type="none" w="med" len="med"/>
+                      <a:tailEnd type="none" w="med" len="med"/>
+                    </a:lnR>
+                    <a:lnT w="12700" cap="flat" cmpd="sng" algn="ctr">
+                      <a:solidFill>
+                        <a:srgbClr val="2A3A5C"/>
+                      </a:solidFill>
+                      <a:prstDash val="solid"/>
+                      <a:round/>
+                      <a:headEnd type="none" w="med" len="med"/>
+                      <a:tailEnd type="none" w="med" len="med"/>
+                    </a:lnT>
+                    <a:lnB w="12700" cap="flat" cmpd="sng" algn="ctr">
+                      <a:solidFill>
+                        <a:srgbClr val="2A3A5C"/>
+                      </a:solidFill>
+                      <a:prstDash val="solid"/>
+                      <a:round/>
+                      <a:headEnd type="none" w="med" len="med"/>
+                      <a:tailEnd type="none" w="med" len="med"/>
+                    </a:lnB>
+                    <a:solidFill>
+                      <a:srgbClr val="1B2C4F"/>
+                    </a:solidFill>
+                  </a:tcPr>
+                </a:tc>
+                <a:tc>
+                  <a:txBody>
+                    <a:bodyPr/>
+                    <a:lstStyle/>
+                    <a:p>
+                      <a:pPr algn="l" indent="0" marL="0">
+                        <a:buNone/>
+                      </a:pPr>
+                      <a:r>
+                        <a:rPr lang="en-US" sz="1300" dirty="0">
+                          <a:solidFill>
+                            <a:srgbClr val="FFFFFF"/>
+                          </a:solidFill>
+                          <a:latin typeface="Calibri" pitchFamily="34" charset="0"/>
+                          <a:ea typeface="Calibri" pitchFamily="34" charset="-122"/>
+                          <a:cs typeface="Calibri" pitchFamily="34" charset="-120"/>
+                        </a:rPr>
+                        <a:t>DRC·LVS 全绿</a:t>
+                      </a:r>
+                      <a:endParaRPr lang="en-US" sz="1300" dirty="0">
+                        <a:latin typeface="Calibri" charset="0"/>
+                        <a:ea typeface="Calibri" charset="0"/>
+                        <a:cs typeface="Calibri" charset="0"/>
+                      </a:endParaRPr>
+                    </a:p>
+                  </a:txBody>
+                  <a:tcPr marL="91440" marR="91440" marT="45720" marB="45720" anchor="ctr">
+                    <a:lnL w="12700" cap="flat" cmpd="sng" algn="ctr">
+                      <a:solidFill>
+                        <a:srgbClr val="2A3A5C"/>
+                      </a:solidFill>
+                      <a:prstDash val="solid"/>
+                      <a:round/>
+                      <a:headEnd type="none" w="med" len="med"/>
+                      <a:tailEnd type="none" w="med" len="med"/>
+                    </a:lnL>
+                    <a:lnR w="12700" cap="flat" cmpd="sng" algn="ctr">
+                      <a:solidFill>
+                        <a:srgbClr val="2A3A5C"/>
+                      </a:solidFill>
+                      <a:prstDash val="solid"/>
+                      <a:round/>
+                      <a:headEnd type="none" w="med" len="med"/>
+                      <a:tailEnd type="none" w="med" len="med"/>
+                    </a:lnR>
+                    <a:lnT w="12700" cap="flat" cmpd="sng" algn="ctr">
+                      <a:solidFill>
+                        <a:srgbClr val="2A3A5C"/>
+                      </a:solidFill>
+                      <a:prstDash val="solid"/>
+                      <a:round/>
+                      <a:headEnd type="none" w="med" len="med"/>
+                      <a:tailEnd type="none" w="med" len="med"/>
+                    </a:lnT>
+                    <a:lnB w="12700" cap="flat" cmpd="sng" algn="ctr">
+                      <a:solidFill>
+                        <a:srgbClr val="2A3A5C"/>
+                      </a:solidFill>
+                      <a:prstDash val="solid"/>
+                      <a:round/>
+                      <a:headEnd type="none" w="med" len="med"/>
+                      <a:tailEnd type="none" w="med" len="med"/>
+                    </a:lnB>
+                    <a:solidFill>
+                      <a:srgbClr val="1B2C4F"/>
+                    </a:solidFill>
+                  </a:tcPr>
+                </a:tc>
+              </a:tr>
+              <a:tr h="365760">
+                <a:tc>
+                  <a:txBody>
+                    <a:bodyPr/>
+                    <a:lstStyle/>
+                    <a:p>
+                      <a:pPr algn="l" indent="0" marL="0">
+                        <a:buNone/>
+                      </a:pPr>
+                      <a:r>
+                        <a:rPr lang="en-US" sz="1300" dirty="0">
+                          <a:solidFill>
+                            <a:srgbClr val="FFFFFF"/>
+                          </a:solidFill>
+                          <a:latin typeface="Calibri" pitchFamily="34" charset="0"/>
+                          <a:ea typeface="Calibri" pitchFamily="34" charset="-122"/>
+                          <a:cs typeface="Calibri" pitchFamily="34" charset="-120"/>
+                        </a:rPr>
+                        <a:t>C5</a:t>
+                      </a:r>
+                      <a:endParaRPr lang="en-US" sz="1300" dirty="0">
+                        <a:latin typeface="Calibri" charset="0"/>
+                        <a:ea typeface="Calibri" charset="0"/>
+                        <a:cs typeface="Calibri" charset="0"/>
+                      </a:endParaRPr>
+                    </a:p>
+                  </a:txBody>
+                  <a:tcPr marL="91440" marR="91440" marT="45720" marB="45720" anchor="ctr">
+                    <a:lnL w="12700" cap="flat" cmpd="sng" algn="ctr">
+                      <a:solidFill>
+                        <a:srgbClr val="2A3A5C"/>
+                      </a:solidFill>
+                      <a:prstDash val="solid"/>
+                      <a:round/>
+                      <a:headEnd type="none" w="med" len="med"/>
+                      <a:tailEnd type="none" w="med" len="med"/>
+                    </a:lnL>
+                    <a:lnR w="12700" cap="flat" cmpd="sng" algn="ctr">
+                      <a:solidFill>
+                        <a:srgbClr val="2A3A5C"/>
+                      </a:solidFill>
+                      <a:prstDash val="solid"/>
+                      <a:round/>
+                      <a:headEnd type="none" w="med" len="med"/>
+                      <a:tailEnd type="none" w="med" len="med"/>
+                    </a:lnR>
+                    <a:lnT w="12700" cap="flat" cmpd="sng" algn="ctr">
+                      <a:solidFill>
+                        <a:srgbClr val="2A3A5C"/>
+                      </a:solidFill>
+                      <a:prstDash val="solid"/>
+                      <a:round/>
+                      <a:headEnd type="none" w="med" len="med"/>
+                      <a:tailEnd type="none" w="med" len="med"/>
+                    </a:lnT>
+                    <a:lnB w="12700" cap="flat" cmpd="sng" algn="ctr">
+                      <a:solidFill>
+                        <a:srgbClr val="2A3A5C"/>
+                      </a:solidFill>
+                      <a:prstDash val="solid"/>
+                      <a:round/>
+                      <a:headEnd type="none" w="med" len="med"/>
+                      <a:tailEnd type="none" w="med" len="med"/>
+                    </a:lnB>
+                    <a:solidFill>
+                      <a:srgbClr val="1B2C4F"/>
+                    </a:solidFill>
+                  </a:tcPr>
+                </a:tc>
+                <a:tc>
+                  <a:txBody>
+                    <a:bodyPr/>
+                    <a:lstStyle/>
+                    <a:p>
+                      <a:pPr algn="l" indent="0" marL="0">
+                        <a:buNone/>
+                      </a:pPr>
+                      <a:r>
+                        <a:rPr lang="en-US" sz="1300" dirty="0">
+                          <a:solidFill>
+                            <a:srgbClr val="FFFFFF"/>
+                          </a:solidFill>
+                          <a:latin typeface="Calibri" pitchFamily="34" charset="0"/>
+                          <a:ea typeface="Calibri" pitchFamily="34" charset="-122"/>
+                          <a:cs typeface="Calibri" pitchFamily="34" charset="-120"/>
+                        </a:rPr>
+                        <a:t>对称 Y 分支 1×2</a:t>
+                      </a:r>
+                      <a:endParaRPr lang="en-US" sz="1300" dirty="0">
+                        <a:latin typeface="Calibri" charset="0"/>
+                        <a:ea typeface="Calibri" charset="0"/>
+                        <a:cs typeface="Calibri" charset="0"/>
+                      </a:endParaRPr>
+                    </a:p>
+                  </a:txBody>
+                  <a:tcPr marL="91440" marR="91440" marT="45720" marB="45720" anchor="ctr">
+                    <a:lnL w="12700" cap="flat" cmpd="sng" algn="ctr">
+                      <a:solidFill>
+                        <a:srgbClr val="2A3A5C"/>
+                      </a:solidFill>
+                      <a:prstDash val="solid"/>
+                      <a:round/>
+                      <a:headEnd type="none" w="med" len="med"/>
+                      <a:tailEnd type="none" w="med" len="med"/>
+                    </a:lnL>
+                    <a:lnR w="12700" cap="flat" cmpd="sng" algn="ctr">
+                      <a:solidFill>
+                        <a:srgbClr val="2A3A5C"/>
+                      </a:solidFill>
+                      <a:prstDash val="solid"/>
+                      <a:round/>
+                      <a:headEnd type="none" w="med" len="med"/>
+                      <a:tailEnd type="none" w="med" len="med"/>
+                    </a:lnR>
+                    <a:lnT w="12700" cap="flat" cmpd="sng" algn="ctr">
+                      <a:solidFill>
+                        <a:srgbClr val="2A3A5C"/>
+                      </a:solidFill>
+                      <a:prstDash val="solid"/>
+                      <a:round/>
+                      <a:headEnd type="none" w="med" len="med"/>
+                      <a:tailEnd type="none" w="med" len="med"/>
+                    </a:lnT>
+                    <a:lnB w="12700" cap="flat" cmpd="sng" algn="ctr">
+                      <a:solidFill>
+                        <a:srgbClr val="2A3A5C"/>
+                      </a:solidFill>
+                      <a:prstDash val="solid"/>
+                      <a:round/>
+                      <a:headEnd type="none" w="med" len="med"/>
+                      <a:tailEnd type="none" w="med" len="med"/>
+                    </a:lnB>
+                    <a:solidFill>
+                      <a:srgbClr val="1B2C4F"/>
+                    </a:solidFill>
+                  </a:tcPr>
+                </a:tc>
+                <a:tc>
+                  <a:txBody>
+                    <a:bodyPr/>
+                    <a:lstStyle/>
+                    <a:p>
+                      <a:pPr algn="l" indent="0" marL="0">
+                        <a:buNone/>
+                      </a:pPr>
+                      <a:r>
+                        <a:rPr lang="en-US" sz="1300" dirty="0">
+                          <a:solidFill>
+                            <a:srgbClr val="FFFFFF"/>
+                          </a:solidFill>
+                          <a:latin typeface="Calibri" pitchFamily="34" charset="0"/>
+                          <a:ea typeface="Calibri" pitchFamily="34" charset="-122"/>
+                          <a:cs typeface="Calibri" pitchFamily="34" charset="-120"/>
+                        </a:rPr>
+                        <a:t>4</a:t>
+                      </a:r>
+                      <a:endParaRPr lang="en-US" sz="1300" dirty="0">
+                        <a:latin typeface="Calibri" charset="0"/>
+                        <a:ea typeface="Calibri" charset="0"/>
+                        <a:cs typeface="Calibri" charset="0"/>
+                      </a:endParaRPr>
+                    </a:p>
+                  </a:txBody>
+                  <a:tcPr marL="91440" marR="91440" marT="45720" marB="45720" anchor="ctr">
+                    <a:lnL w="12700" cap="flat" cmpd="sng" algn="ctr">
+                      <a:solidFill>
+                        <a:srgbClr val="2A3A5C"/>
+                      </a:solidFill>
+                      <a:prstDash val="solid"/>
+                      <a:round/>
+                      <a:headEnd type="none" w="med" len="med"/>
+                      <a:tailEnd type="none" w="med" len="med"/>
+                    </a:lnL>
+                    <a:lnR w="12700" cap="flat" cmpd="sng" algn="ctr">
+                      <a:solidFill>
+                        <a:srgbClr val="2A3A5C"/>
+                      </a:solidFill>
+                      <a:prstDash val="solid"/>
+                      <a:round/>
+                      <a:headEnd type="none" w="med" len="med"/>
+                      <a:tailEnd type="none" w="med" len="med"/>
+                    </a:lnR>
+                    <a:lnT w="12700" cap="flat" cmpd="sng" algn="ctr">
+                      <a:solidFill>
+                        <a:srgbClr val="2A3A5C"/>
+                      </a:solidFill>
+                      <a:prstDash val="solid"/>
+                      <a:round/>
+                      <a:headEnd type="none" w="med" len="med"/>
+                      <a:tailEnd type="none" w="med" len="med"/>
+                    </a:lnT>
+                    <a:lnB w="12700" cap="flat" cmpd="sng" algn="ctr">
+                      <a:solidFill>
+                        <a:srgbClr val="2A3A5C"/>
+                      </a:solidFill>
+                      <a:prstDash val="solid"/>
+                      <a:round/>
+                      <a:headEnd type="none" w="med" len="med"/>
+                      <a:tailEnd type="none" w="med" len="med"/>
+                    </a:lnB>
+                    <a:solidFill>
+                      <a:srgbClr val="1B2C4F"/>
+                    </a:solidFill>
+                  </a:tcPr>
+                </a:tc>
+                <a:tc>
+                  <a:txBody>
+                    <a:bodyPr/>
+                    <a:lstStyle/>
+                    <a:p>
+                      <a:pPr algn="l" indent="0" marL="0">
+                        <a:buNone/>
+                      </a:pPr>
+                      <a:r>
+                        <a:rPr lang="en-US" sz="1300" dirty="0">
+                          <a:solidFill>
+                            <a:srgbClr val="FFFFFF"/>
+                          </a:solidFill>
+                          <a:latin typeface="Calibri" pitchFamily="34" charset="0"/>
+                          <a:ea typeface="Calibri" pitchFamily="34" charset="-122"/>
+                          <a:cs typeface="Calibri" pitchFamily="34" charset="-120"/>
+                        </a:rPr>
+                        <a:t>4.2 KB</a:t>
+                      </a:r>
+                      <a:endParaRPr lang="en-US" sz="1300" dirty="0">
+                        <a:latin typeface="Calibri" charset="0"/>
+                        <a:ea typeface="Calibri" charset="0"/>
+                        <a:cs typeface="Calibri" charset="0"/>
+                      </a:endParaRPr>
+                    </a:p>
+                  </a:txBody>
+                  <a:tcPr marL="91440" marR="91440" marT="45720" marB="45720" anchor="ctr">
+                    <a:lnL w="12700" cap="flat" cmpd="sng" algn="ctr">
+                      <a:solidFill>
+                        <a:srgbClr val="2A3A5C"/>
+                      </a:solidFill>
+                      <a:prstDash val="solid"/>
+                      <a:round/>
+                      <a:headEnd type="none" w="med" len="med"/>
+                      <a:tailEnd type="none" w="med" len="med"/>
+                    </a:lnL>
+                    <a:lnR w="12700" cap="flat" cmpd="sng" algn="ctr">
+                      <a:solidFill>
+                        <a:srgbClr val="2A3A5C"/>
+                      </a:solidFill>
+                      <a:prstDash val="solid"/>
+                      <a:round/>
+                      <a:headEnd type="none" w="med" len="med"/>
+                      <a:tailEnd type="none" w="med" len="med"/>
+                    </a:lnR>
+                    <a:lnT w="12700" cap="flat" cmpd="sng" algn="ctr">
+                      <a:solidFill>
+                        <a:srgbClr val="2A3A5C"/>
+                      </a:solidFill>
+                      <a:prstDash val="solid"/>
+                      <a:round/>
+                      <a:headEnd type="none" w="med" len="med"/>
+                      <a:tailEnd type="none" w="med" len="med"/>
+                    </a:lnT>
+                    <a:lnB w="12700" cap="flat" cmpd="sng" algn="ctr">
+                      <a:solidFill>
+                        <a:srgbClr val="2A3A5C"/>
+                      </a:solidFill>
+                      <a:prstDash val="solid"/>
+                      <a:round/>
+                      <a:headEnd type="none" w="med" len="med"/>
+                      <a:tailEnd type="none" w="med" len="med"/>
+                    </a:lnB>
+                    <a:solidFill>
+                      <a:srgbClr val="1B2C4F"/>
+                    </a:solidFill>
+                  </a:tcPr>
+                </a:tc>
+                <a:tc>
+                  <a:txBody>
+                    <a:bodyPr/>
+                    <a:lstStyle/>
+                    <a:p>
+                      <a:pPr algn="l" indent="0" marL="0">
+                        <a:buNone/>
+                      </a:pPr>
+                      <a:r>
+                        <a:rPr lang="en-US" sz="1300" dirty="0">
+                          <a:solidFill>
+                            <a:srgbClr val="FFFFFF"/>
+                          </a:solidFill>
+                          <a:latin typeface="Calibri" pitchFamily="34" charset="0"/>
+                          <a:ea typeface="Calibri" pitchFamily="34" charset="-122"/>
+                          <a:cs typeface="Calibri" pitchFamily="34" charset="-120"/>
+                        </a:rPr>
+                        <a:t>DRC·LVS 全绿</a:t>
+                      </a:r>
+                      <a:endParaRPr lang="en-US" sz="1300" dirty="0">
+                        <a:latin typeface="Calibri" charset="0"/>
+                        <a:ea typeface="Calibri" charset="0"/>
+                        <a:cs typeface="Calibri" charset="0"/>
+                      </a:endParaRPr>
+                    </a:p>
+                  </a:txBody>
+                  <a:tcPr marL="91440" marR="91440" marT="45720" marB="45720" anchor="ctr">
+                    <a:lnL w="12700" cap="flat" cmpd="sng" algn="ctr">
+                      <a:solidFill>
+                        <a:srgbClr val="2A3A5C"/>
+                      </a:solidFill>
+                      <a:prstDash val="solid"/>
+                      <a:round/>
+                      <a:headEnd type="none" w="med" len="med"/>
+                      <a:tailEnd type="none" w="med" len="med"/>
+                    </a:lnL>
+                    <a:lnR w="12700" cap="flat" cmpd="sng" algn="ctr">
+                      <a:solidFill>
+                        <a:srgbClr val="2A3A5C"/>
+                      </a:solidFill>
+                      <a:prstDash val="solid"/>
+                      <a:round/>
+                      <a:headEnd type="none" w="med" len="med"/>
+                      <a:tailEnd type="none" w="med" len="med"/>
+                    </a:lnR>
+                    <a:lnT w="12700" cap="flat" cmpd="sng" algn="ctr">
+                      <a:solidFill>
+                        <a:srgbClr val="2A3A5C"/>
+                      </a:solidFill>
+                      <a:prstDash val="solid"/>
+                      <a:round/>
+                      <a:headEnd type="none" w="med" len="med"/>
+                      <a:tailEnd type="none" w="med" len="med"/>
+                    </a:lnT>
+                    <a:lnB w="12700" cap="flat" cmpd="sng" algn="ctr">
+                      <a:solidFill>
+                        <a:srgbClr val="2A3A5C"/>
+                      </a:solidFill>
+                      <a:prstDash val="solid"/>
+                      <a:round/>
+                      <a:headEnd type="none" w="med" len="med"/>
+                      <a:tailEnd type="none" w="med" len="med"/>
+                    </a:lnB>
+                    <a:solidFill>
+                      <a:srgbClr val="1B2C4F"/>
+                    </a:solidFill>
+                  </a:tcPr>
+                </a:tc>
+              </a:tr>
+              <a:tr h="365760">
+                <a:tc>
+                  <a:txBody>
+                    <a:bodyPr/>
+                    <a:lstStyle/>
+                    <a:p>
+                      <a:pPr algn="l" indent="0" marL="0">
+                        <a:buNone/>
+                      </a:pPr>
+                      <a:r>
+                        <a:rPr lang="en-US" sz="1300" dirty="0">
+                          <a:solidFill>
+                            <a:srgbClr val="FFFFFF"/>
+                          </a:solidFill>
+                          <a:latin typeface="Calibri" pitchFamily="34" charset="0"/>
+                          <a:ea typeface="Calibri" pitchFamily="34" charset="-122"/>
+                          <a:cs typeface="Calibri" pitchFamily="34" charset="-120"/>
+                        </a:rPr>
+                        <a:t>C6</a:t>
+                      </a:r>
+                      <a:endParaRPr lang="en-US" sz="1300" dirty="0">
+                        <a:latin typeface="Calibri" charset="0"/>
+                        <a:ea typeface="Calibri" charset="0"/>
+                        <a:cs typeface="Calibri" charset="0"/>
+                      </a:endParaRPr>
+                    </a:p>
+                  </a:txBody>
+                  <a:tcPr marL="91440" marR="91440" marT="45720" marB="45720" anchor="ctr">
+                    <a:lnL w="12700" cap="flat" cmpd="sng" algn="ctr">
+                      <a:solidFill>
+                        <a:srgbClr val="2A3A5C"/>
+                      </a:solidFill>
+                      <a:prstDash val="solid"/>
+                      <a:round/>
+                      <a:headEnd type="none" w="med" len="med"/>
+                      <a:tailEnd type="none" w="med" len="med"/>
+                    </a:lnL>
+                    <a:lnR w="12700" cap="flat" cmpd="sng" algn="ctr">
+                      <a:solidFill>
+                        <a:srgbClr val="2A3A5C"/>
+                      </a:solidFill>
+                      <a:prstDash val="solid"/>
+                      <a:round/>
+                      <a:headEnd type="none" w="med" len="med"/>
+                      <a:tailEnd type="none" w="med" len="med"/>
+                    </a:lnR>
+                    <a:lnT w="12700" cap="flat" cmpd="sng" algn="ctr">
+                      <a:solidFill>
+                        <a:srgbClr val="2A3A5C"/>
+                      </a:solidFill>
+                      <a:prstDash val="solid"/>
+                      <a:round/>
+                      <a:headEnd type="none" w="med" len="med"/>
+                      <a:tailEnd type="none" w="med" len="med"/>
+                    </a:lnT>
+                    <a:lnB w="12700" cap="flat" cmpd="sng" algn="ctr">
+                      <a:solidFill>
+                        <a:srgbClr val="2A3A5C"/>
+                      </a:solidFill>
+                      <a:prstDash val="solid"/>
+                      <a:round/>
+                      <a:headEnd type="none" w="med" len="med"/>
+                      <a:tailEnd type="none" w="med" len="med"/>
+                    </a:lnB>
+                    <a:solidFill>
+                      <a:srgbClr val="1B2C4F"/>
+                    </a:solidFill>
+                  </a:tcPr>
+                </a:tc>
+                <a:tc>
+                  <a:txBody>
+                    <a:bodyPr/>
+                    <a:lstStyle/>
+                    <a:p>
+                      <a:pPr algn="l" indent="0" marL="0">
+                        <a:buNone/>
+                      </a:pPr>
+                      <a:r>
+                        <a:rPr lang="en-US" sz="1300" dirty="0">
+                          <a:solidFill>
+                            <a:srgbClr val="FFFFFF"/>
+                          </a:solidFill>
+                          <a:latin typeface="Calibri" pitchFamily="34" charset="0"/>
+                          <a:ea typeface="Calibri" pitchFamily="34" charset="-122"/>
+                          <a:cs typeface="Calibri" pitchFamily="34" charset="-120"/>
+                        </a:rPr>
+                        <a:t>Mach-Zehnder 干涉仪 2×2</a:t>
+                      </a:r>
+                      <a:endParaRPr lang="en-US" sz="1300" dirty="0">
+                        <a:latin typeface="Calibri" charset="0"/>
+                        <a:ea typeface="Calibri" charset="0"/>
+                        <a:cs typeface="Calibri" charset="0"/>
+                      </a:endParaRPr>
+                    </a:p>
+                  </a:txBody>
+                  <a:tcPr marL="91440" marR="91440" marT="45720" marB="45720" anchor="ctr">
+                    <a:lnL w="12700" cap="flat" cmpd="sng" algn="ctr">
+                      <a:solidFill>
+                        <a:srgbClr val="2A3A5C"/>
+                      </a:solidFill>
+                      <a:prstDash val="solid"/>
+                      <a:round/>
+                      <a:headEnd type="none" w="med" len="med"/>
+                      <a:tailEnd type="none" w="med" len="med"/>
+                    </a:lnL>
+                    <a:lnR w="12700" cap="flat" cmpd="sng" algn="ctr">
+                      <a:solidFill>
+                        <a:srgbClr val="2A3A5C"/>
+                      </a:solidFill>
+                      <a:prstDash val="solid"/>
+                      <a:round/>
+                      <a:headEnd type="none" w="med" len="med"/>
+                      <a:tailEnd type="none" w="med" len="med"/>
+                    </a:lnR>
+                    <a:lnT w="12700" cap="flat" cmpd="sng" algn="ctr">
+                      <a:solidFill>
+                        <a:srgbClr val="2A3A5C"/>
+                      </a:solidFill>
+                      <a:prstDash val="solid"/>
+                      <a:round/>
+                      <a:headEnd type="none" w="med" len="med"/>
+                      <a:tailEnd type="none" w="med" len="med"/>
+                    </a:lnT>
+                    <a:lnB w="12700" cap="flat" cmpd="sng" algn="ctr">
+                      <a:solidFill>
+                        <a:srgbClr val="2A3A5C"/>
+                      </a:solidFill>
+                      <a:prstDash val="solid"/>
+                      <a:round/>
+                      <a:headEnd type="none" w="med" len="med"/>
+                      <a:tailEnd type="none" w="med" len="med"/>
+                    </a:lnB>
+                    <a:solidFill>
+                      <a:srgbClr val="1B2C4F"/>
+                    </a:solidFill>
+                  </a:tcPr>
+                </a:tc>
+                <a:tc>
+                  <a:txBody>
+                    <a:bodyPr/>
+                    <a:lstStyle/>
+                    <a:p>
+                      <a:pPr algn="l" indent="0" marL="0">
+                        <a:buNone/>
+                      </a:pPr>
+                      <a:r>
+                        <a:rPr lang="en-US" sz="1300" dirty="0">
+                          <a:solidFill>
+                            <a:srgbClr val="FFFFFF"/>
+                          </a:solidFill>
+                          <a:latin typeface="Calibri" pitchFamily="34" charset="0"/>
+                          <a:ea typeface="Calibri" pitchFamily="34" charset="-122"/>
+                          <a:cs typeface="Calibri" pitchFamily="34" charset="-120"/>
+                        </a:rPr>
+                        <a:t>7</a:t>
+                      </a:r>
+                      <a:endParaRPr lang="en-US" sz="1300" dirty="0">
+                        <a:latin typeface="Calibri" charset="0"/>
+                        <a:ea typeface="Calibri" charset="0"/>
+                        <a:cs typeface="Calibri" charset="0"/>
+                      </a:endParaRPr>
+                    </a:p>
+                  </a:txBody>
+                  <a:tcPr marL="91440" marR="91440" marT="45720" marB="45720" anchor="ctr">
+                    <a:lnL w="12700" cap="flat" cmpd="sng" algn="ctr">
+                      <a:solidFill>
+                        <a:srgbClr val="2A3A5C"/>
+                      </a:solidFill>
+                      <a:prstDash val="solid"/>
+                      <a:round/>
+                      <a:headEnd type="none" w="med" len="med"/>
+                      <a:tailEnd type="none" w="med" len="med"/>
+                    </a:lnL>
+                    <a:lnR w="12700" cap="flat" cmpd="sng" algn="ctr">
+                      <a:solidFill>
+                        <a:srgbClr val="2A3A5C"/>
+                      </a:solidFill>
+                      <a:prstDash val="solid"/>
+                      <a:round/>
+                      <a:headEnd type="none" w="med" len="med"/>
+                      <a:tailEnd type="none" w="med" len="med"/>
+                    </a:lnR>
+                    <a:lnT w="12700" cap="flat" cmpd="sng" algn="ctr">
+                      <a:solidFill>
+                        <a:srgbClr val="2A3A5C"/>
+                      </a:solidFill>
+                      <a:prstDash val="solid"/>
+                      <a:round/>
+                      <a:headEnd type="none" w="med" len="med"/>
+                      <a:tailEnd type="none" w="med" len="med"/>
+                    </a:lnT>
+                    <a:lnB w="12700" cap="flat" cmpd="sng" algn="ctr">
+                      <a:solidFill>
+                        <a:srgbClr val="2A3A5C"/>
+                      </a:solidFill>
+                      <a:prstDash val="solid"/>
+                      <a:round/>
+                      <a:headEnd type="none" w="med" len="med"/>
+                      <a:tailEnd type="none" w="med" len="med"/>
+                    </a:lnB>
+                    <a:solidFill>
+                      <a:srgbClr val="1B2C4F"/>
+                    </a:solidFill>
+                  </a:tcPr>
+                </a:tc>
+                <a:tc>
+                  <a:txBody>
+                    <a:bodyPr/>
+                    <a:lstStyle/>
+                    <a:p>
+                      <a:pPr algn="l" indent="0" marL="0">
+                        <a:buNone/>
+                      </a:pPr>
+                      <a:r>
+                        <a:rPr lang="en-US" sz="1300" dirty="0">
+                          <a:solidFill>
+                            <a:srgbClr val="FFFFFF"/>
+                          </a:solidFill>
+                          <a:latin typeface="Calibri" pitchFamily="34" charset="0"/>
+                          <a:ea typeface="Calibri" pitchFamily="34" charset="-122"/>
+                          <a:cs typeface="Calibri" pitchFamily="34" charset="-120"/>
+                        </a:rPr>
+                        <a:t>3.9 KB</a:t>
+                      </a:r>
+                      <a:endParaRPr lang="en-US" sz="1300" dirty="0">
+                        <a:latin typeface="Calibri" charset="0"/>
+                        <a:ea typeface="Calibri" charset="0"/>
+                        <a:cs typeface="Calibri" charset="0"/>
+                      </a:endParaRPr>
+                    </a:p>
+                  </a:txBody>
+                  <a:tcPr marL="91440" marR="91440" marT="45720" marB="45720" anchor="ctr">
+                    <a:lnL w="12700" cap="flat" cmpd="sng" algn="ctr">
+                      <a:solidFill>
+                        <a:srgbClr val="2A3A5C"/>
+                      </a:solidFill>
+                      <a:prstDash val="solid"/>
+                      <a:round/>
+                      <a:headEnd type="none" w="med" len="med"/>
+                      <a:tailEnd type="none" w="med" len="med"/>
+                    </a:lnL>
+                    <a:lnR w="12700" cap="flat" cmpd="sng" algn="ctr">
+                      <a:solidFill>
+                        <a:srgbClr val="2A3A5C"/>
+                      </a:solidFill>
+                      <a:prstDash val="solid"/>
+                      <a:round/>
+                      <a:headEnd type="none" w="med" len="med"/>
+                      <a:tailEnd type="none" w="med" len="med"/>
+                    </a:lnR>
+                    <a:lnT w="12700" cap="flat" cmpd="sng" algn="ctr">
+                      <a:solidFill>
+                        <a:srgbClr val="2A3A5C"/>
+                      </a:solidFill>
+                      <a:prstDash val="solid"/>
+                      <a:round/>
+                      <a:headEnd type="none" w="med" len="med"/>
+                      <a:tailEnd type="none" w="med" len="med"/>
+                    </a:lnT>
+                    <a:lnB w="12700" cap="flat" cmpd="sng" algn="ctr">
+                      <a:solidFill>
+                        <a:srgbClr val="2A3A5C"/>
+                      </a:solidFill>
+                      <a:prstDash val="solid"/>
+                      <a:round/>
+                      <a:headEnd type="none" w="med" len="med"/>
+                      <a:tailEnd type="none" w="med" len="med"/>
+                    </a:lnB>
+                    <a:solidFill>
+                      <a:srgbClr val="1B2C4F"/>
+                    </a:solidFill>
+                  </a:tcPr>
+                </a:tc>
+                <a:tc>
+                  <a:txBody>
+                    <a:bodyPr/>
+                    <a:lstStyle/>
+                    <a:p>
+                      <a:pPr algn="l" indent="0" marL="0">
+                        <a:buNone/>
+                      </a:pPr>
+                      <a:r>
+                        <a:rPr lang="en-US" sz="1300" dirty="0">
+                          <a:solidFill>
+                            <a:srgbClr val="FFFFFF"/>
+                          </a:solidFill>
+                          <a:latin typeface="Calibri" pitchFamily="34" charset="0"/>
+                          <a:ea typeface="Calibri" pitchFamily="34" charset="-122"/>
+                          <a:cs typeface="Calibri" pitchFamily="34" charset="-120"/>
+                        </a:rPr>
+                        <a:t>DRC·LVS 全绿</a:t>
+                      </a:r>
+                      <a:endParaRPr lang="en-US" sz="1300" dirty="0">
+                        <a:latin typeface="Calibri" charset="0"/>
+                        <a:ea typeface="Calibri" charset="0"/>
+                        <a:cs typeface="Calibri" charset="0"/>
+                      </a:endParaRPr>
+                    </a:p>
+                  </a:txBody>
+                  <a:tcPr marL="91440" marR="91440" marT="45720" marB="45720" anchor="ctr">
+                    <a:lnL w="12700" cap="flat" cmpd="sng" algn="ctr">
+                      <a:solidFill>
+                        <a:srgbClr val="2A3A5C"/>
+                      </a:solidFill>
+                      <a:prstDash val="solid"/>
+                      <a:round/>
+                      <a:headEnd type="none" w="med" len="med"/>
+                      <a:tailEnd type="none" w="med" len="med"/>
+                    </a:lnL>
+                    <a:lnR w="12700" cap="flat" cmpd="sng" algn="ctr">
+                      <a:solidFill>
+                        <a:srgbClr val="2A3A5C"/>
+                      </a:solidFill>
+                      <a:prstDash val="solid"/>
+                      <a:round/>
+                      <a:headEnd type="none" w="med" len="med"/>
+                      <a:tailEnd type="none" w="med" len="med"/>
+                    </a:lnR>
+                    <a:lnT w="12700" cap="flat" cmpd="sng" algn="ctr">
+                      <a:solidFill>
+                        <a:srgbClr val="2A3A5C"/>
+                      </a:solidFill>
+                      <a:prstDash val="solid"/>
+                      <a:round/>
+                      <a:headEnd type="none" w="med" len="med"/>
+                      <a:tailEnd type="none" w="med" len="med"/>
+                    </a:lnT>
+                    <a:lnB w="12700" cap="flat" cmpd="sng" algn="ctr">
+                      <a:solidFill>
+                        <a:srgbClr val="2A3A5C"/>
+                      </a:solidFill>
+                      <a:prstDash val="solid"/>
+                      <a:round/>
+                      <a:headEnd type="none" w="med" len="med"/>
+                      <a:tailEnd type="none" w="med" len="med"/>
+                    </a:lnB>
+                    <a:solidFill>
+                      <a:srgbClr val="1B2C4F"/>
+                    </a:solidFill>
+                  </a:tcPr>
+                </a:tc>
+              </a:tr>
+              <a:tr h="365760">
+                <a:tc>
+                  <a:txBody>
+                    <a:bodyPr/>
+                    <a:lstStyle/>
+                    <a:p>
+                      <a:pPr algn="l" indent="0" marL="0">
+                        <a:buNone/>
+                      </a:pPr>
+                      <a:r>
+                        <a:rPr lang="en-US" sz="1300" dirty="0">
+                          <a:solidFill>
+                            <a:srgbClr val="FFFFFF"/>
+                          </a:solidFill>
+                          <a:latin typeface="Calibri" pitchFamily="34" charset="0"/>
+                          <a:ea typeface="Calibri" pitchFamily="34" charset="-122"/>
+                          <a:cs typeface="Calibri" pitchFamily="34" charset="-120"/>
+                        </a:rPr>
+                        <a:t>C7</a:t>
+                      </a:r>
+                      <a:endParaRPr lang="en-US" sz="1300" dirty="0">
+                        <a:latin typeface="Calibri" charset="0"/>
+                        <a:ea typeface="Calibri" charset="0"/>
+                        <a:cs typeface="Calibri" charset="0"/>
+                      </a:endParaRPr>
+                    </a:p>
+                  </a:txBody>
+                  <a:tcPr marL="91440" marR="91440" marT="45720" marB="45720" anchor="ctr">
+                    <a:lnL w="12700" cap="flat" cmpd="sng" algn="ctr">
+                      <a:solidFill>
+                        <a:srgbClr val="2A3A5C"/>
+                      </a:solidFill>
+                      <a:prstDash val="solid"/>
+                      <a:round/>
+                      <a:headEnd type="none" w="med" len="med"/>
+                      <a:tailEnd type="none" w="med" len="med"/>
+                    </a:lnL>
+                    <a:lnR w="12700" cap="flat" cmpd="sng" algn="ctr">
+                      <a:solidFill>
+                        <a:srgbClr val="2A3A5C"/>
+                      </a:solidFill>
+                      <a:prstDash val="solid"/>
+                      <a:round/>
+                      <a:headEnd type="none" w="med" len="med"/>
+                      <a:tailEnd type="none" w="med" len="med"/>
+                    </a:lnR>
+                    <a:lnT w="12700" cap="flat" cmpd="sng" algn="ctr">
+                      <a:solidFill>
+                        <a:srgbClr val="2A3A5C"/>
+                      </a:solidFill>
+                      <a:prstDash val="solid"/>
+                      <a:round/>
+                      <a:headEnd type="none" w="med" len="med"/>
+                      <a:tailEnd type="none" w="med" len="med"/>
+                    </a:lnT>
+                    <a:lnB w="12700" cap="flat" cmpd="sng" algn="ctr">
+                      <a:solidFill>
+                        <a:srgbClr val="2A3A5C"/>
+                      </a:solidFill>
+                      <a:prstDash val="solid"/>
+                      <a:round/>
+                      <a:headEnd type="none" w="med" len="med"/>
+                      <a:tailEnd type="none" w="med" len="med"/>
+                    </a:lnB>
+                    <a:solidFill>
+                      <a:srgbClr val="1B2C4F"/>
+                    </a:solidFill>
+                  </a:tcPr>
+                </a:tc>
+                <a:tc>
+                  <a:txBody>
+                    <a:bodyPr/>
+                    <a:lstStyle/>
+                    <a:p>
+                      <a:pPr algn="l" indent="0" marL="0">
+                        <a:buNone/>
+                      </a:pPr>
+                      <a:r>
+                        <a:rPr lang="en-US" sz="1300" dirty="0">
+                          <a:solidFill>
+                            <a:srgbClr val="FFFFFF"/>
+                          </a:solidFill>
+                          <a:latin typeface="Calibri" pitchFamily="34" charset="0"/>
+                          <a:ea typeface="Calibri" pitchFamily="34" charset="-122"/>
+                          <a:cs typeface="Calibri" pitchFamily="34" charset="-120"/>
+                        </a:rPr>
+                        <a:t>Bragg 反射镜透射线</a:t>
+                      </a:r>
+                      <a:endParaRPr lang="en-US" sz="1300" dirty="0">
+                        <a:latin typeface="Calibri" charset="0"/>
+                        <a:ea typeface="Calibri" charset="0"/>
+                        <a:cs typeface="Calibri" charset="0"/>
+                      </a:endParaRPr>
+                    </a:p>
+                  </a:txBody>
+                  <a:tcPr marL="91440" marR="91440" marT="45720" marB="45720" anchor="ctr">
+                    <a:lnL w="12700" cap="flat" cmpd="sng" algn="ctr">
+                      <a:solidFill>
+                        <a:srgbClr val="2A3A5C"/>
+                      </a:solidFill>
+                      <a:prstDash val="solid"/>
+                      <a:round/>
+                      <a:headEnd type="none" w="med" len="med"/>
+                      <a:tailEnd type="none" w="med" len="med"/>
+                    </a:lnL>
+                    <a:lnR w="12700" cap="flat" cmpd="sng" algn="ctr">
+                      <a:solidFill>
+                        <a:srgbClr val="2A3A5C"/>
+                      </a:solidFill>
+                      <a:prstDash val="solid"/>
+                      <a:round/>
+                      <a:headEnd type="none" w="med" len="med"/>
+                      <a:tailEnd type="none" w="med" len="med"/>
+                    </a:lnR>
+                    <a:lnT w="12700" cap="flat" cmpd="sng" algn="ctr">
+                      <a:solidFill>
+                        <a:srgbClr val="2A3A5C"/>
+                      </a:solidFill>
+                      <a:prstDash val="solid"/>
+                      <a:round/>
+                      <a:headEnd type="none" w="med" len="med"/>
+                      <a:tailEnd type="none" w="med" len="med"/>
+                    </a:lnT>
+                    <a:lnB w="12700" cap="flat" cmpd="sng" algn="ctr">
+                      <a:solidFill>
+                        <a:srgbClr val="2A3A5C"/>
+                      </a:solidFill>
+                      <a:prstDash val="solid"/>
+                      <a:round/>
+                      <a:headEnd type="none" w="med" len="med"/>
+                      <a:tailEnd type="none" w="med" len="med"/>
+                    </a:lnB>
+                    <a:solidFill>
+                      <a:srgbClr val="1B2C4F"/>
+                    </a:solidFill>
+                  </a:tcPr>
+                </a:tc>
+                <a:tc>
+                  <a:txBody>
+                    <a:bodyPr/>
+                    <a:lstStyle/>
+                    <a:p>
+                      <a:pPr algn="l" indent="0" marL="0">
+                        <a:buNone/>
+                      </a:pPr>
+                      <a:r>
+                        <a:rPr lang="en-US" sz="1300" dirty="0">
+                          <a:solidFill>
+                            <a:srgbClr val="FFFFFF"/>
+                          </a:solidFill>
+                          <a:latin typeface="Calibri" pitchFamily="34" charset="0"/>
+                          <a:ea typeface="Calibri" pitchFamily="34" charset="-122"/>
+                          <a:cs typeface="Calibri" pitchFamily="34" charset="-120"/>
+                        </a:rPr>
+                        <a:t>3</a:t>
+                      </a:r>
+                      <a:endParaRPr lang="en-US" sz="1300" dirty="0">
+                        <a:latin typeface="Calibri" charset="0"/>
+                        <a:ea typeface="Calibri" charset="0"/>
+                        <a:cs typeface="Calibri" charset="0"/>
+                      </a:endParaRPr>
+                    </a:p>
+                  </a:txBody>
+                  <a:tcPr marL="91440" marR="91440" marT="45720" marB="45720" anchor="ctr">
+                    <a:lnL w="12700" cap="flat" cmpd="sng" algn="ctr">
+                      <a:solidFill>
+                        <a:srgbClr val="2A3A5C"/>
+                      </a:solidFill>
+                      <a:prstDash val="solid"/>
+                      <a:round/>
+                      <a:headEnd type="none" w="med" len="med"/>
+                      <a:tailEnd type="none" w="med" len="med"/>
+                    </a:lnL>
+                    <a:lnR w="12700" cap="flat" cmpd="sng" algn="ctr">
+                      <a:solidFill>
+                        <a:srgbClr val="2A3A5C"/>
+                      </a:solidFill>
+                      <a:prstDash val="solid"/>
+                      <a:round/>
+                      <a:headEnd type="none" w="med" len="med"/>
+                      <a:tailEnd type="none" w="med" len="med"/>
+                    </a:lnR>
+                    <a:lnT w="12700" cap="flat" cmpd="sng" algn="ctr">
+                      <a:solidFill>
+                        <a:srgbClr val="2A3A5C"/>
+                      </a:solidFill>
+                      <a:prstDash val="solid"/>
+                      <a:round/>
+                      <a:headEnd type="none" w="med" len="med"/>
+                      <a:tailEnd type="none" w="med" len="med"/>
+                    </a:lnT>
+                    <a:lnB w="12700" cap="flat" cmpd="sng" algn="ctr">
+                      <a:solidFill>
+                        <a:srgbClr val="2A3A5C"/>
+                      </a:solidFill>
+                      <a:prstDash val="solid"/>
+                      <a:round/>
+                      <a:headEnd type="none" w="med" len="med"/>
+                      <a:tailEnd type="none" w="med" len="med"/>
+                    </a:lnB>
+                    <a:solidFill>
+                      <a:srgbClr val="1B2C4F"/>
+                    </a:solidFill>
+                  </a:tcPr>
+                </a:tc>
+                <a:tc>
+                  <a:txBody>
+                    <a:bodyPr/>
+                    <a:lstStyle/>
+                    <a:p>
+                      <a:pPr algn="l" indent="0" marL="0">
+                        <a:buNone/>
+                      </a:pPr>
+                      <a:r>
+                        <a:rPr lang="en-US" sz="1300" dirty="0">
+                          <a:solidFill>
+                            <a:srgbClr val="FFFFFF"/>
+                          </a:solidFill>
+                          <a:latin typeface="Calibri" pitchFamily="34" charset="0"/>
+                          <a:ea typeface="Calibri" pitchFamily="34" charset="-122"/>
+                          <a:cs typeface="Calibri" pitchFamily="34" charset="-120"/>
+                        </a:rPr>
+                        <a:t>4.4 KB</a:t>
+                      </a:r>
+                      <a:endParaRPr lang="en-US" sz="1300" dirty="0">
+                        <a:latin typeface="Calibri" charset="0"/>
+                        <a:ea typeface="Calibri" charset="0"/>
+                        <a:cs typeface="Calibri" charset="0"/>
+                      </a:endParaRPr>
+                    </a:p>
+                  </a:txBody>
+                  <a:tcPr marL="91440" marR="91440" marT="45720" marB="45720" anchor="ctr">
+                    <a:lnL w="12700" cap="flat" cmpd="sng" algn="ctr">
+                      <a:solidFill>
+                        <a:srgbClr val="2A3A5C"/>
+                      </a:solidFill>
+                      <a:prstDash val="solid"/>
+                      <a:round/>
+                      <a:headEnd type="none" w="med" len="med"/>
+                      <a:tailEnd type="none" w="med" len="med"/>
+                    </a:lnL>
+                    <a:lnR w="12700" cap="flat" cmpd="sng" algn="ctr">
+                      <a:solidFill>
+                        <a:srgbClr val="2A3A5C"/>
+                      </a:solidFill>
+                      <a:prstDash val="solid"/>
+                      <a:round/>
+                      <a:headEnd type="none" w="med" len="med"/>
+                      <a:tailEnd type="none" w="med" len="med"/>
+                    </a:lnR>
+                    <a:lnT w="12700" cap="flat" cmpd="sng" algn="ctr">
+                      <a:solidFill>
+                        <a:srgbClr val="2A3A5C"/>
+                      </a:solidFill>
+                      <a:prstDash val="solid"/>
+                      <a:round/>
+                      <a:headEnd type="none" w="med" len="med"/>
+                      <a:tailEnd type="none" w="med" len="med"/>
+                    </a:lnT>
+                    <a:lnB w="12700" cap="flat" cmpd="sng" algn="ctr">
+                      <a:solidFill>
+                        <a:srgbClr val="2A3A5C"/>
+                      </a:solidFill>
+                      <a:prstDash val="solid"/>
+                      <a:round/>
+                      <a:headEnd type="none" w="med" len="med"/>
+                      <a:tailEnd type="none" w="med" len="med"/>
+                    </a:lnB>
+                    <a:solidFill>
+                      <a:srgbClr val="1B2C4F"/>
+                    </a:solidFill>
+                  </a:tcPr>
+                </a:tc>
+                <a:tc>
+                  <a:txBody>
+                    <a:bodyPr/>
+                    <a:lstStyle/>
+                    <a:p>
+                      <a:pPr algn="l" indent="0" marL="0">
+                        <a:buNone/>
+                      </a:pPr>
+                      <a:r>
+                        <a:rPr lang="en-US" sz="1300" dirty="0">
+                          <a:solidFill>
+                            <a:srgbClr val="FFFFFF"/>
+                          </a:solidFill>
+                          <a:latin typeface="Calibri" pitchFamily="34" charset="0"/>
+                          <a:ea typeface="Calibri" pitchFamily="34" charset="-122"/>
+                          <a:cs typeface="Calibri" pitchFamily="34" charset="-120"/>
+                        </a:rPr>
+                        <a:t>DRC·LVS 全绿</a:t>
+                      </a:r>
+                      <a:endParaRPr lang="en-US" sz="1300" dirty="0">
+                        <a:latin typeface="Calibri" charset="0"/>
+                        <a:ea typeface="Calibri" charset="0"/>
+                        <a:cs typeface="Calibri" charset="0"/>
+                      </a:endParaRPr>
+                    </a:p>
+                  </a:txBody>
+                  <a:tcPr marL="91440" marR="91440" marT="45720" marB="45720" anchor="ctr">
+                    <a:lnL w="12700" cap="flat" cmpd="sng" algn="ctr">
+                      <a:solidFill>
+                        <a:srgbClr val="2A3A5C"/>
+                      </a:solidFill>
+                      <a:prstDash val="solid"/>
+                      <a:round/>
+                      <a:headEnd type="none" w="med" len="med"/>
+                      <a:tailEnd type="none" w="med" len="med"/>
+                    </a:lnL>
+                    <a:lnR w="12700" cap="flat" cmpd="sng" algn="ctr">
+                      <a:solidFill>
+                        <a:srgbClr val="2A3A5C"/>
+                      </a:solidFill>
+                      <a:prstDash val="solid"/>
+                      <a:round/>
+                      <a:headEnd type="none" w="med" len="med"/>
+                      <a:tailEnd type="none" w="med" len="med"/>
+                    </a:lnR>
+                    <a:lnT w="12700" cap="flat" cmpd="sng" algn="ctr">
+                      <a:solidFill>
+                        <a:srgbClr val="2A3A5C"/>
+                      </a:solidFill>
+                      <a:prstDash val="solid"/>
+                      <a:round/>
+                      <a:headEnd type="none" w="med" len="med"/>
+                      <a:tailEnd type="none" w="med" len="med"/>
+                    </a:lnT>
+                    <a:lnB w="12700" cap="flat" cmpd="sng" algn="ctr">
+                      <a:solidFill>
+                        <a:srgbClr val="2A3A5C"/>
+                      </a:solidFill>
+                      <a:prstDash val="solid"/>
+                      <a:round/>
+                      <a:headEnd type="none" w="med" len="med"/>
+                      <a:tailEnd type="none" w="med" len="med"/>
+                    </a:lnB>
+                    <a:solidFill>
+                      <a:srgbClr val="1B2C4F"/>
+                    </a:solidFill>
+                  </a:tcPr>
+                </a:tc>
+              </a:tr>
+            </a:tbl>
+          </a:graphicData>
+        </a:graphic>
+      </p:graphicFrame>
+      <p:sp>
+        <p:nvSpPr>
+          <p:cNvPr id="18" name="Text 15"/>
+          <p:cNvSpPr/>
+          <p:nvPr/>
+        </p:nvSpPr>
+        <p:spPr>
+          <a:xfrm>
+            <a:off x="640080" y="6400800"/>
+            <a:ext cx="10881360" cy="320040"/>
           </a:xfrm>
           <a:prstGeom prst="rect">
             <a:avLst/>
@@ -13112,62 +16489,23 @@
               <a:buNone/>
             </a:pPr>
             <a:r>
-              <a:rPr lang="en-US" sz="1700" b="1" dirty="0">
-                <a:solidFill>
-                  <a:srgbClr val="FFFFFF"/>
-                </a:solidFill>
-                <a:latin typeface="Georgia" pitchFamily="34" charset="0"/>
-                <a:ea typeface="Georgia" pitchFamily="34" charset="-122"/>
-                <a:cs typeface="Georgia" pitchFamily="34" charset="-120"/>
-              </a:rPr>
-              <a:t>L0 开放统一 IR / DSL</a:t>
-            </a:r>
-            <a:endParaRPr lang="en-US" sz="1700" dirty="0"/>
-          </a:p>
-        </p:txBody>
-      </p:sp>
-      <p:sp>
-        <p:nvSpPr>
-          <p:cNvPr id="24" name="Text 22"/>
-          <p:cNvSpPr/>
-          <p:nvPr/>
-        </p:nvSpPr>
-        <p:spPr>
-          <a:xfrm>
-            <a:off x="5577840" y="5312664"/>
-            <a:ext cx="5760720" cy="749808"/>
-          </a:xfrm>
-          <a:prstGeom prst="rect">
-            <a:avLst/>
-          </a:prstGeom>
-          <a:noFill/>
-          <a:ln/>
-        </p:spPr>
-        <p:txBody>
-          <a:bodyPr wrap="square" lIns="0" tIns="0" rIns="0" bIns="0" rtlCol="0" anchor="ctr"/>
-          <a:lstStyle/>
-          <a:p>
-            <a:pPr algn="l" indent="0" marL="0">
-              <a:buNone/>
-            </a:pPr>
-            <a:r>
-              <a:rPr lang="en-US" sz="1350" dirty="0">
-                <a:solidFill>
-                  <a:srgbClr val="CADCFC"/>
+              <a:rPr lang="en-US" sz="1100" i="1" dirty="0">
+                <a:solidFill>
+                  <a:srgbClr val="9FB0C9"/>
                 </a:solidFill>
                 <a:latin typeface="Calibri" pitchFamily="34" charset="0"/>
                 <a:ea typeface="Calibri" pitchFamily="34" charset="-122"/>
                 <a:cs typeface="Calibri" pitchFamily="34" charset="-120"/>
               </a:rPr>
-              <a:t>光子 + 量子统一中间表示（核心创新）</a:t>
-            </a:r>
-            <a:endParaRPr lang="en-US" sz="1350" dirty="0"/>
-          </a:p>
-        </p:txBody>
-      </p:sp>
-      <p:sp>
-        <p:nvSpPr>
-          <p:cNvPr id="25" name="Text 23"/>
+              <a:t>诚实边界：验证的是版图几何合法性（主权 DRC + LVS 拓扑一致），尚不含光学性能表征（IL/XT/FSR）。已接入 CI core 门禁 —— 主权链任何改动破坏任一例即当场拦红。</a:t>
+            </a:r>
+            <a:endParaRPr lang="en-US" sz="1100" dirty="0"/>
+          </a:p>
+        </p:txBody>
+      </p:sp>
+      <p:sp>
+        <p:nvSpPr>
+          <p:cNvPr id="19" name="Text 16"/>
           <p:cNvSpPr/>
           <p:nvPr/>
         </p:nvSpPr>
@@ -13206,7 +16544,7 @@
       </p:sp>
       <p:sp>
         <p:nvSpPr>
-          <p:cNvPr id="26" name="Text 24"/>
+          <p:cNvPr id="20" name="Text 17"/>
           <p:cNvSpPr/>
           <p:nvPr/>
         </p:nvSpPr>
@@ -13254,6 +16592,829 @@
 <file path=ppt/slides/slide8.xml><?xml version="1.0" encoding="utf-8"?>
 <p:sld xmlns:a="http://schemas.openxmlformats.org/drawingml/2006/main" xmlns:r="http://schemas.openxmlformats.org/officeDocument/2006/relationships" xmlns:p="http://schemas.openxmlformats.org/presentationml/2006/main">
   <p:cSld name="Slide 8">
+    <p:bg>
+      <p:bgPr>
+        <a:solidFill>
+          <a:srgbClr val="13203A"/>
+        </a:solidFill>
+      </p:bgPr>
+    </p:bg>
+    <p:spTree>
+      <p:nvGrpSpPr>
+        <p:cNvPr id="1" name=""/>
+        <p:cNvGrpSpPr/>
+        <p:nvPr/>
+      </p:nvGrpSpPr>
+      <p:grpSpPr>
+        <a:xfrm>
+          <a:off x="0" y="0"/>
+          <a:ext cx="0" cy="0"/>
+          <a:chOff x="0" y="0"/>
+          <a:chExt cx="0" cy="0"/>
+        </a:xfrm>
+      </p:grpSpPr>
+      <p:sp>
+        <p:nvSpPr>
+          <p:cNvPr id="2" name="Shape 0"/>
+          <p:cNvSpPr/>
+          <p:nvPr/>
+        </p:nvSpPr>
+        <p:spPr>
+          <a:xfrm>
+            <a:off x="640080" y="566928"/>
+            <a:ext cx="164592" cy="384048"/>
+          </a:xfrm>
+          <a:prstGeom prst="rect">
+            <a:avLst/>
+          </a:prstGeom>
+          <a:solidFill>
+            <a:srgbClr val="2E75B6"/>
+          </a:solidFill>
+          <a:ln/>
+        </p:spPr>
+      </p:sp>
+      <p:sp>
+        <p:nvSpPr>
+          <p:cNvPr id="3" name="Text 1"/>
+          <p:cNvSpPr/>
+          <p:nvPr/>
+        </p:nvSpPr>
+        <p:spPr>
+          <a:xfrm>
+            <a:off x="896112" y="548640"/>
+            <a:ext cx="8229600" cy="420624"/>
+          </a:xfrm>
+          <a:prstGeom prst="rect">
+            <a:avLst/>
+          </a:prstGeom>
+          <a:noFill/>
+          <a:ln/>
+        </p:spPr>
+        <p:txBody>
+          <a:bodyPr wrap="square" lIns="0" tIns="0" rIns="0" bIns="0" rtlCol="0" anchor="ctr"/>
+          <a:lstStyle/>
+          <a:p>
+            <a:pPr algn="l" indent="0" marL="0">
+              <a:buNone/>
+            </a:pPr>
+            <a:r>
+              <a:rPr lang="en-US" sz="1400" b="1" spc="200" kern="0" dirty="0">
+                <a:solidFill>
+                  <a:srgbClr val="2E75B6"/>
+                </a:solidFill>
+                <a:latin typeface="Calibri" pitchFamily="34" charset="0"/>
+                <a:ea typeface="Calibri" pitchFamily="34" charset="-122"/>
+                <a:cs typeface="Calibri" pitchFamily="34" charset="-120"/>
+              </a:rPr>
+              <a:t>护城河</a:t>
+            </a:r>
+            <a:endParaRPr lang="en-US" sz="1400" dirty="0"/>
+          </a:p>
+        </p:txBody>
+      </p:sp>
+      <p:sp>
+        <p:nvSpPr>
+          <p:cNvPr id="4" name="Text 2"/>
+          <p:cNvSpPr/>
+          <p:nvPr/>
+        </p:nvSpPr>
+        <p:spPr>
+          <a:xfrm>
+            <a:off x="640080" y="1097280"/>
+            <a:ext cx="10881360" cy="1005840"/>
+          </a:xfrm>
+          <a:prstGeom prst="rect">
+            <a:avLst/>
+          </a:prstGeom>
+          <a:noFill/>
+          <a:ln/>
+        </p:spPr>
+        <p:txBody>
+          <a:bodyPr wrap="square" lIns="0" tIns="0" rIns="0" bIns="0" rtlCol="0" anchor="t"/>
+          <a:lstStyle/>
+          <a:p>
+            <a:pPr algn="l" indent="0" marL="0">
+              <a:buNone/>
+            </a:pPr>
+            <a:r>
+              <a:rPr lang="en-US" sz="3400" b="1" dirty="0">
+                <a:solidFill>
+                  <a:srgbClr val="FFFFFF"/>
+                </a:solidFill>
+                <a:latin typeface="Georgia" pitchFamily="34" charset="0"/>
+                <a:ea typeface="Georgia" pitchFamily="34" charset="-122"/>
+                <a:cs typeface="Georgia" pitchFamily="34" charset="-120"/>
+              </a:rPr>
+              <a:t>护城河 = 标准 + 生态 + PDK，而非某段代码</a:t>
+            </a:r>
+            <a:endParaRPr lang="en-US" sz="3400" dirty="0"/>
+          </a:p>
+        </p:txBody>
+      </p:sp>
+      <p:sp>
+        <p:nvSpPr>
+          <p:cNvPr id="5" name="Shape 3"/>
+          <p:cNvSpPr/>
+          <p:nvPr/>
+        </p:nvSpPr>
+        <p:spPr>
+          <a:xfrm>
+            <a:off x="640080" y="1874520"/>
+            <a:ext cx="10881360" cy="749808"/>
+          </a:xfrm>
+          <a:prstGeom prst="rect">
+            <a:avLst/>
+          </a:prstGeom>
+          <a:solidFill>
+            <a:srgbClr val="1B2C4F"/>
+          </a:solidFill>
+          <a:ln w="12700">
+            <a:solidFill>
+              <a:srgbClr val="1B2C4F"/>
+            </a:solidFill>
+            <a:prstDash val="solid"/>
+          </a:ln>
+        </p:spPr>
+      </p:sp>
+      <p:sp>
+        <p:nvSpPr>
+          <p:cNvPr id="6" name="Shape 4"/>
+          <p:cNvSpPr/>
+          <p:nvPr/>
+        </p:nvSpPr>
+        <p:spPr>
+          <a:xfrm>
+            <a:off x="640080" y="1874520"/>
+            <a:ext cx="128016" cy="749808"/>
+          </a:xfrm>
+          <a:prstGeom prst="rect">
+            <a:avLst/>
+          </a:prstGeom>
+          <a:solidFill>
+            <a:srgbClr val="2E75B6"/>
+          </a:solidFill>
+          <a:ln/>
+        </p:spPr>
+      </p:sp>
+      <p:sp>
+        <p:nvSpPr>
+          <p:cNvPr id="7" name="Text 5"/>
+          <p:cNvSpPr/>
+          <p:nvPr/>
+        </p:nvSpPr>
+        <p:spPr>
+          <a:xfrm>
+            <a:off x="960120" y="1874520"/>
+            <a:ext cx="4572000" cy="749808"/>
+          </a:xfrm>
+          <a:prstGeom prst="rect">
+            <a:avLst/>
+          </a:prstGeom>
+          <a:noFill/>
+          <a:ln/>
+        </p:spPr>
+        <p:txBody>
+          <a:bodyPr wrap="square" lIns="0" tIns="0" rIns="0" bIns="0" rtlCol="0" anchor="ctr"/>
+          <a:lstStyle/>
+          <a:p>
+            <a:pPr algn="l" indent="0" marL="0">
+              <a:buNone/>
+            </a:pPr>
+            <a:r>
+              <a:rPr lang="en-US" sz="1700" b="1" dirty="0">
+                <a:solidFill>
+                  <a:srgbClr val="FFFFFF"/>
+                </a:solidFill>
+                <a:latin typeface="Georgia" pitchFamily="34" charset="0"/>
+                <a:ea typeface="Georgia" pitchFamily="34" charset="-122"/>
+                <a:cs typeface="Georgia" pitchFamily="34" charset="-120"/>
+              </a:rPr>
+              <a:t>L4 应用与生态</a:t>
+            </a:r>
+            <a:endParaRPr lang="en-US" sz="1700" dirty="0"/>
+          </a:p>
+        </p:txBody>
+      </p:sp>
+      <p:sp>
+        <p:nvSpPr>
+          <p:cNvPr id="8" name="Text 6"/>
+          <p:cNvSpPr/>
+          <p:nvPr/>
+        </p:nvSpPr>
+        <p:spPr>
+          <a:xfrm>
+            <a:off x="5577840" y="1874520"/>
+            <a:ext cx="5760720" cy="749808"/>
+          </a:xfrm>
+          <a:prstGeom prst="rect">
+            <a:avLst/>
+          </a:prstGeom>
+          <a:noFill/>
+          <a:ln/>
+        </p:spPr>
+        <p:txBody>
+          <a:bodyPr wrap="square" lIns="0" tIns="0" rIns="0" bIns="0" rtlCol="0" anchor="ctr"/>
+          <a:lstStyle/>
+          <a:p>
+            <a:pPr algn="l" indent="0" marL="0">
+              <a:buNone/>
+            </a:pPr>
+            <a:r>
+              <a:rPr lang="en-US" sz="1350" dirty="0">
+                <a:solidFill>
+                  <a:srgbClr val="CADCFC"/>
+                </a:solidFill>
+                <a:latin typeface="Calibri" pitchFamily="34" charset="0"/>
+                <a:ea typeface="Calibri" pitchFamily="34" charset="-122"/>
+                <a:cs typeface="Calibri" pitchFamily="34" charset="-120"/>
+              </a:rPr>
+              <a:t>用户层 / 开源社区 / 认证商业版</a:t>
+            </a:r>
+            <a:endParaRPr lang="en-US" sz="1350" dirty="0"/>
+          </a:p>
+        </p:txBody>
+      </p:sp>
+      <p:sp>
+        <p:nvSpPr>
+          <p:cNvPr id="9" name="Shape 7"/>
+          <p:cNvSpPr/>
+          <p:nvPr/>
+        </p:nvSpPr>
+        <p:spPr>
+          <a:xfrm>
+            <a:off x="640080" y="2734056"/>
+            <a:ext cx="10881360" cy="749808"/>
+          </a:xfrm>
+          <a:prstGeom prst="rect">
+            <a:avLst/>
+          </a:prstGeom>
+          <a:solidFill>
+            <a:srgbClr val="1B2C4F"/>
+          </a:solidFill>
+          <a:ln w="12700">
+            <a:solidFill>
+              <a:srgbClr val="1B2C4F"/>
+            </a:solidFill>
+            <a:prstDash val="solid"/>
+          </a:ln>
+        </p:spPr>
+      </p:sp>
+      <p:sp>
+        <p:nvSpPr>
+          <p:cNvPr id="10" name="Shape 8"/>
+          <p:cNvSpPr/>
+          <p:nvPr/>
+        </p:nvSpPr>
+        <p:spPr>
+          <a:xfrm>
+            <a:off x="640080" y="2734056"/>
+            <a:ext cx="128016" cy="749808"/>
+          </a:xfrm>
+          <a:prstGeom prst="rect">
+            <a:avLst/>
+          </a:prstGeom>
+          <a:solidFill>
+            <a:srgbClr val="2E75B6"/>
+          </a:solidFill>
+          <a:ln/>
+        </p:spPr>
+      </p:sp>
+      <p:sp>
+        <p:nvSpPr>
+          <p:cNvPr id="11" name="Text 9"/>
+          <p:cNvSpPr/>
+          <p:nvPr/>
+        </p:nvSpPr>
+        <p:spPr>
+          <a:xfrm>
+            <a:off x="960120" y="2734056"/>
+            <a:ext cx="4572000" cy="749808"/>
+          </a:xfrm>
+          <a:prstGeom prst="rect">
+            <a:avLst/>
+          </a:prstGeom>
+          <a:noFill/>
+          <a:ln/>
+        </p:spPr>
+        <p:txBody>
+          <a:bodyPr wrap="square" lIns="0" tIns="0" rIns="0" bIns="0" rtlCol="0" anchor="ctr"/>
+          <a:lstStyle/>
+          <a:p>
+            <a:pPr algn="l" indent="0" marL="0">
+              <a:buNone/>
+            </a:pPr>
+            <a:r>
+              <a:rPr lang="en-US" sz="1700" b="1" dirty="0">
+                <a:solidFill>
+                  <a:srgbClr val="FFFFFF"/>
+                </a:solidFill>
+                <a:latin typeface="Georgia" pitchFamily="34" charset="0"/>
+                <a:ea typeface="Georgia" pitchFamily="34" charset="-122"/>
+                <a:cs typeface="Georgia" pitchFamily="34" charset="-120"/>
+              </a:rPr>
+              <a:t>L3 求解器后端</a:t>
+            </a:r>
+            <a:endParaRPr lang="en-US" sz="1700" dirty="0"/>
+          </a:p>
+        </p:txBody>
+      </p:sp>
+      <p:sp>
+        <p:nvSpPr>
+          <p:cNvPr id="12" name="Text 10"/>
+          <p:cNvSpPr/>
+          <p:nvPr/>
+        </p:nvSpPr>
+        <p:spPr>
+          <a:xfrm>
+            <a:off x="5577840" y="2734056"/>
+            <a:ext cx="5760720" cy="749808"/>
+          </a:xfrm>
+          <a:prstGeom prst="rect">
+            <a:avLst/>
+          </a:prstGeom>
+          <a:noFill/>
+          <a:ln/>
+        </p:spPr>
+        <p:txBody>
+          <a:bodyPr wrap="square" lIns="0" tIns="0" rIns="0" bIns="0" rtlCol="0" anchor="ctr"/>
+          <a:lstStyle/>
+          <a:p>
+            <a:pPr algn="l" indent="0" marL="0">
+              <a:buNone/>
+            </a:pPr>
+            <a:r>
+              <a:rPr lang="en-US" sz="1350" dirty="0">
+                <a:solidFill>
+                  <a:srgbClr val="CADCFC"/>
+                </a:solidFill>
+                <a:latin typeface="Calibri" pitchFamily="34" charset="0"/>
+                <a:ea typeface="Calibri" pitchFamily="34" charset="-122"/>
+                <a:cs typeface="Calibri" pitchFamily="34" charset="-120"/>
+              </a:rPr>
+              <a:t>FDTD / FEM / EME / 量子哈密顿 ← AI 自举生成 / 插件调度</a:t>
+            </a:r>
+            <a:endParaRPr lang="en-US" sz="1350" dirty="0"/>
+          </a:p>
+        </p:txBody>
+      </p:sp>
+      <p:sp>
+        <p:nvSpPr>
+          <p:cNvPr id="13" name="Shape 11"/>
+          <p:cNvSpPr/>
+          <p:nvPr/>
+        </p:nvSpPr>
+        <p:spPr>
+          <a:xfrm>
+            <a:off x="640080" y="3593592"/>
+            <a:ext cx="10881360" cy="749808"/>
+          </a:xfrm>
+          <a:prstGeom prst="rect">
+            <a:avLst/>
+          </a:prstGeom>
+          <a:solidFill>
+            <a:srgbClr val="1B2C4F"/>
+          </a:solidFill>
+          <a:ln w="12700">
+            <a:solidFill>
+              <a:srgbClr val="1B2C4F"/>
+            </a:solidFill>
+            <a:prstDash val="solid"/>
+          </a:ln>
+        </p:spPr>
+      </p:sp>
+      <p:sp>
+        <p:nvSpPr>
+          <p:cNvPr id="14" name="Shape 12"/>
+          <p:cNvSpPr/>
+          <p:nvPr/>
+        </p:nvSpPr>
+        <p:spPr>
+          <a:xfrm>
+            <a:off x="640080" y="3593592"/>
+            <a:ext cx="128016" cy="749808"/>
+          </a:xfrm>
+          <a:prstGeom prst="rect">
+            <a:avLst/>
+          </a:prstGeom>
+          <a:solidFill>
+            <a:srgbClr val="2E75B6"/>
+          </a:solidFill>
+          <a:ln/>
+        </p:spPr>
+      </p:sp>
+      <p:sp>
+        <p:nvSpPr>
+          <p:cNvPr id="15" name="Text 13"/>
+          <p:cNvSpPr/>
+          <p:nvPr/>
+        </p:nvSpPr>
+        <p:spPr>
+          <a:xfrm>
+            <a:off x="960120" y="3593592"/>
+            <a:ext cx="4572000" cy="749808"/>
+          </a:xfrm>
+          <a:prstGeom prst="rect">
+            <a:avLst/>
+          </a:prstGeom>
+          <a:noFill/>
+          <a:ln/>
+        </p:spPr>
+        <p:txBody>
+          <a:bodyPr wrap="square" lIns="0" tIns="0" rIns="0" bIns="0" rtlCol="0" anchor="ctr"/>
+          <a:lstStyle/>
+          <a:p>
+            <a:pPr algn="l" indent="0" marL="0">
+              <a:buNone/>
+            </a:pPr>
+            <a:r>
+              <a:rPr lang="en-US" sz="1700" b="1" dirty="0">
+                <a:solidFill>
+                  <a:srgbClr val="FFFFFF"/>
+                </a:solidFill>
+                <a:latin typeface="Georgia" pitchFamily="34" charset="0"/>
+                <a:ea typeface="Georgia" pitchFamily="34" charset="-122"/>
+                <a:cs typeface="Georgia" pitchFamily="34" charset="-120"/>
+              </a:rPr>
+              <a:t>L2 开放 PDK / 器件本体 Registry</a:t>
+            </a:r>
+            <a:endParaRPr lang="en-US" sz="1700" dirty="0"/>
+          </a:p>
+        </p:txBody>
+      </p:sp>
+      <p:sp>
+        <p:nvSpPr>
+          <p:cNvPr id="16" name="Text 14"/>
+          <p:cNvSpPr/>
+          <p:nvPr/>
+        </p:nvSpPr>
+        <p:spPr>
+          <a:xfrm>
+            <a:off x="5577840" y="3593592"/>
+            <a:ext cx="5760720" cy="749808"/>
+          </a:xfrm>
+          <a:prstGeom prst="rect">
+            <a:avLst/>
+          </a:prstGeom>
+          <a:noFill/>
+          <a:ln/>
+        </p:spPr>
+        <p:txBody>
+          <a:bodyPr wrap="square" lIns="0" tIns="0" rIns="0" bIns="0" rtlCol="0" anchor="ctr"/>
+          <a:lstStyle/>
+          <a:p>
+            <a:pPr algn="l" indent="0" marL="0">
+              <a:buNone/>
+            </a:pPr>
+            <a:r>
+              <a:rPr lang="en-US" sz="1350" dirty="0">
+                <a:solidFill>
+                  <a:srgbClr val="CADCFC"/>
+                </a:solidFill>
+                <a:latin typeface="Calibri" pitchFamily="34" charset="0"/>
+                <a:ea typeface="Calibri" pitchFamily="34" charset="-122"/>
+                <a:cs typeface="Calibri" pitchFamily="34" charset="-120"/>
+              </a:rPr>
+              <a:t>社区 + 晶圆厂共建</a:t>
+            </a:r>
+            <a:endParaRPr lang="en-US" sz="1350" dirty="0"/>
+          </a:p>
+        </p:txBody>
+      </p:sp>
+      <p:sp>
+        <p:nvSpPr>
+          <p:cNvPr id="17" name="Shape 15"/>
+          <p:cNvSpPr/>
+          <p:nvPr/>
+        </p:nvSpPr>
+        <p:spPr>
+          <a:xfrm>
+            <a:off x="640080" y="4453128"/>
+            <a:ext cx="10881360" cy="749808"/>
+          </a:xfrm>
+          <a:prstGeom prst="rect">
+            <a:avLst/>
+          </a:prstGeom>
+          <a:solidFill>
+            <a:srgbClr val="1B2C4F"/>
+          </a:solidFill>
+          <a:ln w="12700">
+            <a:solidFill>
+              <a:srgbClr val="1B2C4F"/>
+            </a:solidFill>
+            <a:prstDash val="solid"/>
+          </a:ln>
+        </p:spPr>
+      </p:sp>
+      <p:sp>
+        <p:nvSpPr>
+          <p:cNvPr id="18" name="Shape 16"/>
+          <p:cNvSpPr/>
+          <p:nvPr/>
+        </p:nvSpPr>
+        <p:spPr>
+          <a:xfrm>
+            <a:off x="640080" y="4453128"/>
+            <a:ext cx="128016" cy="749808"/>
+          </a:xfrm>
+          <a:prstGeom prst="rect">
+            <a:avLst/>
+          </a:prstGeom>
+          <a:solidFill>
+            <a:srgbClr val="2E75B6"/>
+          </a:solidFill>
+          <a:ln/>
+        </p:spPr>
+      </p:sp>
+      <p:sp>
+        <p:nvSpPr>
+          <p:cNvPr id="19" name="Text 17"/>
+          <p:cNvSpPr/>
+          <p:nvPr/>
+        </p:nvSpPr>
+        <p:spPr>
+          <a:xfrm>
+            <a:off x="960120" y="4453128"/>
+            <a:ext cx="4572000" cy="749808"/>
+          </a:xfrm>
+          <a:prstGeom prst="rect">
+            <a:avLst/>
+          </a:prstGeom>
+          <a:noFill/>
+          <a:ln/>
+        </p:spPr>
+        <p:txBody>
+          <a:bodyPr wrap="square" lIns="0" tIns="0" rIns="0" bIns="0" rtlCol="0" anchor="ctr"/>
+          <a:lstStyle/>
+          <a:p>
+            <a:pPr algn="l" indent="0" marL="0">
+              <a:buNone/>
+            </a:pPr>
+            <a:r>
+              <a:rPr lang="en-US" sz="1700" b="1" dirty="0">
+                <a:solidFill>
+                  <a:srgbClr val="FFFFFF"/>
+                </a:solidFill>
+                <a:latin typeface="Georgia" pitchFamily="34" charset="0"/>
+                <a:ea typeface="Georgia" pitchFamily="34" charset="-122"/>
+                <a:cs typeface="Georgia" pitchFamily="34" charset="-120"/>
+              </a:rPr>
+              <a:t>L1 智能体协议层</a:t>
+            </a:r>
+            <a:endParaRPr lang="en-US" sz="1700" dirty="0"/>
+          </a:p>
+        </p:txBody>
+      </p:sp>
+      <p:sp>
+        <p:nvSpPr>
+          <p:cNvPr id="20" name="Text 18"/>
+          <p:cNvSpPr/>
+          <p:nvPr/>
+        </p:nvSpPr>
+        <p:spPr>
+          <a:xfrm>
+            <a:off x="5577840" y="4453128"/>
+            <a:ext cx="5760720" cy="749808"/>
+          </a:xfrm>
+          <a:prstGeom prst="rect">
+            <a:avLst/>
+          </a:prstGeom>
+          <a:noFill/>
+          <a:ln/>
+        </p:spPr>
+        <p:txBody>
+          <a:bodyPr wrap="square" lIns="0" tIns="0" rIns="0" bIns="0" rtlCol="0" anchor="ctr"/>
+          <a:lstStyle/>
+          <a:p>
+            <a:pPr algn="l" indent="0" marL="0">
+              <a:buNone/>
+            </a:pPr>
+            <a:r>
+              <a:rPr lang="en-US" sz="1350" dirty="0">
+                <a:solidFill>
+                  <a:srgbClr val="CADCFC"/>
+                </a:solidFill>
+                <a:latin typeface="Calibri" pitchFamily="34" charset="0"/>
+                <a:ea typeface="Calibri" pitchFamily="34" charset="-122"/>
+                <a:cs typeface="Calibri" pitchFamily="34" charset="-120"/>
+              </a:rPr>
+              <a:t>Interpreter / Designer / Layout / Solver / Verifier 开放接口</a:t>
+            </a:r>
+            <a:endParaRPr lang="en-US" sz="1350" dirty="0"/>
+          </a:p>
+        </p:txBody>
+      </p:sp>
+      <p:sp>
+        <p:nvSpPr>
+          <p:cNvPr id="21" name="Shape 19"/>
+          <p:cNvSpPr/>
+          <p:nvPr/>
+        </p:nvSpPr>
+        <p:spPr>
+          <a:xfrm>
+            <a:off x="640080" y="5312664"/>
+            <a:ext cx="10881360" cy="749808"/>
+          </a:xfrm>
+          <a:prstGeom prst="rect">
+            <a:avLst/>
+          </a:prstGeom>
+          <a:solidFill>
+            <a:srgbClr val="2E75B6"/>
+          </a:solidFill>
+          <a:ln w="19050">
+            <a:solidFill>
+              <a:srgbClr val="22B8CF"/>
+            </a:solidFill>
+            <a:prstDash val="solid"/>
+          </a:ln>
+        </p:spPr>
+      </p:sp>
+      <p:sp>
+        <p:nvSpPr>
+          <p:cNvPr id="22" name="Shape 20"/>
+          <p:cNvSpPr/>
+          <p:nvPr/>
+        </p:nvSpPr>
+        <p:spPr>
+          <a:xfrm>
+            <a:off x="640080" y="5312664"/>
+            <a:ext cx="128016" cy="749808"/>
+          </a:xfrm>
+          <a:prstGeom prst="rect">
+            <a:avLst/>
+          </a:prstGeom>
+          <a:solidFill>
+            <a:srgbClr val="22B8CF"/>
+          </a:solidFill>
+          <a:ln/>
+        </p:spPr>
+      </p:sp>
+      <p:sp>
+        <p:nvSpPr>
+          <p:cNvPr id="23" name="Text 21"/>
+          <p:cNvSpPr/>
+          <p:nvPr/>
+        </p:nvSpPr>
+        <p:spPr>
+          <a:xfrm>
+            <a:off x="960120" y="5312664"/>
+            <a:ext cx="4572000" cy="749808"/>
+          </a:xfrm>
+          <a:prstGeom prst="rect">
+            <a:avLst/>
+          </a:prstGeom>
+          <a:noFill/>
+          <a:ln/>
+        </p:spPr>
+        <p:txBody>
+          <a:bodyPr wrap="square" lIns="0" tIns="0" rIns="0" bIns="0" rtlCol="0" anchor="ctr"/>
+          <a:lstStyle/>
+          <a:p>
+            <a:pPr algn="l" indent="0" marL="0">
+              <a:buNone/>
+            </a:pPr>
+            <a:r>
+              <a:rPr lang="en-US" sz="1700" b="1" dirty="0">
+                <a:solidFill>
+                  <a:srgbClr val="FFFFFF"/>
+                </a:solidFill>
+                <a:latin typeface="Georgia" pitchFamily="34" charset="0"/>
+                <a:ea typeface="Georgia" pitchFamily="34" charset="-122"/>
+                <a:cs typeface="Georgia" pitchFamily="34" charset="-120"/>
+              </a:rPr>
+              <a:t>L0 开放统一 IR / DSL</a:t>
+            </a:r>
+            <a:endParaRPr lang="en-US" sz="1700" dirty="0"/>
+          </a:p>
+        </p:txBody>
+      </p:sp>
+      <p:sp>
+        <p:nvSpPr>
+          <p:cNvPr id="24" name="Text 22"/>
+          <p:cNvSpPr/>
+          <p:nvPr/>
+        </p:nvSpPr>
+        <p:spPr>
+          <a:xfrm>
+            <a:off x="5577840" y="5312664"/>
+            <a:ext cx="5760720" cy="749808"/>
+          </a:xfrm>
+          <a:prstGeom prst="rect">
+            <a:avLst/>
+          </a:prstGeom>
+          <a:noFill/>
+          <a:ln/>
+        </p:spPr>
+        <p:txBody>
+          <a:bodyPr wrap="square" lIns="0" tIns="0" rIns="0" bIns="0" rtlCol="0" anchor="ctr"/>
+          <a:lstStyle/>
+          <a:p>
+            <a:pPr algn="l" indent="0" marL="0">
+              <a:buNone/>
+            </a:pPr>
+            <a:r>
+              <a:rPr lang="en-US" sz="1350" dirty="0">
+                <a:solidFill>
+                  <a:srgbClr val="CADCFC"/>
+                </a:solidFill>
+                <a:latin typeface="Calibri" pitchFamily="34" charset="0"/>
+                <a:ea typeface="Calibri" pitchFamily="34" charset="-122"/>
+                <a:cs typeface="Calibri" pitchFamily="34" charset="-120"/>
+              </a:rPr>
+              <a:t>光子 + 量子统一中间表示（核心创新）</a:t>
+            </a:r>
+            <a:endParaRPr lang="en-US" sz="1350" dirty="0"/>
+          </a:p>
+        </p:txBody>
+      </p:sp>
+      <p:sp>
+        <p:nvSpPr>
+          <p:cNvPr id="25" name="Text 23"/>
+          <p:cNvSpPr/>
+          <p:nvPr/>
+        </p:nvSpPr>
+        <p:spPr>
+          <a:xfrm>
+            <a:off x="640080" y="6400800"/>
+            <a:ext cx="8229600" cy="274320"/>
+          </a:xfrm>
+          <a:prstGeom prst="rect">
+            <a:avLst/>
+          </a:prstGeom>
+          <a:noFill/>
+          <a:ln/>
+        </p:spPr>
+        <p:txBody>
+          <a:bodyPr wrap="square" lIns="0" tIns="0" rIns="0" bIns="0" rtlCol="0" anchor="ctr"/>
+          <a:lstStyle/>
+          <a:p>
+            <a:pPr algn="l" indent="0" marL="0">
+              <a:buNone/>
+            </a:pPr>
+            <a:r>
+              <a:rPr lang="en-US" sz="1000" dirty="0">
+                <a:solidFill>
+                  <a:srgbClr val="9FB0C9"/>
+                </a:solidFill>
+                <a:latin typeface="Calibri" pitchFamily="34" charset="0"/>
+                <a:ea typeface="Calibri" pitchFamily="34" charset="-122"/>
+                <a:cs typeface="Calibri" pitchFamily="34" charset="-120"/>
+              </a:rPr>
+              <a:t>LDA · 开源 / 自主可控 / Agent 原生 光·量子芯片设计底座</a:t>
+            </a:r>
+            <a:endParaRPr lang="en-US" sz="1000" dirty="0"/>
+          </a:p>
+        </p:txBody>
+      </p:sp>
+      <p:sp>
+        <p:nvSpPr>
+          <p:cNvPr id="26" name="Text 24"/>
+          <p:cNvSpPr/>
+          <p:nvPr/>
+        </p:nvSpPr>
+        <p:spPr>
+          <a:xfrm>
+            <a:off x="11155680" y="6400800"/>
+            <a:ext cx="548640" cy="274320"/>
+          </a:xfrm>
+          <a:prstGeom prst="rect">
+            <a:avLst/>
+          </a:prstGeom>
+          <a:noFill/>
+          <a:ln/>
+        </p:spPr>
+        <p:txBody>
+          <a:bodyPr wrap="square" lIns="0" tIns="0" rIns="0" bIns="0" rtlCol="0" anchor="ctr"/>
+          <a:lstStyle/>
+          <a:p>
+            <a:pPr algn="r" indent="0" marL="0">
+              <a:buNone/>
+            </a:pPr>
+            <a:r>
+              <a:rPr lang="en-US" sz="1000" dirty="0">
+                <a:solidFill>
+                  <a:srgbClr val="9FB0C9"/>
+                </a:solidFill>
+                <a:latin typeface="Calibri" pitchFamily="34" charset="0"/>
+                <a:ea typeface="Calibri" pitchFamily="34" charset="-122"/>
+                <a:cs typeface="Calibri" pitchFamily="34" charset="-120"/>
+              </a:rPr>
+              <a:t>8</a:t>
+            </a:r>
+            <a:endParaRPr lang="en-US" sz="1000" dirty="0"/>
+          </a:p>
+        </p:txBody>
+      </p:sp>
+    </p:spTree>
+  </p:cSld>
+  <p:clrMapOvr>
+    <a:masterClrMapping/>
+  </p:clrMapOvr>
+</p:sld>
+</file>
+
+<file path=ppt/slides/slide9.xml><?xml version="1.0" encoding="utf-8"?>
+<p:sld xmlns:a="http://schemas.openxmlformats.org/drawingml/2006/main" xmlns:r="http://schemas.openxmlformats.org/officeDocument/2006/relationships" xmlns:p="http://schemas.openxmlformats.org/presentationml/2006/main">
+  <p:cSld name="Slide 9">
     <p:bg>
       <p:bgPr>
         <a:solidFill>
@@ -13953,634 +18114,6 @@
                 <a:cs typeface="Calibri" pitchFamily="34" charset="-120"/>
               </a:rPr>
               <a:t>8</a:t>
-            </a:r>
-            <a:endParaRPr lang="en-US" sz="1000" dirty="0"/>
-          </a:p>
-        </p:txBody>
-      </p:sp>
-    </p:spTree>
-  </p:cSld>
-  <p:clrMapOvr>
-    <a:masterClrMapping/>
-  </p:clrMapOvr>
-</p:sld>
-</file>
-
-<file path=ppt/slides/slide9.xml><?xml version="1.0" encoding="utf-8"?>
-<p:sld xmlns:a="http://schemas.openxmlformats.org/drawingml/2006/main" xmlns:r="http://schemas.openxmlformats.org/officeDocument/2006/relationships" xmlns:p="http://schemas.openxmlformats.org/presentationml/2006/main">
-  <p:cSld name="Slide 9">
-    <p:bg>
-      <p:bgPr>
-        <a:solidFill>
-          <a:srgbClr val="13203A"/>
-        </a:solidFill>
-      </p:bgPr>
-    </p:bg>
-    <p:spTree>
-      <p:nvGrpSpPr>
-        <p:cNvPr id="1" name=""/>
-        <p:cNvGrpSpPr/>
-        <p:nvPr/>
-      </p:nvGrpSpPr>
-      <p:grpSpPr>
-        <a:xfrm>
-          <a:off x="0" y="0"/>
-          <a:ext cx="0" cy="0"/>
-          <a:chOff x="0" y="0"/>
-          <a:chExt cx="0" cy="0"/>
-        </a:xfrm>
-      </p:grpSpPr>
-      <p:sp>
-        <p:nvSpPr>
-          <p:cNvPr id="2" name="Shape 0"/>
-          <p:cNvSpPr/>
-          <p:nvPr/>
-        </p:nvSpPr>
-        <p:spPr>
-          <a:xfrm>
-            <a:off x="640080" y="566928"/>
-            <a:ext cx="164592" cy="384048"/>
-          </a:xfrm>
-          <a:prstGeom prst="rect">
-            <a:avLst/>
-          </a:prstGeom>
-          <a:solidFill>
-            <a:srgbClr val="2E75B6"/>
-          </a:solidFill>
-          <a:ln/>
-        </p:spPr>
-      </p:sp>
-      <p:sp>
-        <p:nvSpPr>
-          <p:cNvPr id="3" name="Text 1"/>
-          <p:cNvSpPr/>
-          <p:nvPr/>
-        </p:nvSpPr>
-        <p:spPr>
-          <a:xfrm>
-            <a:off x="896112" y="548640"/>
-            <a:ext cx="8229600" cy="420624"/>
-          </a:xfrm>
-          <a:prstGeom prst="rect">
-            <a:avLst/>
-          </a:prstGeom>
-          <a:noFill/>
-          <a:ln/>
-        </p:spPr>
-        <p:txBody>
-          <a:bodyPr wrap="square" lIns="0" tIns="0" rIns="0" bIns="0" rtlCol="0" anchor="ctr"/>
-          <a:lstStyle/>
-          <a:p>
-            <a:pPr algn="l" indent="0" marL="0">
-              <a:buNone/>
-            </a:pPr>
-            <a:r>
-              <a:rPr lang="en-US" sz="1400" b="1" spc="200" kern="0" dirty="0">
-                <a:solidFill>
-                  <a:srgbClr val="2E75B6"/>
-                </a:solidFill>
-                <a:latin typeface="Calibri" pitchFamily="34" charset="0"/>
-                <a:ea typeface="Calibri" pitchFamily="34" charset="-122"/>
-                <a:cs typeface="Calibri" pitchFamily="34" charset="-120"/>
-              </a:rPr>
-              <a:t>生态共建</a:t>
-            </a:r>
-            <a:endParaRPr lang="en-US" sz="1400" dirty="0"/>
-          </a:p>
-        </p:txBody>
-      </p:sp>
-      <p:sp>
-        <p:nvSpPr>
-          <p:cNvPr id="4" name="Text 2"/>
-          <p:cNvSpPr/>
-          <p:nvPr/>
-        </p:nvSpPr>
-        <p:spPr>
-          <a:xfrm>
-            <a:off x="640080" y="1143000"/>
-            <a:ext cx="10881360" cy="1005840"/>
-          </a:xfrm>
-          <a:prstGeom prst="rect">
-            <a:avLst/>
-          </a:prstGeom>
-          <a:noFill/>
-          <a:ln/>
-        </p:spPr>
-        <p:txBody>
-          <a:bodyPr wrap="square" lIns="0" tIns="0" rIns="0" bIns="0" rtlCol="0" anchor="t"/>
-          <a:lstStyle/>
-          <a:p>
-            <a:pPr algn="l" indent="0" marL="0">
-              <a:buNone/>
-            </a:pPr>
-            <a:r>
-              <a:rPr lang="en-US" sz="3400" b="1" dirty="0">
-                <a:solidFill>
-                  <a:srgbClr val="FFFFFF"/>
-                </a:solidFill>
-                <a:latin typeface="Georgia" pitchFamily="34" charset="0"/>
-                <a:ea typeface="Georgia" pitchFamily="34" charset="-122"/>
-                <a:cs typeface="Georgia" pitchFamily="34" charset="-120"/>
-              </a:rPr>
-              <a:t>双引擎：学生 + 退休专家 = 开源人力核心</a:t>
-            </a:r>
-            <a:endParaRPr lang="en-US" sz="3400" dirty="0"/>
-          </a:p>
-        </p:txBody>
-      </p:sp>
-      <p:sp>
-        <p:nvSpPr>
-          <p:cNvPr id="5" name="Shape 3"/>
-          <p:cNvSpPr/>
-          <p:nvPr/>
-        </p:nvSpPr>
-        <p:spPr>
-          <a:xfrm>
-            <a:off x="640080" y="2194560"/>
-            <a:ext cx="5349240" cy="3291840"/>
-          </a:xfrm>
-          <a:prstGeom prst="roundRect">
-            <a:avLst>
-              <a:gd name="adj" fmla="val 2222"/>
-            </a:avLst>
-          </a:prstGeom>
-          <a:solidFill>
-            <a:srgbClr val="1B2C4F"/>
-          </a:solidFill>
-          <a:ln/>
-          <a:effectLst>
-            <a:outerShdw sx="100000" sy="100000" kx="0" ky="0" algn="bl" rotWithShape="0" blurRad="101600" dist="38100" dir="8100000">
-              <a:srgbClr val="000000">
-                <a:alpha val="18000"/>
-              </a:srgbClr>
-            </a:outerShdw>
-          </a:effectLst>
-        </p:spPr>
-      </p:sp>
-      <p:sp>
-        <p:nvSpPr>
-          <p:cNvPr id="6" name="Shape 4"/>
-          <p:cNvSpPr/>
-          <p:nvPr/>
-        </p:nvSpPr>
-        <p:spPr>
-          <a:xfrm>
-            <a:off x="640080" y="2194560"/>
-            <a:ext cx="128016" cy="3291840"/>
-          </a:xfrm>
-          <a:prstGeom prst="rect">
-            <a:avLst/>
-          </a:prstGeom>
-          <a:solidFill>
-            <a:srgbClr val="22B8CF"/>
-          </a:solidFill>
-          <a:ln/>
-        </p:spPr>
-      </p:sp>
-      <p:sp>
-        <p:nvSpPr>
-          <p:cNvPr id="7" name="Shape 5"/>
-          <p:cNvSpPr/>
-          <p:nvPr/>
-        </p:nvSpPr>
-        <p:spPr>
-          <a:xfrm>
-            <a:off x="1005840" y="2560320"/>
-            <a:ext cx="914400" cy="914400"/>
-          </a:xfrm>
-          <a:prstGeom prst="ellipse">
-            <a:avLst/>
-          </a:prstGeom>
-          <a:solidFill>
-            <a:srgbClr val="2E75B6"/>
-          </a:solidFill>
-          <a:ln/>
-        </p:spPr>
-      </p:sp>
-      <p:pic>
-        <p:nvPicPr>
-          <p:cNvPr id="8" name="Image 0" descr="preencoded.png">    </p:cNvPr>
-          <p:cNvPicPr>
-            <a:picLocks noChangeAspect="1"/>
-          </p:cNvPicPr>
-          <p:nvPr/>
-        </p:nvPicPr>
-        <p:blipFill>
-          <a:blip r:embed="rId1"/>
-          <a:stretch>
-            <a:fillRect/>
-          </a:stretch>
-        </p:blipFill>
-        <p:spPr>
-          <a:xfrm>
-            <a:off x="1234440" y="2788920"/>
-            <a:ext cx="457200" cy="457200"/>
-          </a:xfrm>
-          <a:prstGeom prst="rect">
-            <a:avLst/>
-          </a:prstGeom>
-        </p:spPr>
-      </p:pic>
-      <p:sp>
-        <p:nvSpPr>
-          <p:cNvPr id="9" name="Text 6"/>
-          <p:cNvSpPr/>
-          <p:nvPr/>
-        </p:nvSpPr>
-        <p:spPr>
-          <a:xfrm>
-            <a:off x="2103120" y="2606040"/>
-            <a:ext cx="3703320" cy="457200"/>
-          </a:xfrm>
-          <a:prstGeom prst="rect">
-            <a:avLst/>
-          </a:prstGeom>
-          <a:noFill/>
-          <a:ln/>
-        </p:spPr>
-        <p:txBody>
-          <a:bodyPr wrap="square" lIns="0" tIns="0" rIns="0" bIns="0" rtlCol="0" anchor="ctr"/>
-          <a:lstStyle/>
-          <a:p>
-            <a:pPr algn="l" indent="0" marL="0">
-              <a:buNone/>
-            </a:pPr>
-            <a:r>
-              <a:rPr lang="en-US" sz="2200" b="1" dirty="0">
-                <a:solidFill>
-                  <a:srgbClr val="FFFFFF"/>
-                </a:solidFill>
-                <a:latin typeface="Georgia" pitchFamily="34" charset="0"/>
-                <a:ea typeface="Georgia" pitchFamily="34" charset="-122"/>
-                <a:cs typeface="Georgia" pitchFamily="34" charset="-120"/>
-              </a:rPr>
-              <a:t>学生引擎</a:t>
-            </a:r>
-            <a:endParaRPr lang="en-US" sz="2200" dirty="0"/>
-          </a:p>
-        </p:txBody>
-      </p:sp>
-      <p:sp>
-        <p:nvSpPr>
-          <p:cNvPr id="10" name="Text 7"/>
-          <p:cNvSpPr/>
-          <p:nvPr/>
-        </p:nvSpPr>
-        <p:spPr>
-          <a:xfrm>
-            <a:off x="2103120" y="3108960"/>
-            <a:ext cx="3703320" cy="365760"/>
-          </a:xfrm>
-          <a:prstGeom prst="rect">
-            <a:avLst/>
-          </a:prstGeom>
-          <a:noFill/>
-          <a:ln/>
-        </p:spPr>
-        <p:txBody>
-          <a:bodyPr wrap="square" lIns="0" tIns="0" rIns="0" bIns="0" rtlCol="0" anchor="ctr"/>
-          <a:lstStyle/>
-          <a:p>
-            <a:pPr algn="l" indent="0" marL="0">
-              <a:buNone/>
-            </a:pPr>
-            <a:r>
-              <a:rPr lang="en-US" sz="1400" i="1" dirty="0">
-                <a:solidFill>
-                  <a:srgbClr val="22B8CF"/>
-                </a:solidFill>
-                <a:latin typeface="Calibri" pitchFamily="34" charset="0"/>
-                <a:ea typeface="Calibri" pitchFamily="34" charset="-122"/>
-                <a:cs typeface="Calibri" pitchFamily="34" charset="-120"/>
-              </a:rPr>
-              <a:t>开源贡献生力军</a:t>
-            </a:r>
-            <a:endParaRPr lang="en-US" sz="1400" dirty="0"/>
-          </a:p>
-        </p:txBody>
-      </p:sp>
-      <p:sp>
-        <p:nvSpPr>
-          <p:cNvPr id="11" name="Text 8"/>
-          <p:cNvSpPr/>
-          <p:nvPr/>
-        </p:nvSpPr>
-        <p:spPr>
-          <a:xfrm>
-            <a:off x="1005840" y="3749040"/>
-            <a:ext cx="4617720" cy="1554480"/>
-          </a:xfrm>
-          <a:prstGeom prst="rect">
-            <a:avLst/>
-          </a:prstGeom>
-          <a:noFill/>
-          <a:ln/>
-        </p:spPr>
-        <p:txBody>
-          <a:bodyPr wrap="square" lIns="0" tIns="0" rIns="0" bIns="0" rtlCol="0" anchor="t"/>
-          <a:lstStyle/>
-          <a:p>
-            <a:pPr algn="l" indent="0" marL="0">
-              <a:buNone/>
-            </a:pPr>
-            <a:r>
-              <a:rPr lang="en-US" sz="1450" dirty="0">
-                <a:solidFill>
-                  <a:srgbClr val="CADCFC"/>
-                </a:solidFill>
-                <a:latin typeface="Calibri" pitchFamily="34" charset="0"/>
-                <a:ea typeface="Calibri" pitchFamily="34" charset="-122"/>
-                <a:cs typeface="Calibri" pitchFamily="34" charset="-120"/>
-              </a:rPr>
-              <a:t>光电 / 微电子 / 量子 / 计算方向硕博与本科生。把“自然语言 → GDSII”做成毕设 / 科研课题 / 竞赛题 —— 契合刚需。</a:t>
-            </a:r>
-            <a:endParaRPr lang="en-US" sz="1450" dirty="0"/>
-          </a:p>
-        </p:txBody>
-      </p:sp>
-      <p:sp>
-        <p:nvSpPr>
-          <p:cNvPr id="12" name="Shape 9"/>
-          <p:cNvSpPr/>
-          <p:nvPr/>
-        </p:nvSpPr>
-        <p:spPr>
-          <a:xfrm>
-            <a:off x="6355080" y="2194560"/>
-            <a:ext cx="5349240" cy="3291840"/>
-          </a:xfrm>
-          <a:prstGeom prst="roundRect">
-            <a:avLst>
-              <a:gd name="adj" fmla="val 2222"/>
-            </a:avLst>
-          </a:prstGeom>
-          <a:solidFill>
-            <a:srgbClr val="1B2C4F"/>
-          </a:solidFill>
-          <a:ln/>
-          <a:effectLst>
-            <a:outerShdw sx="100000" sy="100000" kx="0" ky="0" algn="bl" rotWithShape="0" blurRad="101600" dist="38100" dir="8100000">
-              <a:srgbClr val="000000">
-                <a:alpha val="18000"/>
-              </a:srgbClr>
-            </a:outerShdw>
-          </a:effectLst>
-        </p:spPr>
-      </p:sp>
-      <p:sp>
-        <p:nvSpPr>
-          <p:cNvPr id="13" name="Shape 10"/>
-          <p:cNvSpPr/>
-          <p:nvPr/>
-        </p:nvSpPr>
-        <p:spPr>
-          <a:xfrm>
-            <a:off x="6355080" y="2194560"/>
-            <a:ext cx="128016" cy="3291840"/>
-          </a:xfrm>
-          <a:prstGeom prst="rect">
-            <a:avLst/>
-          </a:prstGeom>
-          <a:solidFill>
-            <a:srgbClr val="22B8CF"/>
-          </a:solidFill>
-          <a:ln/>
-        </p:spPr>
-      </p:sp>
-      <p:sp>
-        <p:nvSpPr>
-          <p:cNvPr id="14" name="Shape 11"/>
-          <p:cNvSpPr/>
-          <p:nvPr/>
-        </p:nvSpPr>
-        <p:spPr>
-          <a:xfrm>
-            <a:off x="6720840" y="2560320"/>
-            <a:ext cx="914400" cy="914400"/>
-          </a:xfrm>
-          <a:prstGeom prst="ellipse">
-            <a:avLst/>
-          </a:prstGeom>
-          <a:solidFill>
-            <a:srgbClr val="2E75B6"/>
-          </a:solidFill>
-          <a:ln/>
-        </p:spPr>
-      </p:sp>
-      <p:pic>
-        <p:nvPicPr>
-          <p:cNvPr id="15" name="Image 1" descr="preencoded.png">    </p:cNvPr>
-          <p:cNvPicPr>
-            <a:picLocks noChangeAspect="1"/>
-          </p:cNvPicPr>
-          <p:nvPr/>
-        </p:nvPicPr>
-        <p:blipFill>
-          <a:blip r:embed="rId2"/>
-          <a:stretch>
-            <a:fillRect/>
-          </a:stretch>
-        </p:blipFill>
-        <p:spPr>
-          <a:xfrm>
-            <a:off x="6949440" y="2788920"/>
-            <a:ext cx="457200" cy="457200"/>
-          </a:xfrm>
-          <a:prstGeom prst="rect">
-            <a:avLst/>
-          </a:prstGeom>
-        </p:spPr>
-      </p:pic>
-      <p:sp>
-        <p:nvSpPr>
-          <p:cNvPr id="16" name="Text 12"/>
-          <p:cNvSpPr/>
-          <p:nvPr/>
-        </p:nvSpPr>
-        <p:spPr>
-          <a:xfrm>
-            <a:off x="7818120" y="2606040"/>
-            <a:ext cx="3703320" cy="457200"/>
-          </a:xfrm>
-          <a:prstGeom prst="rect">
-            <a:avLst/>
-          </a:prstGeom>
-          <a:noFill/>
-          <a:ln/>
-        </p:spPr>
-        <p:txBody>
-          <a:bodyPr wrap="square" lIns="0" tIns="0" rIns="0" bIns="0" rtlCol="0" anchor="ctr"/>
-          <a:lstStyle/>
-          <a:p>
-            <a:pPr algn="l" indent="0" marL="0">
-              <a:buNone/>
-            </a:pPr>
-            <a:r>
-              <a:rPr lang="en-US" sz="2200" b="1" dirty="0">
-                <a:solidFill>
-                  <a:srgbClr val="FFFFFF"/>
-                </a:solidFill>
-                <a:latin typeface="Georgia" pitchFamily="34" charset="0"/>
-                <a:ea typeface="Georgia" pitchFamily="34" charset="-122"/>
-                <a:cs typeface="Georgia" pitchFamily="34" charset="-120"/>
-              </a:rPr>
-              <a:t>退休专家引擎</a:t>
-            </a:r>
-            <a:endParaRPr lang="en-US" sz="2200" dirty="0"/>
-          </a:p>
-        </p:txBody>
-      </p:sp>
-      <p:sp>
-        <p:nvSpPr>
-          <p:cNvPr id="17" name="Text 13"/>
-          <p:cNvSpPr/>
-          <p:nvPr/>
-        </p:nvSpPr>
-        <p:spPr>
-          <a:xfrm>
-            <a:off x="7818120" y="3108960"/>
-            <a:ext cx="3703320" cy="365760"/>
-          </a:xfrm>
-          <a:prstGeom prst="rect">
-            <a:avLst/>
-          </a:prstGeom>
-          <a:noFill/>
-          <a:ln/>
-        </p:spPr>
-        <p:txBody>
-          <a:bodyPr wrap="square" lIns="0" tIns="0" rIns="0" bIns="0" rtlCol="0" anchor="ctr"/>
-          <a:lstStyle/>
-          <a:p>
-            <a:pPr algn="l" indent="0" marL="0">
-              <a:buNone/>
-            </a:pPr>
-            <a:r>
-              <a:rPr lang="en-US" sz="1400" i="1" dirty="0">
-                <a:solidFill>
-                  <a:srgbClr val="22B8CF"/>
-                </a:solidFill>
-                <a:latin typeface="Calibri" pitchFamily="34" charset="0"/>
-                <a:ea typeface="Calibri" pitchFamily="34" charset="-122"/>
-                <a:cs typeface="Calibri" pitchFamily="34" charset="-120"/>
-              </a:rPr>
-              <a:t>顾问 / 导师 / 质量背书</a:t>
-            </a:r>
-            <a:endParaRPr lang="en-US" sz="1400" dirty="0"/>
-          </a:p>
-        </p:txBody>
-      </p:sp>
-      <p:sp>
-        <p:nvSpPr>
-          <p:cNvPr id="18" name="Text 14"/>
-          <p:cNvSpPr/>
-          <p:nvPr/>
-        </p:nvSpPr>
-        <p:spPr>
-          <a:xfrm>
-            <a:off x="6720840" y="3749040"/>
-            <a:ext cx="4617720" cy="1554480"/>
-          </a:xfrm>
-          <a:prstGeom prst="rect">
-            <a:avLst/>
-          </a:prstGeom>
-          <a:noFill/>
-          <a:ln/>
-        </p:spPr>
-        <p:txBody>
-          <a:bodyPr wrap="square" lIns="0" tIns="0" rIns="0" bIns="0" rtlCol="0" anchor="t"/>
-          <a:lstStyle/>
-          <a:p>
-            <a:pPr algn="l" indent="0" marL="0">
-              <a:buNone/>
-            </a:pPr>
-            <a:r>
-              <a:rPr lang="en-US" sz="1450" dirty="0">
-                <a:solidFill>
-                  <a:srgbClr val="CADCFC"/>
-                </a:solidFill>
-                <a:latin typeface="Calibri" pitchFamily="34" charset="0"/>
-                <a:ea typeface="Calibri" pitchFamily="34" charset="-122"/>
-                <a:cs typeface="Calibri" pitchFamily="34" charset="-120"/>
-              </a:rPr>
-              <a:t>EDA 老炮、光电半导体退休研究员、高校退休博导。有资源、有情怀、有时间，退休再发挥余热，把关基准、为内核背书。</a:t>
-            </a:r>
-            <a:endParaRPr lang="en-US" sz="1450" dirty="0"/>
-          </a:p>
-        </p:txBody>
-      </p:sp>
-      <p:sp>
-        <p:nvSpPr>
-          <p:cNvPr id="19" name="Text 15"/>
-          <p:cNvSpPr/>
-          <p:nvPr/>
-        </p:nvSpPr>
-        <p:spPr>
-          <a:xfrm>
-            <a:off x="640080" y="6400800"/>
-            <a:ext cx="8229600" cy="274320"/>
-          </a:xfrm>
-          <a:prstGeom prst="rect">
-            <a:avLst/>
-          </a:prstGeom>
-          <a:noFill/>
-          <a:ln/>
-        </p:spPr>
-        <p:txBody>
-          <a:bodyPr wrap="square" lIns="0" tIns="0" rIns="0" bIns="0" rtlCol="0" anchor="ctr"/>
-          <a:lstStyle/>
-          <a:p>
-            <a:pPr algn="l" indent="0" marL="0">
-              <a:buNone/>
-            </a:pPr>
-            <a:r>
-              <a:rPr lang="en-US" sz="1000" dirty="0">
-                <a:solidFill>
-                  <a:srgbClr val="9FB0C9"/>
-                </a:solidFill>
-                <a:latin typeface="Calibri" pitchFamily="34" charset="0"/>
-                <a:ea typeface="Calibri" pitchFamily="34" charset="-122"/>
-                <a:cs typeface="Calibri" pitchFamily="34" charset="-120"/>
-              </a:rPr>
-              <a:t>LDA · 开源 / 自主可控 / Agent 原生 光·量子芯片设计底座</a:t>
-            </a:r>
-            <a:endParaRPr lang="en-US" sz="1000" dirty="0"/>
-          </a:p>
-        </p:txBody>
-      </p:sp>
-      <p:sp>
-        <p:nvSpPr>
-          <p:cNvPr id="20" name="Text 16"/>
-          <p:cNvSpPr/>
-          <p:nvPr/>
-        </p:nvSpPr>
-        <p:spPr>
-          <a:xfrm>
-            <a:off x="11155680" y="6400800"/>
-            <a:ext cx="548640" cy="274320"/>
-          </a:xfrm>
-          <a:prstGeom prst="rect">
-            <a:avLst/>
-          </a:prstGeom>
-          <a:noFill/>
-          <a:ln/>
-        </p:spPr>
-        <p:txBody>
-          <a:bodyPr wrap="square" lIns="0" tIns="0" rIns="0" bIns="0" rtlCol="0" anchor="ctr"/>
-          <a:lstStyle/>
-          <a:p>
-            <a:pPr algn="r" indent="0" marL="0">
-              <a:buNone/>
-            </a:pPr>
-            <a:r>
-              <a:rPr lang="en-US" sz="1000" dirty="0">
-                <a:solidFill>
-                  <a:srgbClr val="9FB0C9"/>
-                </a:solidFill>
-                <a:latin typeface="Calibri" pitchFamily="34" charset="0"/>
-                <a:ea typeface="Calibri" pitchFamily="34" charset="-122"/>
-                <a:cs typeface="Calibri" pitchFamily="34" charset="-120"/>
-              </a:rPr>
-              <a:t>9</a:t>
             </a:r>
             <a:endParaRPr lang="en-US" sz="1000" dirty="0"/>
           </a:p>

--- a/LDA_产业共建路演.pptx
+++ b/LDA_产业共建路演.pptx
@@ -13261,7 +13261,7 @@
                 <a:ea typeface="Georgia" pitchFamily="34" charset="-122"/>
                 <a:cs typeface="Georgia" pitchFamily="34" charset="-120"/>
               </a:rPr>
-              <a:t>主权全链路 GDSII：7 例全部 DRC PASS + LVS ACCEPT（2026-09-21 增补）</a:t>
+              <a:t>主权全链路 GDSII：8 例全部 DRC PASS + LVS ACCEPT（2026-09-21 增补）</a:t>
             </a:r>
             <a:endParaRPr lang="en-US" sz="3400" dirty="0"/>
           </a:p>
@@ -13329,7 +13329,7 @@
                 <a:ea typeface="Georgia" pitchFamily="34" charset="-122"/>
                 <a:cs typeface="Georgia" pitchFamily="34" charset="-120"/>
               </a:rPr>
-              <a:t>7</a:t>
+              <a:t>8</a:t>
             </a:r>
             <a:endParaRPr lang="en-US" sz="3000" dirty="0"/>
           </a:p>
@@ -13368,7 +13368,7 @@
                 <a:ea typeface="Calibri" pitchFamily="34" charset="-122"/>
                 <a:cs typeface="Calibri" pitchFamily="34" charset="-120"/>
               </a:rPr>
-              <a:t>跨 4 类拓扑的已出片版图</a:t>
+              <a:t>跨 5 类拓扑的已出片版图</a:t>
             </a:r>
             <a:endParaRPr lang="en-US" sz="1150" dirty="0"/>
           </a:p>
@@ -16341,6 +16341,348 @@
                           <a:cs typeface="Calibri" pitchFamily="34" charset="-120"/>
                         </a:rPr>
                         <a:t>4.4 KB</a:t>
+                      </a:r>
+                      <a:endParaRPr lang="en-US" sz="1300" dirty="0">
+                        <a:latin typeface="Calibri" charset="0"/>
+                        <a:ea typeface="Calibri" charset="0"/>
+                        <a:cs typeface="Calibri" charset="0"/>
+                      </a:endParaRPr>
+                    </a:p>
+                  </a:txBody>
+                  <a:tcPr marL="91440" marR="91440" marT="45720" marB="45720" anchor="ctr">
+                    <a:lnL w="12700" cap="flat" cmpd="sng" algn="ctr">
+                      <a:solidFill>
+                        <a:srgbClr val="2A3A5C"/>
+                      </a:solidFill>
+                      <a:prstDash val="solid"/>
+                      <a:round/>
+                      <a:headEnd type="none" w="med" len="med"/>
+                      <a:tailEnd type="none" w="med" len="med"/>
+                    </a:lnL>
+                    <a:lnR w="12700" cap="flat" cmpd="sng" algn="ctr">
+                      <a:solidFill>
+                        <a:srgbClr val="2A3A5C"/>
+                      </a:solidFill>
+                      <a:prstDash val="solid"/>
+                      <a:round/>
+                      <a:headEnd type="none" w="med" len="med"/>
+                      <a:tailEnd type="none" w="med" len="med"/>
+                    </a:lnR>
+                    <a:lnT w="12700" cap="flat" cmpd="sng" algn="ctr">
+                      <a:solidFill>
+                        <a:srgbClr val="2A3A5C"/>
+                      </a:solidFill>
+                      <a:prstDash val="solid"/>
+                      <a:round/>
+                      <a:headEnd type="none" w="med" len="med"/>
+                      <a:tailEnd type="none" w="med" len="med"/>
+                    </a:lnT>
+                    <a:lnB w="12700" cap="flat" cmpd="sng" algn="ctr">
+                      <a:solidFill>
+                        <a:srgbClr val="2A3A5C"/>
+                      </a:solidFill>
+                      <a:prstDash val="solid"/>
+                      <a:round/>
+                      <a:headEnd type="none" w="med" len="med"/>
+                      <a:tailEnd type="none" w="med" len="med"/>
+                    </a:lnB>
+                    <a:solidFill>
+                      <a:srgbClr val="1B2C4F"/>
+                    </a:solidFill>
+                  </a:tcPr>
+                </a:tc>
+                <a:tc>
+                  <a:txBody>
+                    <a:bodyPr/>
+                    <a:lstStyle/>
+                    <a:p>
+                      <a:pPr algn="l" indent="0" marL="0">
+                        <a:buNone/>
+                      </a:pPr>
+                      <a:r>
+                        <a:rPr lang="en-US" sz="1300" dirty="0">
+                          <a:solidFill>
+                            <a:srgbClr val="FFFFFF"/>
+                          </a:solidFill>
+                          <a:latin typeface="Calibri" pitchFamily="34" charset="0"/>
+                          <a:ea typeface="Calibri" pitchFamily="34" charset="-122"/>
+                          <a:cs typeface="Calibri" pitchFamily="34" charset="-120"/>
+                        </a:rPr>
+                        <a:t>DRC·LVS 全绿</a:t>
+                      </a:r>
+                      <a:endParaRPr lang="en-US" sz="1300" dirty="0">
+                        <a:latin typeface="Calibri" charset="0"/>
+                        <a:ea typeface="Calibri" charset="0"/>
+                        <a:cs typeface="Calibri" charset="0"/>
+                      </a:endParaRPr>
+                    </a:p>
+                  </a:txBody>
+                  <a:tcPr marL="91440" marR="91440" marT="45720" marB="45720" anchor="ctr">
+                    <a:lnL w="12700" cap="flat" cmpd="sng" algn="ctr">
+                      <a:solidFill>
+                        <a:srgbClr val="2A3A5C"/>
+                      </a:solidFill>
+                      <a:prstDash val="solid"/>
+                      <a:round/>
+                      <a:headEnd type="none" w="med" len="med"/>
+                      <a:tailEnd type="none" w="med" len="med"/>
+                    </a:lnL>
+                    <a:lnR w="12700" cap="flat" cmpd="sng" algn="ctr">
+                      <a:solidFill>
+                        <a:srgbClr val="2A3A5C"/>
+                      </a:solidFill>
+                      <a:prstDash val="solid"/>
+                      <a:round/>
+                      <a:headEnd type="none" w="med" len="med"/>
+                      <a:tailEnd type="none" w="med" len="med"/>
+                    </a:lnR>
+                    <a:lnT w="12700" cap="flat" cmpd="sng" algn="ctr">
+                      <a:solidFill>
+                        <a:srgbClr val="2A3A5C"/>
+                      </a:solidFill>
+                      <a:prstDash val="solid"/>
+                      <a:round/>
+                      <a:headEnd type="none" w="med" len="med"/>
+                      <a:tailEnd type="none" w="med" len="med"/>
+                    </a:lnT>
+                    <a:lnB w="12700" cap="flat" cmpd="sng" algn="ctr">
+                      <a:solidFill>
+                        <a:srgbClr val="2A3A5C"/>
+                      </a:solidFill>
+                      <a:prstDash val="solid"/>
+                      <a:round/>
+                      <a:headEnd type="none" w="med" len="med"/>
+                      <a:tailEnd type="none" w="med" len="med"/>
+                    </a:lnB>
+                    <a:solidFill>
+                      <a:srgbClr val="1B2C4F"/>
+                    </a:solidFill>
+                  </a:tcPr>
+                </a:tc>
+              </a:tr>
+              <a:tr h="0">
+                <a:tc>
+                  <a:txBody>
+                    <a:bodyPr/>
+                    <a:lstStyle/>
+                    <a:p>
+                      <a:pPr algn="l" indent="0" marL="0">
+                        <a:buNone/>
+                      </a:pPr>
+                      <a:r>
+                        <a:rPr lang="en-US" sz="1300" dirty="0">
+                          <a:solidFill>
+                            <a:srgbClr val="FFFFFF"/>
+                          </a:solidFill>
+                          <a:latin typeface="Calibri" pitchFamily="34" charset="0"/>
+                          <a:ea typeface="Calibri" pitchFamily="34" charset="-122"/>
+                          <a:cs typeface="Calibri" pitchFamily="34" charset="-120"/>
+                        </a:rPr>
+                        <a:t>MESH4</a:t>
+                      </a:r>
+                      <a:endParaRPr lang="en-US" sz="1300" dirty="0">
+                        <a:latin typeface="Calibri" charset="0"/>
+                        <a:ea typeface="Calibri" charset="0"/>
+                        <a:cs typeface="Calibri" charset="0"/>
+                      </a:endParaRPr>
+                    </a:p>
+                  </a:txBody>
+                  <a:tcPr marL="91440" marR="91440" marT="45720" marB="45720" anchor="ctr">
+                    <a:lnL w="12700" cap="flat" cmpd="sng" algn="ctr">
+                      <a:solidFill>
+                        <a:srgbClr val="2A3A5C"/>
+                      </a:solidFill>
+                      <a:prstDash val="solid"/>
+                      <a:round/>
+                      <a:headEnd type="none" w="med" len="med"/>
+                      <a:tailEnd type="none" w="med" len="med"/>
+                    </a:lnL>
+                    <a:lnR w="12700" cap="flat" cmpd="sng" algn="ctr">
+                      <a:solidFill>
+                        <a:srgbClr val="2A3A5C"/>
+                      </a:solidFill>
+                      <a:prstDash val="solid"/>
+                      <a:round/>
+                      <a:headEnd type="none" w="med" len="med"/>
+                      <a:tailEnd type="none" w="med" len="med"/>
+                    </a:lnR>
+                    <a:lnT w="12700" cap="flat" cmpd="sng" algn="ctr">
+                      <a:solidFill>
+                        <a:srgbClr val="2A3A5C"/>
+                      </a:solidFill>
+                      <a:prstDash val="solid"/>
+                      <a:round/>
+                      <a:headEnd type="none" w="med" len="med"/>
+                      <a:tailEnd type="none" w="med" len="med"/>
+                    </a:lnT>
+                    <a:lnB w="12700" cap="flat" cmpd="sng" algn="ctr">
+                      <a:solidFill>
+                        <a:srgbClr val="2A3A5C"/>
+                      </a:solidFill>
+                      <a:prstDash val="solid"/>
+                      <a:round/>
+                      <a:headEnd type="none" w="med" len="med"/>
+                      <a:tailEnd type="none" w="med" len="med"/>
+                    </a:lnB>
+                    <a:solidFill>
+                      <a:srgbClr val="1B2C4F"/>
+                    </a:solidFill>
+                  </a:tcPr>
+                </a:tc>
+                <a:tc>
+                  <a:txBody>
+                    <a:bodyPr/>
+                    <a:lstStyle/>
+                    <a:p>
+                      <a:pPr algn="l" indent="0" marL="0">
+                        <a:buNone/>
+                      </a:pPr>
+                      <a:r>
+                        <a:rPr lang="en-US" sz="1300" dirty="0">
+                          <a:solidFill>
+                            <a:srgbClr val="FFFFFF"/>
+                          </a:solidFill>
+                          <a:latin typeface="Calibri" pitchFamily="34" charset="0"/>
+                          <a:ea typeface="Calibri" pitchFamily="34" charset="-122"/>
+                          <a:cs typeface="Calibri" pitchFamily="34" charset="-120"/>
+                        </a:rPr>
+                        <a:t>4×4 MZI 网格光子计算核</a:t>
+                      </a:r>
+                      <a:endParaRPr lang="en-US" sz="1300" dirty="0">
+                        <a:latin typeface="Calibri" charset="0"/>
+                        <a:ea typeface="Calibri" charset="0"/>
+                        <a:cs typeface="Calibri" charset="0"/>
+                      </a:endParaRPr>
+                    </a:p>
+                  </a:txBody>
+                  <a:tcPr marL="91440" marR="91440" marT="45720" marB="45720" anchor="ctr">
+                    <a:lnL w="12700" cap="flat" cmpd="sng" algn="ctr">
+                      <a:solidFill>
+                        <a:srgbClr val="2A3A5C"/>
+                      </a:solidFill>
+                      <a:prstDash val="solid"/>
+                      <a:round/>
+                      <a:headEnd type="none" w="med" len="med"/>
+                      <a:tailEnd type="none" w="med" len="med"/>
+                    </a:lnL>
+                    <a:lnR w="12700" cap="flat" cmpd="sng" algn="ctr">
+                      <a:solidFill>
+                        <a:srgbClr val="2A3A5C"/>
+                      </a:solidFill>
+                      <a:prstDash val="solid"/>
+                      <a:round/>
+                      <a:headEnd type="none" w="med" len="med"/>
+                      <a:tailEnd type="none" w="med" len="med"/>
+                    </a:lnR>
+                    <a:lnT w="12700" cap="flat" cmpd="sng" algn="ctr">
+                      <a:solidFill>
+                        <a:srgbClr val="2A3A5C"/>
+                      </a:solidFill>
+                      <a:prstDash val="solid"/>
+                      <a:round/>
+                      <a:headEnd type="none" w="med" len="med"/>
+                      <a:tailEnd type="none" w="med" len="med"/>
+                    </a:lnT>
+                    <a:lnB w="12700" cap="flat" cmpd="sng" algn="ctr">
+                      <a:solidFill>
+                        <a:srgbClr val="2A3A5C"/>
+                      </a:solidFill>
+                      <a:prstDash val="solid"/>
+                      <a:round/>
+                      <a:headEnd type="none" w="med" len="med"/>
+                      <a:tailEnd type="none" w="med" len="med"/>
+                    </a:lnB>
+                    <a:solidFill>
+                      <a:srgbClr val="1B2C4F"/>
+                    </a:solidFill>
+                  </a:tcPr>
+                </a:tc>
+                <a:tc>
+                  <a:txBody>
+                    <a:bodyPr/>
+                    <a:lstStyle/>
+                    <a:p>
+                      <a:pPr algn="l" indent="0" marL="0">
+                        <a:buNone/>
+                      </a:pPr>
+                      <a:r>
+                        <a:rPr lang="en-US" sz="1300" dirty="0">
+                          <a:solidFill>
+                            <a:srgbClr val="FFFFFF"/>
+                          </a:solidFill>
+                          <a:latin typeface="Calibri" pitchFamily="34" charset="0"/>
+                          <a:ea typeface="Calibri" pitchFamily="34" charset="-122"/>
+                          <a:cs typeface="Calibri" pitchFamily="34" charset="-120"/>
+                        </a:rPr>
+                        <a:t>14</a:t>
+                      </a:r>
+                      <a:endParaRPr lang="en-US" sz="1300" dirty="0">
+                        <a:latin typeface="Calibri" charset="0"/>
+                        <a:ea typeface="Calibri" charset="0"/>
+                        <a:cs typeface="Calibri" charset="0"/>
+                      </a:endParaRPr>
+                    </a:p>
+                  </a:txBody>
+                  <a:tcPr marL="91440" marR="91440" marT="45720" marB="45720" anchor="ctr">
+                    <a:lnL w="12700" cap="flat" cmpd="sng" algn="ctr">
+                      <a:solidFill>
+                        <a:srgbClr val="2A3A5C"/>
+                      </a:solidFill>
+                      <a:prstDash val="solid"/>
+                      <a:round/>
+                      <a:headEnd type="none" w="med" len="med"/>
+                      <a:tailEnd type="none" w="med" len="med"/>
+                    </a:lnL>
+                    <a:lnR w="12700" cap="flat" cmpd="sng" algn="ctr">
+                      <a:solidFill>
+                        <a:srgbClr val="2A3A5C"/>
+                      </a:solidFill>
+                      <a:prstDash val="solid"/>
+                      <a:round/>
+                      <a:headEnd type="none" w="med" len="med"/>
+                      <a:tailEnd type="none" w="med" len="med"/>
+                    </a:lnR>
+                    <a:lnT w="12700" cap="flat" cmpd="sng" algn="ctr">
+                      <a:solidFill>
+                        <a:srgbClr val="2A3A5C"/>
+                      </a:solidFill>
+                      <a:prstDash val="solid"/>
+                      <a:round/>
+                      <a:headEnd type="none" w="med" len="med"/>
+                      <a:tailEnd type="none" w="med" len="med"/>
+                    </a:lnT>
+                    <a:lnB w="12700" cap="flat" cmpd="sng" algn="ctr">
+                      <a:solidFill>
+                        <a:srgbClr val="2A3A5C"/>
+                      </a:solidFill>
+                      <a:prstDash val="solid"/>
+                      <a:round/>
+                      <a:headEnd type="none" w="med" len="med"/>
+                      <a:tailEnd type="none" w="med" len="med"/>
+                    </a:lnB>
+                    <a:solidFill>
+                      <a:srgbClr val="1B2C4F"/>
+                    </a:solidFill>
+                  </a:tcPr>
+                </a:tc>
+                <a:tc>
+                  <a:txBody>
+                    <a:bodyPr/>
+                    <a:lstStyle/>
+                    <a:p>
+                      <a:pPr algn="l" indent="0" marL="0">
+                        <a:buNone/>
+                      </a:pPr>
+                      <a:r>
+                        <a:rPr lang="en-US" sz="1300" dirty="0">
+                          <a:solidFill>
+                            <a:srgbClr val="FFFFFF"/>
+                          </a:solidFill>
+                          <a:latin typeface="Calibri" pitchFamily="34" charset="0"/>
+                          <a:ea typeface="Calibri" pitchFamily="34" charset="-122"/>
+                          <a:cs typeface="Calibri" pitchFamily="34" charset="-120"/>
+                        </a:rPr>
+                        <a:t>12.5 KB</a:t>
                       </a:r>
                       <a:endParaRPr lang="en-US" sz="1300" dirty="0">
                         <a:latin typeface="Calibri" charset="0"/>

--- a/LDA_产业共建路演.pptx
+++ b/LDA_产业共建路演.pptx
@@ -13261,7 +13261,7 @@
                 <a:ea typeface="Georgia" pitchFamily="34" charset="-122"/>
                 <a:cs typeface="Georgia" pitchFamily="34" charset="-120"/>
               </a:rPr>
-              <a:t>主权全链路 GDSII：8 例全部 DRC PASS + LVS ACCEPT（2026-09-21 增补）</a:t>
+              <a:t>主权全链路 GDSII：9 例全部 DRC PASS + LVS ACCEPT（2026-09-21 增补）</a:t>
             </a:r>
             <a:endParaRPr lang="en-US" sz="3400" dirty="0"/>
           </a:p>
@@ -13329,7 +13329,7 @@
                 <a:ea typeface="Georgia" pitchFamily="34" charset="-122"/>
                 <a:cs typeface="Georgia" pitchFamily="34" charset="-120"/>
               </a:rPr>
-              <a:t>8</a:t>
+              <a:t>9</a:t>
             </a:r>
             <a:endParaRPr lang="en-US" sz="3000" dirty="0"/>
           </a:p>
@@ -13734,7 +13734,7 @@
                         <a:buNone/>
                       </a:pPr>
                       <a:r>
-                        <a:rPr lang="en-US" sz="1300" b="1" dirty="0">
+                        <a:rPr lang="en-US" sz="1200" b="1" dirty="0">
                           <a:solidFill>
                             <a:srgbClr val="FFFFFF"/>
                           </a:solidFill>
@@ -13744,7 +13744,7 @@
                         </a:rPr>
                         <a:t>电路</a:t>
                       </a:r>
-                      <a:endParaRPr lang="en-US" sz="1300" dirty="0">
+                      <a:endParaRPr lang="en-US" sz="1200" dirty="0">
                         <a:latin typeface="Calibri" charset="0"/>
                         <a:ea typeface="Calibri" charset="0"/>
                         <a:cs typeface="Calibri" charset="0"/>
@@ -13802,7 +13802,7 @@
                         <a:buNone/>
                       </a:pPr>
                       <a:r>
-                        <a:rPr lang="en-US" sz="1300" b="1" dirty="0">
+                        <a:rPr lang="en-US" sz="1200" b="1" dirty="0">
                           <a:solidFill>
                             <a:srgbClr val="FFFFFF"/>
                           </a:solidFill>
@@ -13812,7 +13812,7 @@
                         </a:rPr>
                         <a:t>拓扑</a:t>
                       </a:r>
-                      <a:endParaRPr lang="en-US" sz="1300" dirty="0">
+                      <a:endParaRPr lang="en-US" sz="1200" dirty="0">
                         <a:latin typeface="Calibri" charset="0"/>
                         <a:ea typeface="Calibri" charset="0"/>
                         <a:cs typeface="Calibri" charset="0"/>
@@ -13870,7 +13870,7 @@
                         <a:buNone/>
                       </a:pPr>
                       <a:r>
-                        <a:rPr lang="en-US" sz="1300" b="1" dirty="0">
+                        <a:rPr lang="en-US" sz="1200" b="1" dirty="0">
                           <a:solidFill>
                             <a:srgbClr val="FFFFFF"/>
                           </a:solidFill>
@@ -13880,7 +13880,7 @@
                         </a:rPr>
                         <a:t>组件</a:t>
                       </a:r>
-                      <a:endParaRPr lang="en-US" sz="1300" dirty="0">
+                      <a:endParaRPr lang="en-US" sz="1200" dirty="0">
                         <a:latin typeface="Calibri" charset="0"/>
                         <a:ea typeface="Calibri" charset="0"/>
                         <a:cs typeface="Calibri" charset="0"/>
@@ -13938,7 +13938,7 @@
                         <a:buNone/>
                       </a:pPr>
                       <a:r>
-                        <a:rPr lang="en-US" sz="1300" b="1" dirty="0">
+                        <a:rPr lang="en-US" sz="1200" b="1" dirty="0">
                           <a:solidFill>
                             <a:srgbClr val="FFFFFF"/>
                           </a:solidFill>
@@ -13948,7 +13948,7 @@
                         </a:rPr>
                         <a:t>GDS</a:t>
                       </a:r>
-                      <a:endParaRPr lang="en-US" sz="1300" dirty="0">
+                      <a:endParaRPr lang="en-US" sz="1200" dirty="0">
                         <a:latin typeface="Calibri" charset="0"/>
                         <a:ea typeface="Calibri" charset="0"/>
                         <a:cs typeface="Calibri" charset="0"/>
@@ -14006,7 +14006,7 @@
                         <a:buNone/>
                       </a:pPr>
                       <a:r>
-                        <a:rPr lang="en-US" sz="1300" b="1" dirty="0">
+                        <a:rPr lang="en-US" sz="1200" b="1" dirty="0">
                           <a:solidFill>
                             <a:srgbClr val="FFFFFF"/>
                           </a:solidFill>
@@ -14016,7 +14016,7 @@
                         </a:rPr>
                         <a:t>双闸签核</a:t>
                       </a:r>
-                      <a:endParaRPr lang="en-US" sz="1300" dirty="0">
+                      <a:endParaRPr lang="en-US" sz="1200" dirty="0">
                         <a:latin typeface="Calibri" charset="0"/>
                         <a:ea typeface="Calibri" charset="0"/>
                         <a:cs typeface="Calibri" charset="0"/>
@@ -14066,7 +14066,7 @@
                   </a:tcPr>
                 </a:tc>
               </a:tr>
-              <a:tr h="365760">
+              <a:tr h="274320">
                 <a:tc>
                   <a:txBody>
                     <a:bodyPr/>
@@ -14076,7 +14076,7 @@
                         <a:buNone/>
                       </a:pPr>
                       <a:r>
-                        <a:rPr lang="en-US" sz="1300" dirty="0">
+                        <a:rPr lang="en-US" sz="1200" dirty="0">
                           <a:solidFill>
                             <a:srgbClr val="FFFFFF"/>
                           </a:solidFill>
@@ -14086,7 +14086,7 @@
                         </a:rPr>
                         <a:t>C1</a:t>
                       </a:r>
-                      <a:endParaRPr lang="en-US" sz="1300" dirty="0">
+                      <a:endParaRPr lang="en-US" sz="1200" dirty="0">
                         <a:latin typeface="Calibri" charset="0"/>
                         <a:ea typeface="Calibri" charset="0"/>
                         <a:cs typeface="Calibri" charset="0"/>
@@ -14144,7 +14144,7 @@
                         <a:buNone/>
                       </a:pPr>
                       <a:r>
-                        <a:rPr lang="en-US" sz="1300" dirty="0">
+                        <a:rPr lang="en-US" sz="1200" dirty="0">
                           <a:solidFill>
                             <a:srgbClr val="FFFFFF"/>
                           </a:solidFill>
@@ -14154,7 +14154,7 @@
                         </a:rPr>
                         <a:t>2×2 方向耦合器分束器</a:t>
                       </a:r>
-                      <a:endParaRPr lang="en-US" sz="1300" dirty="0">
+                      <a:endParaRPr lang="en-US" sz="1200" dirty="0">
                         <a:latin typeface="Calibri" charset="0"/>
                         <a:ea typeface="Calibri" charset="0"/>
                         <a:cs typeface="Calibri" charset="0"/>
@@ -14212,7 +14212,7 @@
                         <a:buNone/>
                       </a:pPr>
                       <a:r>
-                        <a:rPr lang="en-US" sz="1300" dirty="0">
+                        <a:rPr lang="en-US" sz="1200" dirty="0">
                           <a:solidFill>
                             <a:srgbClr val="FFFFFF"/>
                           </a:solidFill>
@@ -14222,7 +14222,7 @@
                         </a:rPr>
                         <a:t>4</a:t>
                       </a:r>
-                      <a:endParaRPr lang="en-US" sz="1300" dirty="0">
+                      <a:endParaRPr lang="en-US" sz="1200" dirty="0">
                         <a:latin typeface="Calibri" charset="0"/>
                         <a:ea typeface="Calibri" charset="0"/>
                         <a:cs typeface="Calibri" charset="0"/>
@@ -14280,7 +14280,7 @@
                         <a:buNone/>
                       </a:pPr>
                       <a:r>
-                        <a:rPr lang="en-US" sz="1300" dirty="0">
+                        <a:rPr lang="en-US" sz="1200" dirty="0">
                           <a:solidFill>
                             <a:srgbClr val="FFFFFF"/>
                           </a:solidFill>
@@ -14290,7 +14290,7 @@
                         </a:rPr>
                         <a:t>3.6 KB</a:t>
                       </a:r>
-                      <a:endParaRPr lang="en-US" sz="1300" dirty="0">
+                      <a:endParaRPr lang="en-US" sz="1200" dirty="0">
                         <a:latin typeface="Calibri" charset="0"/>
                         <a:ea typeface="Calibri" charset="0"/>
                         <a:cs typeface="Calibri" charset="0"/>
@@ -14348,7 +14348,7 @@
                         <a:buNone/>
                       </a:pPr>
                       <a:r>
-                        <a:rPr lang="en-US" sz="1300" dirty="0">
+                        <a:rPr lang="en-US" sz="1200" dirty="0">
                           <a:solidFill>
                             <a:srgbClr val="FFFFFF"/>
                           </a:solidFill>
@@ -14358,7 +14358,7 @@
                         </a:rPr>
                         <a:t>DRC·LVS 全绿</a:t>
                       </a:r>
-                      <a:endParaRPr lang="en-US" sz="1300" dirty="0">
+                      <a:endParaRPr lang="en-US" sz="1200" dirty="0">
                         <a:latin typeface="Calibri" charset="0"/>
                         <a:ea typeface="Calibri" charset="0"/>
                         <a:cs typeface="Calibri" charset="0"/>
@@ -14408,7 +14408,7 @@
                   </a:tcPr>
                 </a:tc>
               </a:tr>
-              <a:tr h="365760">
+              <a:tr h="274320">
                 <a:tc>
                   <a:txBody>
                     <a:bodyPr/>
@@ -14418,7 +14418,7 @@
                         <a:buNone/>
                       </a:pPr>
                       <a:r>
-                        <a:rPr lang="en-US" sz="1300" dirty="0">
+                        <a:rPr lang="en-US" sz="1200" dirty="0">
                           <a:solidFill>
                             <a:srgbClr val="FFFFFF"/>
                           </a:solidFill>
@@ -14428,7 +14428,7 @@
                         </a:rPr>
                         <a:t>C2</a:t>
                       </a:r>
-                      <a:endParaRPr lang="en-US" sz="1300" dirty="0">
+                      <a:endParaRPr lang="en-US" sz="1200" dirty="0">
                         <a:latin typeface="Calibri" charset="0"/>
                         <a:ea typeface="Calibri" charset="0"/>
                         <a:cs typeface="Calibri" charset="0"/>
@@ -14486,7 +14486,7 @@
                         <a:buNone/>
                       </a:pPr>
                       <a:r>
-                        <a:rPr lang="en-US" sz="1300" dirty="0">
+                        <a:rPr lang="en-US" sz="1200" dirty="0">
                           <a:solidFill>
                             <a:srgbClr val="FFFFFF"/>
                           </a:solidFill>
@@ -14496,7 +14496,7 @@
                         </a:rPr>
                         <a:t>环形 add-drop</a:t>
                       </a:r>
-                      <a:endParaRPr lang="en-US" sz="1300" dirty="0">
+                      <a:endParaRPr lang="en-US" sz="1200" dirty="0">
                         <a:latin typeface="Calibri" charset="0"/>
                         <a:ea typeface="Calibri" charset="0"/>
                         <a:cs typeface="Calibri" charset="0"/>
@@ -14554,7 +14554,7 @@
                         <a:buNone/>
                       </a:pPr>
                       <a:r>
-                        <a:rPr lang="en-US" sz="1300" dirty="0">
+                        <a:rPr lang="en-US" sz="1200" dirty="0">
                           <a:solidFill>
                             <a:srgbClr val="FFFFFF"/>
                           </a:solidFill>
@@ -14564,7 +14564,7 @@
                         </a:rPr>
                         <a:t>4</a:t>
                       </a:r>
-                      <a:endParaRPr lang="en-US" sz="1300" dirty="0">
+                      <a:endParaRPr lang="en-US" sz="1200" dirty="0">
                         <a:latin typeface="Calibri" charset="0"/>
                         <a:ea typeface="Calibri" charset="0"/>
                         <a:cs typeface="Calibri" charset="0"/>
@@ -14622,7 +14622,7 @@
                         <a:buNone/>
                       </a:pPr>
                       <a:r>
-                        <a:rPr lang="en-US" sz="1300" dirty="0">
+                        <a:rPr lang="en-US" sz="1200" dirty="0">
                           <a:solidFill>
                             <a:srgbClr val="FFFFFF"/>
                           </a:solidFill>
@@ -14632,7 +14632,7 @@
                         </a:rPr>
                         <a:t>4.2 KB</a:t>
                       </a:r>
-                      <a:endParaRPr lang="en-US" sz="1300" dirty="0">
+                      <a:endParaRPr lang="en-US" sz="1200" dirty="0">
                         <a:latin typeface="Calibri" charset="0"/>
                         <a:ea typeface="Calibri" charset="0"/>
                         <a:cs typeface="Calibri" charset="0"/>
@@ -14690,7 +14690,7 @@
                         <a:buNone/>
                       </a:pPr>
                       <a:r>
-                        <a:rPr lang="en-US" sz="1300" dirty="0">
+                        <a:rPr lang="en-US" sz="1200" dirty="0">
                           <a:solidFill>
                             <a:srgbClr val="FFFFFF"/>
                           </a:solidFill>
@@ -14700,7 +14700,7 @@
                         </a:rPr>
                         <a:t>DRC·LVS 全绿</a:t>
                       </a:r>
-                      <a:endParaRPr lang="en-US" sz="1300" dirty="0">
+                      <a:endParaRPr lang="en-US" sz="1200" dirty="0">
                         <a:latin typeface="Calibri" charset="0"/>
                         <a:ea typeface="Calibri" charset="0"/>
                         <a:cs typeface="Calibri" charset="0"/>
@@ -14750,7 +14750,7 @@
                   </a:tcPr>
                 </a:tc>
               </a:tr>
-              <a:tr h="365760">
+              <a:tr h="274320">
                 <a:tc>
                   <a:txBody>
                     <a:bodyPr/>
@@ -14760,7 +14760,7 @@
                         <a:buNone/>
                       </a:pPr>
                       <a:r>
-                        <a:rPr lang="en-US" sz="1300" dirty="0">
+                        <a:rPr lang="en-US" sz="1200" dirty="0">
                           <a:solidFill>
                             <a:srgbClr val="FFFFFF"/>
                           </a:solidFill>
@@ -14770,7 +14770,7 @@
                         </a:rPr>
                         <a:t>C3</a:t>
                       </a:r>
-                      <a:endParaRPr lang="en-US" sz="1300" dirty="0">
+                      <a:endParaRPr lang="en-US" sz="1200" dirty="0">
                         <a:latin typeface="Calibri" charset="0"/>
                         <a:ea typeface="Calibri" charset="0"/>
                         <a:cs typeface="Calibri" charset="0"/>
@@ -14828,7 +14828,7 @@
                         <a:buNone/>
                       </a:pPr>
                       <a:r>
-                        <a:rPr lang="en-US" sz="1300" dirty="0">
+                        <a:rPr lang="en-US" sz="1200" dirty="0">
                           <a:solidFill>
                             <a:srgbClr val="FFFFFF"/>
                           </a:solidFill>
@@ -14838,7 +14838,7 @@
                         </a:rPr>
                         <a:t>方向耦合器 + 环形谐振器</a:t>
                       </a:r>
-                      <a:endParaRPr lang="en-US" sz="1300" dirty="0">
+                      <a:endParaRPr lang="en-US" sz="1200" dirty="0">
                         <a:latin typeface="Calibri" charset="0"/>
                         <a:ea typeface="Calibri" charset="0"/>
                         <a:cs typeface="Calibri" charset="0"/>
@@ -14896,7 +14896,7 @@
                         <a:buNone/>
                       </a:pPr>
                       <a:r>
-                        <a:rPr lang="en-US" sz="1300" dirty="0">
+                        <a:rPr lang="en-US" sz="1200" dirty="0">
                           <a:solidFill>
                             <a:srgbClr val="FFFFFF"/>
                           </a:solidFill>
@@ -14906,7 +14906,7 @@
                         </a:rPr>
                         <a:t>6</a:t>
                       </a:r>
-                      <a:endParaRPr lang="en-US" sz="1300" dirty="0">
+                      <a:endParaRPr lang="en-US" sz="1200" dirty="0">
                         <a:latin typeface="Calibri" charset="0"/>
                         <a:ea typeface="Calibri" charset="0"/>
                         <a:cs typeface="Calibri" charset="0"/>
@@ -14964,7 +14964,7 @@
                         <a:buNone/>
                       </a:pPr>
                       <a:r>
-                        <a:rPr lang="en-US" sz="1300" dirty="0">
+                        <a:rPr lang="en-US" sz="1200" dirty="0">
                           <a:solidFill>
                             <a:srgbClr val="FFFFFF"/>
                           </a:solidFill>
@@ -14974,7 +14974,7 @@
                         </a:rPr>
                         <a:t>5.5 KB</a:t>
                       </a:r>
-                      <a:endParaRPr lang="en-US" sz="1300" dirty="0">
+                      <a:endParaRPr lang="en-US" sz="1200" dirty="0">
                         <a:latin typeface="Calibri" charset="0"/>
                         <a:ea typeface="Calibri" charset="0"/>
                         <a:cs typeface="Calibri" charset="0"/>
@@ -15032,7 +15032,7 @@
                         <a:buNone/>
                       </a:pPr>
                       <a:r>
-                        <a:rPr lang="en-US" sz="1300" dirty="0">
+                        <a:rPr lang="en-US" sz="1200" dirty="0">
                           <a:solidFill>
                             <a:srgbClr val="FFFFFF"/>
                           </a:solidFill>
@@ -15042,7 +15042,7 @@
                         </a:rPr>
                         <a:t>DRC·LVS 全绿</a:t>
                       </a:r>
-                      <a:endParaRPr lang="en-US" sz="1300" dirty="0">
+                      <a:endParaRPr lang="en-US" sz="1200" dirty="0">
                         <a:latin typeface="Calibri" charset="0"/>
                         <a:ea typeface="Calibri" charset="0"/>
                         <a:cs typeface="Calibri" charset="0"/>
@@ -15092,7 +15092,7 @@
                   </a:tcPr>
                 </a:tc>
               </a:tr>
-              <a:tr h="365760">
+              <a:tr h="274320">
                 <a:tc>
                   <a:txBody>
                     <a:bodyPr/>
@@ -15102,7 +15102,7 @@
                         <a:buNone/>
                       </a:pPr>
                       <a:r>
-                        <a:rPr lang="en-US" sz="1300" dirty="0">
+                        <a:rPr lang="en-US" sz="1200" dirty="0">
                           <a:solidFill>
                             <a:srgbClr val="FFFFFF"/>
                           </a:solidFill>
@@ -15112,7 +15112,7 @@
                         </a:rPr>
                         <a:t>C4</a:t>
                       </a:r>
-                      <a:endParaRPr lang="en-US" sz="1300" dirty="0">
+                      <a:endParaRPr lang="en-US" sz="1200" dirty="0">
                         <a:latin typeface="Calibri" charset="0"/>
                         <a:ea typeface="Calibri" charset="0"/>
                         <a:cs typeface="Calibri" charset="0"/>
@@ -15170,7 +15170,7 @@
                         <a:buNone/>
                       </a:pPr>
                       <a:r>
-                        <a:rPr lang="en-US" sz="1300" dirty="0">
+                        <a:rPr lang="en-US" sz="1200" dirty="0">
                           <a:solidFill>
                             <a:srgbClr val="FFFFFF"/>
                           </a:solidFill>
@@ -15180,7 +15180,7 @@
                         </a:rPr>
                         <a:t>MMI 1×2 多模干涉</a:t>
                       </a:r>
-                      <a:endParaRPr lang="en-US" sz="1300" dirty="0">
+                      <a:endParaRPr lang="en-US" sz="1200" dirty="0">
                         <a:latin typeface="Calibri" charset="0"/>
                         <a:ea typeface="Calibri" charset="0"/>
                         <a:cs typeface="Calibri" charset="0"/>
@@ -15238,7 +15238,7 @@
                         <a:buNone/>
                       </a:pPr>
                       <a:r>
-                        <a:rPr lang="en-US" sz="1300" dirty="0">
+                        <a:rPr lang="en-US" sz="1200" dirty="0">
                           <a:solidFill>
                             <a:srgbClr val="FFFFFF"/>
                           </a:solidFill>
@@ -15248,7 +15248,7 @@
                         </a:rPr>
                         <a:t>4</a:t>
                       </a:r>
-                      <a:endParaRPr lang="en-US" sz="1300" dirty="0">
+                      <a:endParaRPr lang="en-US" sz="1200" dirty="0">
                         <a:latin typeface="Calibri" charset="0"/>
                         <a:ea typeface="Calibri" charset="0"/>
                         <a:cs typeface="Calibri" charset="0"/>
@@ -15306,7 +15306,7 @@
                         <a:buNone/>
                       </a:pPr>
                       <a:r>
-                        <a:rPr lang="en-US" sz="1300" dirty="0">
+                        <a:rPr lang="en-US" sz="1200" dirty="0">
                           <a:solidFill>
                             <a:srgbClr val="FFFFFF"/>
                           </a:solidFill>
@@ -15316,7 +15316,7 @@
                         </a:rPr>
                         <a:t>5.4 KB</a:t>
                       </a:r>
-                      <a:endParaRPr lang="en-US" sz="1300" dirty="0">
+                      <a:endParaRPr lang="en-US" sz="1200" dirty="0">
                         <a:latin typeface="Calibri" charset="0"/>
                         <a:ea typeface="Calibri" charset="0"/>
                         <a:cs typeface="Calibri" charset="0"/>
@@ -15374,7 +15374,7 @@
                         <a:buNone/>
                       </a:pPr>
                       <a:r>
-                        <a:rPr lang="en-US" sz="1300" dirty="0">
+                        <a:rPr lang="en-US" sz="1200" dirty="0">
                           <a:solidFill>
                             <a:srgbClr val="FFFFFF"/>
                           </a:solidFill>
@@ -15384,7 +15384,7 @@
                         </a:rPr>
                         <a:t>DRC·LVS 全绿</a:t>
                       </a:r>
-                      <a:endParaRPr lang="en-US" sz="1300" dirty="0">
+                      <a:endParaRPr lang="en-US" sz="1200" dirty="0">
                         <a:latin typeface="Calibri" charset="0"/>
                         <a:ea typeface="Calibri" charset="0"/>
                         <a:cs typeface="Calibri" charset="0"/>
@@ -15434,7 +15434,7 @@
                   </a:tcPr>
                 </a:tc>
               </a:tr>
-              <a:tr h="365760">
+              <a:tr h="274320">
                 <a:tc>
                   <a:txBody>
                     <a:bodyPr/>
@@ -15444,7 +15444,7 @@
                         <a:buNone/>
                       </a:pPr>
                       <a:r>
-                        <a:rPr lang="en-US" sz="1300" dirty="0">
+                        <a:rPr lang="en-US" sz="1200" dirty="0">
                           <a:solidFill>
                             <a:srgbClr val="FFFFFF"/>
                           </a:solidFill>
@@ -15454,7 +15454,7 @@
                         </a:rPr>
                         <a:t>C5</a:t>
                       </a:r>
-                      <a:endParaRPr lang="en-US" sz="1300" dirty="0">
+                      <a:endParaRPr lang="en-US" sz="1200" dirty="0">
                         <a:latin typeface="Calibri" charset="0"/>
                         <a:ea typeface="Calibri" charset="0"/>
                         <a:cs typeface="Calibri" charset="0"/>
@@ -15512,7 +15512,7 @@
                         <a:buNone/>
                       </a:pPr>
                       <a:r>
-                        <a:rPr lang="en-US" sz="1300" dirty="0">
+                        <a:rPr lang="en-US" sz="1200" dirty="0">
                           <a:solidFill>
                             <a:srgbClr val="FFFFFF"/>
                           </a:solidFill>
@@ -15522,7 +15522,7 @@
                         </a:rPr>
                         <a:t>对称 Y 分支 1×2</a:t>
                       </a:r>
-                      <a:endParaRPr lang="en-US" sz="1300" dirty="0">
+                      <a:endParaRPr lang="en-US" sz="1200" dirty="0">
                         <a:latin typeface="Calibri" charset="0"/>
                         <a:ea typeface="Calibri" charset="0"/>
                         <a:cs typeface="Calibri" charset="0"/>
@@ -15580,7 +15580,7 @@
                         <a:buNone/>
                       </a:pPr>
                       <a:r>
-                        <a:rPr lang="en-US" sz="1300" dirty="0">
+                        <a:rPr lang="en-US" sz="1200" dirty="0">
                           <a:solidFill>
                             <a:srgbClr val="FFFFFF"/>
                           </a:solidFill>
@@ -15590,7 +15590,7 @@
                         </a:rPr>
                         <a:t>4</a:t>
                       </a:r>
-                      <a:endParaRPr lang="en-US" sz="1300" dirty="0">
+                      <a:endParaRPr lang="en-US" sz="1200" dirty="0">
                         <a:latin typeface="Calibri" charset="0"/>
                         <a:ea typeface="Calibri" charset="0"/>
                         <a:cs typeface="Calibri" charset="0"/>
@@ -15648,7 +15648,7 @@
                         <a:buNone/>
                       </a:pPr>
                       <a:r>
-                        <a:rPr lang="en-US" sz="1300" dirty="0">
+                        <a:rPr lang="en-US" sz="1200" dirty="0">
                           <a:solidFill>
                             <a:srgbClr val="FFFFFF"/>
                           </a:solidFill>
@@ -15658,7 +15658,7 @@
                         </a:rPr>
                         <a:t>4.2 KB</a:t>
                       </a:r>
-                      <a:endParaRPr lang="en-US" sz="1300" dirty="0">
+                      <a:endParaRPr lang="en-US" sz="1200" dirty="0">
                         <a:latin typeface="Calibri" charset="0"/>
                         <a:ea typeface="Calibri" charset="0"/>
                         <a:cs typeface="Calibri" charset="0"/>
@@ -15716,7 +15716,7 @@
                         <a:buNone/>
                       </a:pPr>
                       <a:r>
-                        <a:rPr lang="en-US" sz="1300" dirty="0">
+                        <a:rPr lang="en-US" sz="1200" dirty="0">
                           <a:solidFill>
                             <a:srgbClr val="FFFFFF"/>
                           </a:solidFill>
@@ -15726,7 +15726,7 @@
                         </a:rPr>
                         <a:t>DRC·LVS 全绿</a:t>
                       </a:r>
-                      <a:endParaRPr lang="en-US" sz="1300" dirty="0">
+                      <a:endParaRPr lang="en-US" sz="1200" dirty="0">
                         <a:latin typeface="Calibri" charset="0"/>
                         <a:ea typeface="Calibri" charset="0"/>
                         <a:cs typeface="Calibri" charset="0"/>
@@ -15776,7 +15776,7 @@
                   </a:tcPr>
                 </a:tc>
               </a:tr>
-              <a:tr h="365760">
+              <a:tr h="274320">
                 <a:tc>
                   <a:txBody>
                     <a:bodyPr/>
@@ -15786,7 +15786,7 @@
                         <a:buNone/>
                       </a:pPr>
                       <a:r>
-                        <a:rPr lang="en-US" sz="1300" dirty="0">
+                        <a:rPr lang="en-US" sz="1200" dirty="0">
                           <a:solidFill>
                             <a:srgbClr val="FFFFFF"/>
                           </a:solidFill>
@@ -15796,7 +15796,7 @@
                         </a:rPr>
                         <a:t>C6</a:t>
                       </a:r>
-                      <a:endParaRPr lang="en-US" sz="1300" dirty="0">
+                      <a:endParaRPr lang="en-US" sz="1200" dirty="0">
                         <a:latin typeface="Calibri" charset="0"/>
                         <a:ea typeface="Calibri" charset="0"/>
                         <a:cs typeface="Calibri" charset="0"/>
@@ -15854,7 +15854,7 @@
                         <a:buNone/>
                       </a:pPr>
                       <a:r>
-                        <a:rPr lang="en-US" sz="1300" dirty="0">
+                        <a:rPr lang="en-US" sz="1200" dirty="0">
                           <a:solidFill>
                             <a:srgbClr val="FFFFFF"/>
                           </a:solidFill>
@@ -15864,7 +15864,7 @@
                         </a:rPr>
                         <a:t>Mach-Zehnder 干涉仪 2×2</a:t>
                       </a:r>
-                      <a:endParaRPr lang="en-US" sz="1300" dirty="0">
+                      <a:endParaRPr lang="en-US" sz="1200" dirty="0">
                         <a:latin typeface="Calibri" charset="0"/>
                         <a:ea typeface="Calibri" charset="0"/>
                         <a:cs typeface="Calibri" charset="0"/>
@@ -15922,7 +15922,7 @@
                         <a:buNone/>
                       </a:pPr>
                       <a:r>
-                        <a:rPr lang="en-US" sz="1300" dirty="0">
+                        <a:rPr lang="en-US" sz="1200" dirty="0">
                           <a:solidFill>
                             <a:srgbClr val="FFFFFF"/>
                           </a:solidFill>
@@ -15932,7 +15932,7 @@
                         </a:rPr>
                         <a:t>7</a:t>
                       </a:r>
-                      <a:endParaRPr lang="en-US" sz="1300" dirty="0">
+                      <a:endParaRPr lang="en-US" sz="1200" dirty="0">
                         <a:latin typeface="Calibri" charset="0"/>
                         <a:ea typeface="Calibri" charset="0"/>
                         <a:cs typeface="Calibri" charset="0"/>
@@ -15990,7 +15990,7 @@
                         <a:buNone/>
                       </a:pPr>
                       <a:r>
-                        <a:rPr lang="en-US" sz="1300" dirty="0">
+                        <a:rPr lang="en-US" sz="1200" dirty="0">
                           <a:solidFill>
                             <a:srgbClr val="FFFFFF"/>
                           </a:solidFill>
@@ -16000,7 +16000,7 @@
                         </a:rPr>
                         <a:t>3.9 KB</a:t>
                       </a:r>
-                      <a:endParaRPr lang="en-US" sz="1300" dirty="0">
+                      <a:endParaRPr lang="en-US" sz="1200" dirty="0">
                         <a:latin typeface="Calibri" charset="0"/>
                         <a:ea typeface="Calibri" charset="0"/>
                         <a:cs typeface="Calibri" charset="0"/>
@@ -16058,7 +16058,7 @@
                         <a:buNone/>
                       </a:pPr>
                       <a:r>
-                        <a:rPr lang="en-US" sz="1300" dirty="0">
+                        <a:rPr lang="en-US" sz="1200" dirty="0">
                           <a:solidFill>
                             <a:srgbClr val="FFFFFF"/>
                           </a:solidFill>
@@ -16068,7 +16068,7 @@
                         </a:rPr>
                         <a:t>DRC·LVS 全绿</a:t>
                       </a:r>
-                      <a:endParaRPr lang="en-US" sz="1300" dirty="0">
+                      <a:endParaRPr lang="en-US" sz="1200" dirty="0">
                         <a:latin typeface="Calibri" charset="0"/>
                         <a:ea typeface="Calibri" charset="0"/>
                         <a:cs typeface="Calibri" charset="0"/>
@@ -16118,7 +16118,7 @@
                   </a:tcPr>
                 </a:tc>
               </a:tr>
-              <a:tr h="365760">
+              <a:tr h="274320">
                 <a:tc>
                   <a:txBody>
                     <a:bodyPr/>
@@ -16128,7 +16128,7 @@
                         <a:buNone/>
                       </a:pPr>
                       <a:r>
-                        <a:rPr lang="en-US" sz="1300" dirty="0">
+                        <a:rPr lang="en-US" sz="1200" dirty="0">
                           <a:solidFill>
                             <a:srgbClr val="FFFFFF"/>
                           </a:solidFill>
@@ -16138,7 +16138,7 @@
                         </a:rPr>
                         <a:t>C7</a:t>
                       </a:r>
-                      <a:endParaRPr lang="en-US" sz="1300" dirty="0">
+                      <a:endParaRPr lang="en-US" sz="1200" dirty="0">
                         <a:latin typeface="Calibri" charset="0"/>
                         <a:ea typeface="Calibri" charset="0"/>
                         <a:cs typeface="Calibri" charset="0"/>
@@ -16196,7 +16196,7 @@
                         <a:buNone/>
                       </a:pPr>
                       <a:r>
-                        <a:rPr lang="en-US" sz="1300" dirty="0">
+                        <a:rPr lang="en-US" sz="1200" dirty="0">
                           <a:solidFill>
                             <a:srgbClr val="FFFFFF"/>
                           </a:solidFill>
@@ -16206,7 +16206,7 @@
                         </a:rPr>
                         <a:t>Bragg 反射镜透射线</a:t>
                       </a:r>
-                      <a:endParaRPr lang="en-US" sz="1300" dirty="0">
+                      <a:endParaRPr lang="en-US" sz="1200" dirty="0">
                         <a:latin typeface="Calibri" charset="0"/>
                         <a:ea typeface="Calibri" charset="0"/>
                         <a:cs typeface="Calibri" charset="0"/>
@@ -16264,7 +16264,7 @@
                         <a:buNone/>
                       </a:pPr>
                       <a:r>
-                        <a:rPr lang="en-US" sz="1300" dirty="0">
+                        <a:rPr lang="en-US" sz="1200" dirty="0">
                           <a:solidFill>
                             <a:srgbClr val="FFFFFF"/>
                           </a:solidFill>
@@ -16274,7 +16274,7 @@
                         </a:rPr>
                         <a:t>3</a:t>
                       </a:r>
-                      <a:endParaRPr lang="en-US" sz="1300" dirty="0">
+                      <a:endParaRPr lang="en-US" sz="1200" dirty="0">
                         <a:latin typeface="Calibri" charset="0"/>
                         <a:ea typeface="Calibri" charset="0"/>
                         <a:cs typeface="Calibri" charset="0"/>
@@ -16332,7 +16332,7 @@
                         <a:buNone/>
                       </a:pPr>
                       <a:r>
-                        <a:rPr lang="en-US" sz="1300" dirty="0">
+                        <a:rPr lang="en-US" sz="1200" dirty="0">
                           <a:solidFill>
                             <a:srgbClr val="FFFFFF"/>
                           </a:solidFill>
@@ -16342,7 +16342,7 @@
                         </a:rPr>
                         <a:t>4.4 KB</a:t>
                       </a:r>
-                      <a:endParaRPr lang="en-US" sz="1300" dirty="0">
+                      <a:endParaRPr lang="en-US" sz="1200" dirty="0">
                         <a:latin typeface="Calibri" charset="0"/>
                         <a:ea typeface="Calibri" charset="0"/>
                         <a:cs typeface="Calibri" charset="0"/>
@@ -16400,7 +16400,7 @@
                         <a:buNone/>
                       </a:pPr>
                       <a:r>
-                        <a:rPr lang="en-US" sz="1300" dirty="0">
+                        <a:rPr lang="en-US" sz="1200" dirty="0">
                           <a:solidFill>
                             <a:srgbClr val="FFFFFF"/>
                           </a:solidFill>
@@ -16410,7 +16410,7 @@
                         </a:rPr>
                         <a:t>DRC·LVS 全绿</a:t>
                       </a:r>
-                      <a:endParaRPr lang="en-US" sz="1300" dirty="0">
+                      <a:endParaRPr lang="en-US" sz="1200" dirty="0">
                         <a:latin typeface="Calibri" charset="0"/>
                         <a:ea typeface="Calibri" charset="0"/>
                         <a:cs typeface="Calibri" charset="0"/>
@@ -16460,7 +16460,7 @@
                   </a:tcPr>
                 </a:tc>
               </a:tr>
-              <a:tr h="0">
+              <a:tr h="274320">
                 <a:tc>
                   <a:txBody>
                     <a:bodyPr/>
@@ -16470,7 +16470,7 @@
                         <a:buNone/>
                       </a:pPr>
                       <a:r>
-                        <a:rPr lang="en-US" sz="1300" dirty="0">
+                        <a:rPr lang="en-US" sz="1200" dirty="0">
                           <a:solidFill>
                             <a:srgbClr val="FFFFFF"/>
                           </a:solidFill>
@@ -16480,7 +16480,7 @@
                         </a:rPr>
                         <a:t>MESH4</a:t>
                       </a:r>
-                      <a:endParaRPr lang="en-US" sz="1300" dirty="0">
+                      <a:endParaRPr lang="en-US" sz="1200" dirty="0">
                         <a:latin typeface="Calibri" charset="0"/>
                         <a:ea typeface="Calibri" charset="0"/>
                         <a:cs typeface="Calibri" charset="0"/>
@@ -16538,7 +16538,7 @@
                         <a:buNone/>
                       </a:pPr>
                       <a:r>
-                        <a:rPr lang="en-US" sz="1300" dirty="0">
+                        <a:rPr lang="en-US" sz="1200" dirty="0">
                           <a:solidFill>
                             <a:srgbClr val="FFFFFF"/>
                           </a:solidFill>
@@ -16548,7 +16548,7 @@
                         </a:rPr>
                         <a:t>4×4 MZI 网格光子计算核</a:t>
                       </a:r>
-                      <a:endParaRPr lang="en-US" sz="1300" dirty="0">
+                      <a:endParaRPr lang="en-US" sz="1200" dirty="0">
                         <a:latin typeface="Calibri" charset="0"/>
                         <a:ea typeface="Calibri" charset="0"/>
                         <a:cs typeface="Calibri" charset="0"/>
@@ -16606,7 +16606,7 @@
                         <a:buNone/>
                       </a:pPr>
                       <a:r>
-                        <a:rPr lang="en-US" sz="1300" dirty="0">
+                        <a:rPr lang="en-US" sz="1200" dirty="0">
                           <a:solidFill>
                             <a:srgbClr val="FFFFFF"/>
                           </a:solidFill>
@@ -16616,7 +16616,7 @@
                         </a:rPr>
                         <a:t>14</a:t>
                       </a:r>
-                      <a:endParaRPr lang="en-US" sz="1300" dirty="0">
+                      <a:endParaRPr lang="en-US" sz="1200" dirty="0">
                         <a:latin typeface="Calibri" charset="0"/>
                         <a:ea typeface="Calibri" charset="0"/>
                         <a:cs typeface="Calibri" charset="0"/>
@@ -16674,7 +16674,7 @@
                         <a:buNone/>
                       </a:pPr>
                       <a:r>
-                        <a:rPr lang="en-US" sz="1300" dirty="0">
+                        <a:rPr lang="en-US" sz="1200" dirty="0">
                           <a:solidFill>
                             <a:srgbClr val="FFFFFF"/>
                           </a:solidFill>
@@ -16684,7 +16684,7 @@
                         </a:rPr>
                         <a:t>12.5 KB</a:t>
                       </a:r>
-                      <a:endParaRPr lang="en-US" sz="1300" dirty="0">
+                      <a:endParaRPr lang="en-US" sz="1200" dirty="0">
                         <a:latin typeface="Calibri" charset="0"/>
                         <a:ea typeface="Calibri" charset="0"/>
                         <a:cs typeface="Calibri" charset="0"/>
@@ -16742,7 +16742,7 @@
                         <a:buNone/>
                       </a:pPr>
                       <a:r>
-                        <a:rPr lang="en-US" sz="1300" dirty="0">
+                        <a:rPr lang="en-US" sz="1200" dirty="0">
                           <a:solidFill>
                             <a:srgbClr val="FFFFFF"/>
                           </a:solidFill>
@@ -16752,7 +16752,349 @@
                         </a:rPr>
                         <a:t>DRC·LVS 全绿</a:t>
                       </a:r>
-                      <a:endParaRPr lang="en-US" sz="1300" dirty="0">
+                      <a:endParaRPr lang="en-US" sz="1200" dirty="0">
+                        <a:latin typeface="Calibri" charset="0"/>
+                        <a:ea typeface="Calibri" charset="0"/>
+                        <a:cs typeface="Calibri" charset="0"/>
+                      </a:endParaRPr>
+                    </a:p>
+                  </a:txBody>
+                  <a:tcPr marL="91440" marR="91440" marT="45720" marB="45720" anchor="ctr">
+                    <a:lnL w="12700" cap="flat" cmpd="sng" algn="ctr">
+                      <a:solidFill>
+                        <a:srgbClr val="2A3A5C"/>
+                      </a:solidFill>
+                      <a:prstDash val="solid"/>
+                      <a:round/>
+                      <a:headEnd type="none" w="med" len="med"/>
+                      <a:tailEnd type="none" w="med" len="med"/>
+                    </a:lnL>
+                    <a:lnR w="12700" cap="flat" cmpd="sng" algn="ctr">
+                      <a:solidFill>
+                        <a:srgbClr val="2A3A5C"/>
+                      </a:solidFill>
+                      <a:prstDash val="solid"/>
+                      <a:round/>
+                      <a:headEnd type="none" w="med" len="med"/>
+                      <a:tailEnd type="none" w="med" len="med"/>
+                    </a:lnR>
+                    <a:lnT w="12700" cap="flat" cmpd="sng" algn="ctr">
+                      <a:solidFill>
+                        <a:srgbClr val="2A3A5C"/>
+                      </a:solidFill>
+                      <a:prstDash val="solid"/>
+                      <a:round/>
+                      <a:headEnd type="none" w="med" len="med"/>
+                      <a:tailEnd type="none" w="med" len="med"/>
+                    </a:lnT>
+                    <a:lnB w="12700" cap="flat" cmpd="sng" algn="ctr">
+                      <a:solidFill>
+                        <a:srgbClr val="2A3A5C"/>
+                      </a:solidFill>
+                      <a:prstDash val="solid"/>
+                      <a:round/>
+                      <a:headEnd type="none" w="med" len="med"/>
+                      <a:tailEnd type="none" w="med" len="med"/>
+                    </a:lnB>
+                    <a:solidFill>
+                      <a:srgbClr val="1B2C4F"/>
+                    </a:solidFill>
+                  </a:tcPr>
+                </a:tc>
+              </a:tr>
+              <a:tr h="274320">
+                <a:tc>
+                  <a:txBody>
+                    <a:bodyPr/>
+                    <a:lstStyle/>
+                    <a:p>
+                      <a:pPr algn="l" indent="0" marL="0">
+                        <a:buNone/>
+                      </a:pPr>
+                      <a:r>
+                        <a:rPr lang="en-US" sz="1200" dirty="0">
+                          <a:solidFill>
+                            <a:srgbClr val="FFFFFF"/>
+                          </a:solidFill>
+                          <a:latin typeface="Calibri" pitchFamily="34" charset="0"/>
+                          <a:ea typeface="Calibri" pitchFamily="34" charset="-122"/>
+                          <a:cs typeface="Calibri" pitchFamily="34" charset="-120"/>
+                        </a:rPr>
+                        <a:t>MESH8</a:t>
+                      </a:r>
+                      <a:endParaRPr lang="en-US" sz="1200" dirty="0">
+                        <a:latin typeface="Calibri" charset="0"/>
+                        <a:ea typeface="Calibri" charset="0"/>
+                        <a:cs typeface="Calibri" charset="0"/>
+                      </a:endParaRPr>
+                    </a:p>
+                  </a:txBody>
+                  <a:tcPr marL="91440" marR="91440" marT="45720" marB="45720" anchor="ctr">
+                    <a:lnL w="12700" cap="flat" cmpd="sng" algn="ctr">
+                      <a:solidFill>
+                        <a:srgbClr val="2A3A5C"/>
+                      </a:solidFill>
+                      <a:prstDash val="solid"/>
+                      <a:round/>
+                      <a:headEnd type="none" w="med" len="med"/>
+                      <a:tailEnd type="none" w="med" len="med"/>
+                    </a:lnL>
+                    <a:lnR w="12700" cap="flat" cmpd="sng" algn="ctr">
+                      <a:solidFill>
+                        <a:srgbClr val="2A3A5C"/>
+                      </a:solidFill>
+                      <a:prstDash val="solid"/>
+                      <a:round/>
+                      <a:headEnd type="none" w="med" len="med"/>
+                      <a:tailEnd type="none" w="med" len="med"/>
+                    </a:lnR>
+                    <a:lnT w="12700" cap="flat" cmpd="sng" algn="ctr">
+                      <a:solidFill>
+                        <a:srgbClr val="2A3A5C"/>
+                      </a:solidFill>
+                      <a:prstDash val="solid"/>
+                      <a:round/>
+                      <a:headEnd type="none" w="med" len="med"/>
+                      <a:tailEnd type="none" w="med" len="med"/>
+                    </a:lnT>
+                    <a:lnB w="12700" cap="flat" cmpd="sng" algn="ctr">
+                      <a:solidFill>
+                        <a:srgbClr val="2A3A5C"/>
+                      </a:solidFill>
+                      <a:prstDash val="solid"/>
+                      <a:round/>
+                      <a:headEnd type="none" w="med" len="med"/>
+                      <a:tailEnd type="none" w="med" len="med"/>
+                    </a:lnB>
+                    <a:solidFill>
+                      <a:srgbClr val="1B2C4F"/>
+                    </a:solidFill>
+                  </a:tcPr>
+                </a:tc>
+                <a:tc>
+                  <a:txBody>
+                    <a:bodyPr/>
+                    <a:lstStyle/>
+                    <a:p>
+                      <a:pPr algn="l" indent="0" marL="0">
+                        <a:buNone/>
+                      </a:pPr>
+                      <a:r>
+                        <a:rPr lang="en-US" sz="1200" dirty="0">
+                          <a:solidFill>
+                            <a:srgbClr val="FFFFFF"/>
+                          </a:solidFill>
+                          <a:latin typeface="Calibri" pitchFamily="34" charset="0"/>
+                          <a:ea typeface="Calibri" pitchFamily="34" charset="-122"/>
+                          <a:cs typeface="Calibri" pitchFamily="34" charset="-120"/>
+                        </a:rPr>
+                        <a:t>8×8 MZI 网格光子计算核</a:t>
+                      </a:r>
+                      <a:endParaRPr lang="en-US" sz="1200" dirty="0">
+                        <a:latin typeface="Calibri" charset="0"/>
+                        <a:ea typeface="Calibri" charset="0"/>
+                        <a:cs typeface="Calibri" charset="0"/>
+                      </a:endParaRPr>
+                    </a:p>
+                  </a:txBody>
+                  <a:tcPr marL="91440" marR="91440" marT="45720" marB="45720" anchor="ctr">
+                    <a:lnL w="12700" cap="flat" cmpd="sng" algn="ctr">
+                      <a:solidFill>
+                        <a:srgbClr val="2A3A5C"/>
+                      </a:solidFill>
+                      <a:prstDash val="solid"/>
+                      <a:round/>
+                      <a:headEnd type="none" w="med" len="med"/>
+                      <a:tailEnd type="none" w="med" len="med"/>
+                    </a:lnL>
+                    <a:lnR w="12700" cap="flat" cmpd="sng" algn="ctr">
+                      <a:solidFill>
+                        <a:srgbClr val="2A3A5C"/>
+                      </a:solidFill>
+                      <a:prstDash val="solid"/>
+                      <a:round/>
+                      <a:headEnd type="none" w="med" len="med"/>
+                      <a:tailEnd type="none" w="med" len="med"/>
+                    </a:lnR>
+                    <a:lnT w="12700" cap="flat" cmpd="sng" algn="ctr">
+                      <a:solidFill>
+                        <a:srgbClr val="2A3A5C"/>
+                      </a:solidFill>
+                      <a:prstDash val="solid"/>
+                      <a:round/>
+                      <a:headEnd type="none" w="med" len="med"/>
+                      <a:tailEnd type="none" w="med" len="med"/>
+                    </a:lnT>
+                    <a:lnB w="12700" cap="flat" cmpd="sng" algn="ctr">
+                      <a:solidFill>
+                        <a:srgbClr val="2A3A5C"/>
+                      </a:solidFill>
+                      <a:prstDash val="solid"/>
+                      <a:round/>
+                      <a:headEnd type="none" w="med" len="med"/>
+                      <a:tailEnd type="none" w="med" len="med"/>
+                    </a:lnB>
+                    <a:solidFill>
+                      <a:srgbClr val="1B2C4F"/>
+                    </a:solidFill>
+                  </a:tcPr>
+                </a:tc>
+                <a:tc>
+                  <a:txBody>
+                    <a:bodyPr/>
+                    <a:lstStyle/>
+                    <a:p>
+                      <a:pPr algn="l" indent="0" marL="0">
+                        <a:buNone/>
+                      </a:pPr>
+                      <a:r>
+                        <a:rPr lang="en-US" sz="1200" dirty="0">
+                          <a:solidFill>
+                            <a:srgbClr val="FFFFFF"/>
+                          </a:solidFill>
+                          <a:latin typeface="Calibri" pitchFamily="34" charset="0"/>
+                          <a:ea typeface="Calibri" pitchFamily="34" charset="-122"/>
+                          <a:cs typeface="Calibri" pitchFamily="34" charset="-120"/>
+                        </a:rPr>
+                        <a:t>44</a:t>
+                      </a:r>
+                      <a:endParaRPr lang="en-US" sz="1200" dirty="0">
+                        <a:latin typeface="Calibri" charset="0"/>
+                        <a:ea typeface="Calibri" charset="0"/>
+                        <a:cs typeface="Calibri" charset="0"/>
+                      </a:endParaRPr>
+                    </a:p>
+                  </a:txBody>
+                  <a:tcPr marL="91440" marR="91440" marT="45720" marB="45720" anchor="ctr">
+                    <a:lnL w="12700" cap="flat" cmpd="sng" algn="ctr">
+                      <a:solidFill>
+                        <a:srgbClr val="2A3A5C"/>
+                      </a:solidFill>
+                      <a:prstDash val="solid"/>
+                      <a:round/>
+                      <a:headEnd type="none" w="med" len="med"/>
+                      <a:tailEnd type="none" w="med" len="med"/>
+                    </a:lnL>
+                    <a:lnR w="12700" cap="flat" cmpd="sng" algn="ctr">
+                      <a:solidFill>
+                        <a:srgbClr val="2A3A5C"/>
+                      </a:solidFill>
+                      <a:prstDash val="solid"/>
+                      <a:round/>
+                      <a:headEnd type="none" w="med" len="med"/>
+                      <a:tailEnd type="none" w="med" len="med"/>
+                    </a:lnR>
+                    <a:lnT w="12700" cap="flat" cmpd="sng" algn="ctr">
+                      <a:solidFill>
+                        <a:srgbClr val="2A3A5C"/>
+                      </a:solidFill>
+                      <a:prstDash val="solid"/>
+                      <a:round/>
+                      <a:headEnd type="none" w="med" len="med"/>
+                      <a:tailEnd type="none" w="med" len="med"/>
+                    </a:lnT>
+                    <a:lnB w="12700" cap="flat" cmpd="sng" algn="ctr">
+                      <a:solidFill>
+                        <a:srgbClr val="2A3A5C"/>
+                      </a:solidFill>
+                      <a:prstDash val="solid"/>
+                      <a:round/>
+                      <a:headEnd type="none" w="med" len="med"/>
+                      <a:tailEnd type="none" w="med" len="med"/>
+                    </a:lnB>
+                    <a:solidFill>
+                      <a:srgbClr val="1B2C4F"/>
+                    </a:solidFill>
+                  </a:tcPr>
+                </a:tc>
+                <a:tc>
+                  <a:txBody>
+                    <a:bodyPr/>
+                    <a:lstStyle/>
+                    <a:p>
+                      <a:pPr algn="l" indent="0" marL="0">
+                        <a:buNone/>
+                      </a:pPr>
+                      <a:r>
+                        <a:rPr lang="en-US" sz="1200" dirty="0">
+                          <a:solidFill>
+                            <a:srgbClr val="FFFFFF"/>
+                          </a:solidFill>
+                          <a:latin typeface="Calibri" pitchFamily="34" charset="0"/>
+                          <a:ea typeface="Calibri" pitchFamily="34" charset="-122"/>
+                          <a:cs typeface="Calibri" pitchFamily="34" charset="-120"/>
+                        </a:rPr>
+                        <a:t>32.4 KB</a:t>
+                      </a:r>
+                      <a:endParaRPr lang="en-US" sz="1200" dirty="0">
+                        <a:latin typeface="Calibri" charset="0"/>
+                        <a:ea typeface="Calibri" charset="0"/>
+                        <a:cs typeface="Calibri" charset="0"/>
+                      </a:endParaRPr>
+                    </a:p>
+                  </a:txBody>
+                  <a:tcPr marL="91440" marR="91440" marT="45720" marB="45720" anchor="ctr">
+                    <a:lnL w="12700" cap="flat" cmpd="sng" algn="ctr">
+                      <a:solidFill>
+                        <a:srgbClr val="2A3A5C"/>
+                      </a:solidFill>
+                      <a:prstDash val="solid"/>
+                      <a:round/>
+                      <a:headEnd type="none" w="med" len="med"/>
+                      <a:tailEnd type="none" w="med" len="med"/>
+                    </a:lnL>
+                    <a:lnR w="12700" cap="flat" cmpd="sng" algn="ctr">
+                      <a:solidFill>
+                        <a:srgbClr val="2A3A5C"/>
+                      </a:solidFill>
+                      <a:prstDash val="solid"/>
+                      <a:round/>
+                      <a:headEnd type="none" w="med" len="med"/>
+                      <a:tailEnd type="none" w="med" len="med"/>
+                    </a:lnR>
+                    <a:lnT w="12700" cap="flat" cmpd="sng" algn="ctr">
+                      <a:solidFill>
+                        <a:srgbClr val="2A3A5C"/>
+                      </a:solidFill>
+                      <a:prstDash val="solid"/>
+                      <a:round/>
+                      <a:headEnd type="none" w="med" len="med"/>
+                      <a:tailEnd type="none" w="med" len="med"/>
+                    </a:lnT>
+                    <a:lnB w="12700" cap="flat" cmpd="sng" algn="ctr">
+                      <a:solidFill>
+                        <a:srgbClr val="2A3A5C"/>
+                      </a:solidFill>
+                      <a:prstDash val="solid"/>
+                      <a:round/>
+                      <a:headEnd type="none" w="med" len="med"/>
+                      <a:tailEnd type="none" w="med" len="med"/>
+                    </a:lnB>
+                    <a:solidFill>
+                      <a:srgbClr val="1B2C4F"/>
+                    </a:solidFill>
+                  </a:tcPr>
+                </a:tc>
+                <a:tc>
+                  <a:txBody>
+                    <a:bodyPr/>
+                    <a:lstStyle/>
+                    <a:p>
+                      <a:pPr algn="l" indent="0" marL="0">
+                        <a:buNone/>
+                      </a:pPr>
+                      <a:r>
+                        <a:rPr lang="en-US" sz="1200" dirty="0">
+                          <a:solidFill>
+                            <a:srgbClr val="FFFFFF"/>
+                          </a:solidFill>
+                          <a:latin typeface="Calibri" pitchFamily="34" charset="0"/>
+                          <a:ea typeface="Calibri" pitchFamily="34" charset="-122"/>
+                          <a:cs typeface="Calibri" pitchFamily="34" charset="-120"/>
+                        </a:rPr>
+                        <a:t>DRC·LVS 全绿</a:t>
+                      </a:r>
+                      <a:endParaRPr lang="en-US" sz="1200" dirty="0">
                         <a:latin typeface="Calibri" charset="0"/>
                         <a:ea typeface="Calibri" charset="0"/>
                         <a:cs typeface="Calibri" charset="0"/>
